--- a/Dispute Resolution/Dispute Resolution Process Flow.pptx
+++ b/Dispute Resolution/Dispute Resolution Process Flow.pptx
@@ -17284,6 +17284,1015 @@
           </a:graphicData>
         </a:graphic>
       </p:graphicFrame>
+      <p:sp>
+        <p:nvSpPr>
+          <p:cNvPr id="973" name="Rounded Rectangle 972"/>
+          <p:cNvSpPr/>
+          <p:nvPr/>
+        </p:nvSpPr>
+        <p:spPr>
+          <a:xfrm>
+            <a:off x="460000" y="2500000"/>
+            <a:ext cx="1260000" cy="720000"/>
+          </a:xfrm>
+          <a:prstGeom prst="roundRect">
+            <a:avLst>
+              <a:gd name="adj" fmla="val 10000"/>
+            </a:avLst>
+          </a:prstGeom>
+          <a:noFill/>
+          <a:ln w="12700">
+            <a:solidFill>
+              <a:srgbClr val="BFBFBF"/>
+            </a:solidFill>
+          </a:ln>
+          <a:effectLst/>
+        </p:spPr>
+        <p:style>
+          <a:lnRef idx="1">
+            <a:schemeClr val="accent1"/>
+          </a:lnRef>
+          <a:fillRef idx="3">
+            <a:schemeClr val="accent1"/>
+          </a:fillRef>
+          <a:effectRef idx="2">
+            <a:schemeClr val="accent1"/>
+          </a:effectRef>
+          <a:fontRef idx="minor">
+            <a:schemeClr val="lt1"/>
+          </a:fontRef>
+        </p:style>
+        <p:txBody>
+          <a:bodyPr rtlCol="0" anchor="ctr" wrap="square" lIns="45720" rIns="45720" tIns="36576" bIns="36576"/>
+          <a:lstStyle/>
+          <a:p>
+            <a:pPr algn="ctr"/>
+            <a:r>
+              <a:rPr sz="900" b="1" i="0">
+                <a:solidFill>
+                  <a:srgbClr val="404040"/>
+                </a:solidFill>
+                <a:latin typeface="Segoe UI"/>
+              </a:rPr>
+              <a:t>Receive case from Stage 1</a:t>
+            </a:r>
+          </a:p>
+        </p:txBody>
+      </p:sp>
+      <p:sp>
+        <p:nvSpPr>
+          <p:cNvPr id="974" name="Rounded Rectangle 973"/>
+          <p:cNvSpPr/>
+          <p:nvPr/>
+        </p:nvSpPr>
+        <p:spPr>
+          <a:xfrm>
+            <a:off x="2110000" y="2500000"/>
+            <a:ext cx="1260000" cy="720000"/>
+          </a:xfrm>
+          <a:prstGeom prst="roundRect">
+            <a:avLst>
+              <a:gd name="adj" fmla="val 10000"/>
+            </a:avLst>
+          </a:prstGeom>
+          <a:noFill/>
+          <a:ln w="12700">
+            <a:solidFill>
+              <a:srgbClr val="BFBFBF"/>
+            </a:solidFill>
+          </a:ln>
+          <a:effectLst/>
+        </p:spPr>
+        <p:style>
+          <a:lnRef idx="1">
+            <a:schemeClr val="accent1"/>
+          </a:lnRef>
+          <a:fillRef idx="3">
+            <a:schemeClr val="accent1"/>
+          </a:fillRef>
+          <a:effectRef idx="2">
+            <a:schemeClr val="accent1"/>
+          </a:effectRef>
+          <a:fontRef idx="minor">
+            <a:schemeClr val="lt1"/>
+          </a:fontRef>
+        </p:style>
+        <p:txBody>
+          <a:bodyPr rtlCol="0" anchor="ctr" wrap="square" lIns="45720" rIns="45720" tIns="36576" bIns="36576"/>
+          <a:lstStyle/>
+          <a:p>
+            <a:pPr algn="ctr"/>
+            <a:r>
+              <a:rPr sz="900" b="1" i="0">
+                <a:solidFill>
+                  <a:srgbClr val="404040"/>
+                </a:solidFill>
+                <a:latin typeface="Segoe UI"/>
+              </a:rPr>
+              <a:t>Review cardholder statement &amp; transaction data</a:t>
+            </a:r>
+          </a:p>
+        </p:txBody>
+      </p:sp>
+      <p:sp>
+        <p:nvSpPr>
+          <p:cNvPr id="975" name="Diamond 974"/>
+          <p:cNvSpPr/>
+          <p:nvPr/>
+        </p:nvSpPr>
+        <p:spPr>
+          <a:xfrm>
+            <a:off x="3760000" y="2425660"/>
+            <a:ext cx="1296000" cy="868680"/>
+          </a:xfrm>
+          <a:prstGeom prst="diamond">
+            <a:avLst/>
+          </a:prstGeom>
+          <a:solidFill>
+            <a:srgbClr val="FFFFFF"/>
+          </a:solidFill>
+          <a:ln w="12700">
+            <a:solidFill>
+              <a:srgbClr val="BFBFBF"/>
+            </a:solidFill>
+          </a:ln>
+          <a:effectLst/>
+        </p:spPr>
+        <p:style>
+          <a:lnRef idx="1">
+            <a:schemeClr val="accent1"/>
+          </a:lnRef>
+          <a:fillRef idx="3">
+            <a:schemeClr val="accent1"/>
+          </a:fillRef>
+          <a:effectRef idx="2">
+            <a:schemeClr val="accent1"/>
+          </a:effectRef>
+          <a:fontRef idx="minor">
+            <a:schemeClr val="lt1"/>
+          </a:fontRef>
+        </p:style>
+        <p:txBody>
+          <a:bodyPr rtlCol="0" anchor="ctr" wrap="square" lIns="0" rIns="0" tIns="36576" bIns="36576"/>
+          <a:lstStyle/>
+          <a:p>
+            <a:pPr algn="ctr"/>
+            <a:r>
+              <a:rPr sz="900" b="1" i="0">
+                <a:solidFill>
+                  <a:srgbClr val="404040"/>
+                </a:solidFill>
+                <a:latin typeface="Segoe UI"/>
+              </a:rPr>
+              <a:t>Evidence needed?</a:t>
+            </a:r>
+          </a:p>
+        </p:txBody>
+      </p:sp>
+      <p:sp>
+        <p:nvSpPr>
+          <p:cNvPr id="976" name="Rounded Rectangle 975"/>
+          <p:cNvSpPr/>
+          <p:nvPr/>
+        </p:nvSpPr>
+        <p:spPr>
+          <a:xfrm>
+            <a:off x="5580000" y="2500000"/>
+            <a:ext cx="1260000" cy="720000"/>
+          </a:xfrm>
+          <a:prstGeom prst="roundRect">
+            <a:avLst>
+              <a:gd name="adj" fmla="val 10000"/>
+            </a:avLst>
+          </a:prstGeom>
+          <a:noFill/>
+          <a:ln w="12700">
+            <a:solidFill>
+              <a:srgbClr val="BFBFBF"/>
+            </a:solidFill>
+          </a:ln>
+          <a:effectLst/>
+        </p:spPr>
+        <p:style>
+          <a:lnRef idx="1">
+            <a:schemeClr val="accent1"/>
+          </a:lnRef>
+          <a:fillRef idx="3">
+            <a:schemeClr val="accent1"/>
+          </a:fillRef>
+          <a:effectRef idx="2">
+            <a:schemeClr val="accent1"/>
+          </a:effectRef>
+          <a:fontRef idx="minor">
+            <a:schemeClr val="lt1"/>
+          </a:fontRef>
+        </p:style>
+        <p:txBody>
+          <a:bodyPr rtlCol="0" anchor="ctr" wrap="square" lIns="45720" rIns="45720" tIns="36576" bIns="36576"/>
+          <a:lstStyle/>
+          <a:p>
+            <a:pPr algn="ctr"/>
+            <a:r>
+              <a:rPr sz="900" b="1" i="0">
+                <a:solidFill>
+                  <a:srgbClr val="404040"/>
+                </a:solidFill>
+                <a:latin typeface="Segoe UI"/>
+              </a:rPr>
+              <a:t>Validate dispute eligibility &amp; assign reason code</a:t>
+            </a:r>
+          </a:p>
+        </p:txBody>
+      </p:sp>
+      <p:sp>
+        <p:nvSpPr>
+          <p:cNvPr id="977" name="Diamond 976"/>
+          <p:cNvSpPr/>
+          <p:nvPr/>
+        </p:nvSpPr>
+        <p:spPr>
+          <a:xfrm>
+            <a:off x="7400000" y="2425660"/>
+            <a:ext cx="1296000" cy="868680"/>
+          </a:xfrm>
+          <a:prstGeom prst="diamond">
+            <a:avLst/>
+          </a:prstGeom>
+          <a:solidFill>
+            <a:srgbClr val="FFFFFF"/>
+          </a:solidFill>
+          <a:ln w="12700">
+            <a:solidFill>
+              <a:srgbClr val="BFBFBF"/>
+            </a:solidFill>
+          </a:ln>
+          <a:effectLst/>
+        </p:spPr>
+        <p:style>
+          <a:lnRef idx="1">
+            <a:schemeClr val="accent1"/>
+          </a:lnRef>
+          <a:fillRef idx="3">
+            <a:schemeClr val="accent1"/>
+          </a:fillRef>
+          <a:effectRef idx="2">
+            <a:schemeClr val="accent1"/>
+          </a:effectRef>
+          <a:fontRef idx="minor">
+            <a:schemeClr val="lt1"/>
+          </a:fontRef>
+        </p:style>
+        <p:txBody>
+          <a:bodyPr rtlCol="0" anchor="ctr" wrap="square" lIns="0" rIns="0" tIns="36576" bIns="36576"/>
+          <a:lstStyle/>
+          <a:p>
+            <a:pPr algn="ctr"/>
+            <a:r>
+              <a:rPr sz="900" b="1" i="0">
+                <a:solidFill>
+                  <a:srgbClr val="404040"/>
+                </a:solidFill>
+                <a:latin typeface="Segoe UI"/>
+              </a:rPr>
+              <a:t>Eligible under reason code?</a:t>
+            </a:r>
+          </a:p>
+        </p:txBody>
+      </p:sp>
+      <p:sp>
+        <p:nvSpPr>
+          <p:cNvPr id="978" name="Rounded Rectangle 977"/>
+          <p:cNvSpPr/>
+          <p:nvPr/>
+        </p:nvSpPr>
+        <p:spPr>
+          <a:xfrm>
+            <a:off x="9400000" y="2500000"/>
+            <a:ext cx="1260000" cy="720000"/>
+          </a:xfrm>
+          <a:prstGeom prst="roundRect">
+            <a:avLst>
+              <a:gd name="adj" fmla="val 10000"/>
+            </a:avLst>
+          </a:prstGeom>
+          <a:noFill/>
+          <a:ln w="12700">
+            <a:solidFill>
+              <a:srgbClr val="BFBFBF"/>
+            </a:solidFill>
+          </a:ln>
+          <a:effectLst/>
+        </p:spPr>
+        <p:style>
+          <a:lnRef idx="1">
+            <a:schemeClr val="accent1"/>
+          </a:lnRef>
+          <a:fillRef idx="3">
+            <a:schemeClr val="accent1"/>
+          </a:fillRef>
+          <a:effectRef idx="2">
+            <a:schemeClr val="accent1"/>
+          </a:effectRef>
+          <a:fontRef idx="minor">
+            <a:schemeClr val="lt1"/>
+          </a:fontRef>
+        </p:style>
+        <p:txBody>
+          <a:bodyPr rtlCol="0" anchor="ctr" wrap="square" lIns="45720" rIns="45720" tIns="36576" bIns="36576"/>
+          <a:lstStyle/>
+          <a:p>
+            <a:pPr algn="ctr"/>
+            <a:r>
+              <a:rPr sz="900" b="1" i="0">
+                <a:solidFill>
+                  <a:srgbClr val="404040"/>
+                </a:solidFill>
+                <a:latin typeface="Segoe UI"/>
+              </a:rPr>
+              <a:t>Assess potential liability &amp; recovery options</a:t>
+            </a:r>
+          </a:p>
+        </p:txBody>
+      </p:sp>
+      <p:sp>
+        <p:nvSpPr>
+          <p:cNvPr id="979" name="Rounded Rectangle 978"/>
+          <p:cNvSpPr/>
+          <p:nvPr/>
+        </p:nvSpPr>
+        <p:spPr>
+          <a:xfrm>
+            <a:off x="3660000" y="4000000"/>
+            <a:ext cx="1260000" cy="720000"/>
+          </a:xfrm>
+          <a:prstGeom prst="roundRect">
+            <a:avLst>
+              <a:gd name="adj" fmla="val 10000"/>
+            </a:avLst>
+          </a:prstGeom>
+          <a:solidFill>
+            <a:srgbClr val="EDDBFB">
+              <a:alpha val="56863"/>
+            </a:srgbClr>
+          </a:solidFill>
+          <a:ln w="12700">
+            <a:solidFill>
+              <a:srgbClr val="9B40EA"/>
+            </a:solidFill>
+          </a:ln>
+          <a:effectLst/>
+        </p:spPr>
+        <p:style>
+          <a:lnRef idx="1">
+            <a:schemeClr val="accent1"/>
+          </a:lnRef>
+          <a:fillRef idx="3">
+            <a:schemeClr val="accent1"/>
+          </a:fillRef>
+          <a:effectRef idx="2">
+            <a:schemeClr val="accent1"/>
+          </a:effectRef>
+          <a:fontRef idx="minor">
+            <a:schemeClr val="lt1"/>
+          </a:fontRef>
+        </p:style>
+        <p:txBody>
+          <a:bodyPr rtlCol="0" anchor="ctr" wrap="square" lIns="45720" rIns="45720" tIns="36576" bIns="36576"/>
+          <a:lstStyle/>
+          <a:p>
+            <a:pPr algn="ctr"/>
+            <a:r>
+              <a:rPr sz="900" b="1" i="0">
+                <a:solidFill>
+                  <a:srgbClr val="404040"/>
+                </a:solidFill>
+                <a:latin typeface="Segoe UI"/>
+              </a:rPr>
+              <a:t>Request missing info &amp; evidence from cardholder</a:t>
+            </a:r>
+          </a:p>
+        </p:txBody>
+      </p:sp>
+      <p:sp>
+        <p:nvSpPr>
+          <p:cNvPr id="980" name="Oval 979"/>
+          <p:cNvSpPr/>
+          <p:nvPr/>
+        </p:nvSpPr>
+        <p:spPr>
+          <a:xfrm>
+            <a:off x="7904000" y="4060000"/>
+            <a:ext cx="288000" cy="288000"/>
+          </a:xfrm>
+          <a:prstGeom prst="ellipse">
+            <a:avLst/>
+          </a:prstGeom>
+          <a:solidFill>
+            <a:srgbClr val="BFBFBF"/>
+          </a:solidFill>
+          <a:ln>
+            <a:noFill/>
+          </a:ln>
+          <a:effectLst/>
+        </p:spPr>
+        <p:style>
+          <a:lnRef idx="1">
+            <a:schemeClr val="accent1"/>
+          </a:lnRef>
+          <a:fillRef idx="3">
+            <a:schemeClr val="accent1"/>
+          </a:fillRef>
+          <a:effectRef idx="2">
+            <a:schemeClr val="accent1"/>
+          </a:effectRef>
+          <a:fontRef idx="minor">
+            <a:schemeClr val="lt1"/>
+          </a:fontRef>
+        </p:style>
+        <p:txBody>
+          <a:bodyPr rtlCol="0" anchor="ctr"/>
+          <a:lstStyle/>
+          <a:p>
+            <a:pPr algn="ctr"/>
+          </a:p>
+        </p:txBody>
+      </p:sp>
+      <p:sp>
+        <p:nvSpPr>
+          <p:cNvPr id="981" name="TextBox 980"/>
+          <p:cNvSpPr txBox="1"/>
+          <p:nvPr/>
+        </p:nvSpPr>
+        <p:spPr>
+          <a:xfrm>
+            <a:off x="8284000" y="4010000"/>
+            <a:ext cx="1700000" cy="430000"/>
+          </a:xfrm>
+          <a:prstGeom prst="rect">
+            <a:avLst/>
+          </a:prstGeom>
+          <a:noFill/>
+        </p:spPr>
+        <p:txBody>
+          <a:bodyPr wrap="square" lIns="45720" rIns="45720" tIns="36576" bIns="36576" anchor="ctr">
+            <a:spAutoFit/>
+          </a:bodyPr>
+          <a:lstStyle/>
+          <a:p>
+            <a:pPr algn="ctr"/>
+            <a:r>
+              <a:rPr sz="900" b="1" i="0">
+                <a:solidFill>
+                  <a:srgbClr val="404040"/>
+                </a:solidFill>
+                <a:latin typeface="Segoe UI"/>
+              </a:rPr>
+              <a:t>Not eligible; deny and
+communicate to cardholder</a:t>
+            </a:r>
+          </a:p>
+        </p:txBody>
+      </p:sp>
+      <p:grpSp>
+        <p:nvGrpSpPr>
+          <p:cNvPr id="9001" name="Handoff"/>
+          <p:cNvGrpSpPr/>
+          <p:nvPr/>
+        </p:nvGrpSpPr>
+        <p:grpSpPr>
+          <a:xfrm>
+            <a:off x="10960000" y="2734000"/>
+            <a:ext cx="252000" cy="252000"/>
+            <a:chOff x="10960000" y="2734000"/>
+            <a:chExt cx="252000" cy="252000"/>
+          </a:xfrm>
+        </p:grpSpPr>
+        <p:sp>
+          <p:nvSpPr>
+            <p:cNvPr id="9002" name="hoffc"/>
+            <p:cNvSpPr/>
+            <p:nvPr/>
+          </p:nvSpPr>
+          <p:spPr>
+            <a:xfrm>
+              <a:off x="10960000" y="2734000"/>
+              <a:ext cx="252000" cy="252000"/>
+            </a:xfrm>
+            <a:prstGeom prst="ellipse">
+              <a:avLst/>
+            </a:prstGeom>
+            <a:solidFill>
+              <a:srgbClr val="9DD4CF"/>
+            </a:solidFill>
+            <a:ln>
+              <a:noFill/>
+            </a:ln>
+          </p:spPr>
+          <p:txBody>
+            <a:bodyPr/>
+            <a:lstStyle/>
+            <a:p>
+              <a:endParaRPr lang="en-US"/>
+            </a:p>
+          </p:txBody>
+        </p:sp>
+        <p:sp>
+          <p:nvSpPr>
+            <p:cNvPr id="9003" name="hoffa"/>
+            <p:cNvSpPr/>
+            <p:nvPr/>
+          </p:nvSpPr>
+          <p:spPr>
+            <a:xfrm>
+              <a:off x="11010316" y="2797821"/>
+              <a:ext cx="161665" cy="124358"/>
+            </a:xfrm>
+            <a:prstGeom prst="rightArrow">
+              <a:avLst>
+                <a:gd name="adj1" fmla="val 50000"/>
+                <a:gd name="adj2" fmla="val 50000"/>
+              </a:avLst>
+            </a:prstGeom>
+            <a:solidFill>
+              <a:srgbClr val="FFFFFF"/>
+            </a:solidFill>
+            <a:ln>
+              <a:noFill/>
+            </a:ln>
+          </p:spPr>
+          <p:txBody>
+            <a:bodyPr/>
+            <a:lstStyle/>
+            <a:p>
+              <a:endParaRPr lang="en-US"/>
+            </a:p>
+          </p:txBody>
+        </p:sp>
+      </p:grpSp>
+      <p:cxnSp>
+        <p:nvCxnSpPr>
+          <p:cNvPr id="9004" name="Connector 9003"/>
+          <p:cNvCxnSpPr/>
+          <p:nvPr/>
+        </p:nvCxnSpPr>
+        <p:spPr>
+          <a:xfrm>
+            <a:off x="1720000" y="2860000"/>
+            <a:ext cx="390000" cy="0"/>
+          </a:xfrm>
+          <a:prstGeom prst="line">
+            <a:avLst/>
+          </a:prstGeom>
+          <a:ln w="19050">
+            <a:solidFill>
+              <a:srgbClr val="9B9B9B"/>
+            </a:solidFill>
+            <a:tailEnd type="triangle" w="med" len="med"/>
+          </a:ln>
+        </p:spPr>
+        <p:style>
+          <a:lnRef idx="2">
+            <a:schemeClr val="accent1"/>
+          </a:lnRef>
+          <a:fillRef idx="0">
+            <a:schemeClr val="accent1"/>
+          </a:fillRef>
+          <a:effectRef idx="1">
+            <a:schemeClr val="accent1"/>
+          </a:effectRef>
+          <a:fontRef idx="minor">
+            <a:schemeClr val="tx1"/>
+          </a:fontRef>
+        </p:style>
+      </p:cxnSp>
+      <p:cxnSp>
+        <p:nvCxnSpPr>
+          <p:cNvPr id="9005" name="Connector 9004"/>
+          <p:cNvCxnSpPr/>
+          <p:nvPr/>
+        </p:nvCxnSpPr>
+        <p:spPr>
+          <a:xfrm>
+            <a:off x="3370000" y="2860000"/>
+            <a:ext cx="390000" cy="0"/>
+          </a:xfrm>
+          <a:prstGeom prst="line">
+            <a:avLst/>
+          </a:prstGeom>
+          <a:ln w="19050">
+            <a:solidFill>
+              <a:srgbClr val="9B9B9B"/>
+            </a:solidFill>
+            <a:tailEnd type="triangle" w="med" len="med"/>
+          </a:ln>
+        </p:spPr>
+        <p:style>
+          <a:lnRef idx="2">
+            <a:schemeClr val="accent1"/>
+          </a:lnRef>
+          <a:fillRef idx="0">
+            <a:schemeClr val="accent1"/>
+          </a:fillRef>
+          <a:effectRef idx="1">
+            <a:schemeClr val="accent1"/>
+          </a:effectRef>
+          <a:fontRef idx="minor">
+            <a:schemeClr val="tx1"/>
+          </a:fontRef>
+        </p:style>
+      </p:cxnSp>
+      <p:cxnSp>
+        <p:nvCxnSpPr>
+          <p:cNvPr id="9006" name="Connector 9005"/>
+          <p:cNvCxnSpPr/>
+          <p:nvPr/>
+        </p:nvCxnSpPr>
+        <p:spPr>
+          <a:xfrm flipH="1">
+            <a:off x="4290000" y="3294340"/>
+            <a:ext cx="118000" cy="705660"/>
+          </a:xfrm>
+          <a:prstGeom prst="bentConnector3">
+            <a:avLst/>
+          </a:prstGeom>
+          <a:ln w="19050">
+            <a:solidFill>
+              <a:srgbClr val="9B9B9B"/>
+            </a:solidFill>
+            <a:tailEnd type="triangle" w="med" len="med"/>
+          </a:ln>
+        </p:spPr>
+        <p:style>
+          <a:lnRef idx="2">
+            <a:schemeClr val="accent1"/>
+          </a:lnRef>
+          <a:fillRef idx="0">
+            <a:schemeClr val="accent1"/>
+          </a:fillRef>
+          <a:effectRef idx="1">
+            <a:schemeClr val="accent1"/>
+          </a:effectRef>
+          <a:fontRef idx="minor">
+            <a:schemeClr val="tx1"/>
+          </a:fontRef>
+        </p:style>
+      </p:cxnSp>
+      <p:sp>
+        <p:nvSpPr>
+          <p:cNvPr id="9007" name="TextBox 9006"/>
+          <p:cNvSpPr txBox="1"/>
+          <p:nvPr/>
+        </p:nvSpPr>
+        <p:spPr>
+          <a:xfrm>
+            <a:off x="4448000" y="3324340"/>
+            <a:ext cx="620000" cy="260000"/>
+          </a:xfrm>
+          <a:prstGeom prst="rect">
+            <a:avLst/>
+          </a:prstGeom>
+          <a:noFill/>
+        </p:spPr>
+        <p:txBody>
+          <a:bodyPr wrap="square" lIns="45720" rIns="45720" tIns="36576" bIns="36576" anchor="ctr">
+            <a:spAutoFit/>
+          </a:bodyPr>
+          <a:lstStyle/>
+          <a:p>
+            <a:pPr algn="ctr"/>
+            <a:r>
+              <a:rPr sz="900" b="1" i="0">
+                <a:solidFill>
+                  <a:srgbClr val="009A44"/>
+                </a:solidFill>
+                <a:latin typeface="Segoe UI"/>
+              </a:rPr>
+              <a:t>Yes</a:t>
+            </a:r>
+          </a:p>
+        </p:txBody>
+      </p:sp>
+      <p:cxnSp>
+        <p:nvCxnSpPr>
+          <p:cNvPr id="9008" name="Connector 9007"/>
+          <p:cNvCxnSpPr/>
+          <p:nvPr/>
+        </p:nvCxnSpPr>
+        <p:spPr>
+          <a:xfrm>
+            <a:off x="5056000" y="2860000"/>
+            <a:ext cx="524000" cy="0"/>
+          </a:xfrm>
+          <a:prstGeom prst="line">
+            <a:avLst/>
+          </a:prstGeom>
+          <a:ln w="19050">
+            <a:solidFill>
+              <a:srgbClr val="9B9B9B"/>
+            </a:solidFill>
+            <a:tailEnd type="triangle" w="med" len="med"/>
+          </a:ln>
+        </p:spPr>
+        <p:style>
+          <a:lnRef idx="2">
+            <a:schemeClr val="accent1"/>
+          </a:lnRef>
+          <a:fillRef idx="0">
+            <a:schemeClr val="accent1"/>
+          </a:fillRef>
+          <a:effectRef idx="1">
+            <a:schemeClr val="accent1"/>
+          </a:effectRef>
+          <a:fontRef idx="minor">
+            <a:schemeClr val="tx1"/>
+          </a:fontRef>
+        </p:style>
+      </p:cxnSp>
+      <p:sp>
+        <p:nvSpPr>
+          <p:cNvPr id="9009" name="TextBox 9008"/>
+          <p:cNvSpPr txBox="1"/>
+          <p:nvPr/>
+        </p:nvSpPr>
+        <p:spPr>
+          <a:xfrm>
+            <a:off x="5096000" y="2580000"/>
+            <a:ext cx="620000" cy="260000"/>
+          </a:xfrm>
+          <a:prstGeom prst="rect">
+            <a:avLst/>
+          </a:prstGeom>
+          <a:noFill/>
+        </p:spPr>
+        <p:txBody>
+          <a:bodyPr wrap="square" lIns="45720" rIns="45720" tIns="36576" bIns="36576" anchor="ctr">
+            <a:spAutoFit/>
+          </a:bodyPr>
+          <a:lstStyle/>
+          <a:p>
+            <a:pPr algn="ctr"/>
+            <a:r>
+              <a:rPr sz="900" b="1" i="0">
+                <a:solidFill>
+                  <a:srgbClr val="C00000"/>
+                </a:solidFill>
+                <a:latin typeface="Segoe UI"/>
+              </a:rPr>
+              <a:t>No</a:t>
+            </a:r>
+          </a:p>
+        </p:txBody>
+      </p:sp>
+      <p:cxnSp>
+        <p:nvCxnSpPr>
+          <p:cNvPr id="9010" name="Connector 9009"/>
+          <p:cNvCxnSpPr/>
+          <p:nvPr/>
+        </p:nvCxnSpPr>
+        <p:spPr>
+          <a:xfrm flipV="1">
+            <a:off x="4920000" y="2860000"/>
+            <a:ext cx="660000" cy="1500000"/>
+          </a:xfrm>
+          <a:prstGeom prst="bentConnector3">
+            <a:avLst/>
+          </a:prstGeom>
+          <a:ln w="19050">
+            <a:solidFill>
+              <a:srgbClr val="9B9B9B"/>
+            </a:solidFill>
+            <a:tailEnd type="triangle" w="med" len="med"/>
+          </a:ln>
+        </p:spPr>
+        <p:style>
+          <a:lnRef idx="2">
+            <a:schemeClr val="accent1"/>
+          </a:lnRef>
+          <a:fillRef idx="0">
+            <a:schemeClr val="accent1"/>
+          </a:fillRef>
+          <a:effectRef idx="1">
+            <a:schemeClr val="accent1"/>
+          </a:effectRef>
+          <a:fontRef idx="minor">
+            <a:schemeClr val="tx1"/>
+          </a:fontRef>
+        </p:style>
+      </p:cxnSp>
+      <p:cxnSp>
+        <p:nvCxnSpPr>
+          <p:cNvPr id="9011" name="Connector 9010"/>
+          <p:cNvCxnSpPr/>
+          <p:nvPr/>
+        </p:nvCxnSpPr>
+        <p:spPr>
+          <a:xfrm>
+            <a:off x="6840000" y="2860000"/>
+            <a:ext cx="560000" cy="0"/>
+          </a:xfrm>
+          <a:prstGeom prst="line">
+            <a:avLst/>
+          </a:prstGeom>
+          <a:ln w="19050">
+            <a:solidFill>
+              <a:srgbClr val="9B9B9B"/>
+            </a:solidFill>
+            <a:tailEnd type="triangle" w="med" len="med"/>
+          </a:ln>
+        </p:spPr>
+        <p:style>
+          <a:lnRef idx="2">
+            <a:schemeClr val="accent1"/>
+          </a:lnRef>
+          <a:fillRef idx="0">
+            <a:schemeClr val="accent1"/>
+          </a:fillRef>
+          <a:effectRef idx="1">
+            <a:schemeClr val="accent1"/>
+          </a:effectRef>
+          <a:fontRef idx="minor">
+            <a:schemeClr val="tx1"/>
+          </a:fontRef>
+        </p:style>
+      </p:cxnSp>
+      <p:cxnSp>
+        <p:nvCxnSpPr>
+          <p:cNvPr id="9012" name="Connector 9011"/>
+          <p:cNvCxnSpPr/>
+          <p:nvPr/>
+        </p:nvCxnSpPr>
+        <p:spPr>
+          <a:xfrm>
+            <a:off x="8696000" y="2860000"/>
+            <a:ext cx="704000" cy="0"/>
+          </a:xfrm>
+          <a:prstGeom prst="line">
+            <a:avLst/>
+          </a:prstGeom>
+          <a:ln w="19050">
+            <a:solidFill>
+              <a:srgbClr val="9B9B9B"/>
+            </a:solidFill>
+            <a:tailEnd type="triangle" w="med" len="med"/>
+          </a:ln>
+        </p:spPr>
+        <p:style>
+          <a:lnRef idx="2">
+            <a:schemeClr val="accent1"/>
+          </a:lnRef>
+          <a:fillRef idx="0">
+            <a:schemeClr val="accent1"/>
+          </a:fillRef>
+          <a:effectRef idx="1">
+            <a:schemeClr val="accent1"/>
+          </a:effectRef>
+          <a:fontRef idx="minor">
+            <a:schemeClr val="tx1"/>
+          </a:fontRef>
+        </p:style>
+      </p:cxnSp>
+      <p:sp>
+        <p:nvSpPr>
+          <p:cNvPr id="9013" name="TextBox 9012"/>
+          <p:cNvSpPr txBox="1"/>
+          <p:nvPr/>
+        </p:nvSpPr>
+        <p:spPr>
+          <a:xfrm>
+            <a:off x="8798000" y="2580000"/>
+            <a:ext cx="620000" cy="260000"/>
+          </a:xfrm>
+          <a:prstGeom prst="rect">
+            <a:avLst/>
+          </a:prstGeom>
+          <a:noFill/>
+        </p:spPr>
+        <p:txBody>
+          <a:bodyPr wrap="square" lIns="45720" rIns="45720" tIns="36576" bIns="36576" anchor="ctr">
+            <a:spAutoFit/>
+          </a:bodyPr>
+          <a:lstStyle/>
+          <a:p>
+            <a:pPr algn="ctr"/>
+            <a:r>
+              <a:rPr sz="900" b="1" i="0">
+                <a:solidFill>
+                  <a:srgbClr val="009A44"/>
+                </a:solidFill>
+                <a:latin typeface="Segoe UI"/>
+              </a:rPr>
+              <a:t>Yes</a:t>
+            </a:r>
+          </a:p>
+        </p:txBody>
+      </p:sp>
+      <p:cxnSp>
+        <p:nvCxnSpPr>
+          <p:cNvPr id="9014" name="Connector 9013"/>
+          <p:cNvCxnSpPr/>
+          <p:nvPr/>
+        </p:nvCxnSpPr>
+        <p:spPr>
+          <a:xfrm>
+            <a:off x="8048000" y="3294340"/>
+            <a:ext cx="0" cy="765660"/>
+          </a:xfrm>
+          <a:prstGeom prst="bentConnector3">
+            <a:avLst/>
+          </a:prstGeom>
+          <a:ln w="19050">
+            <a:solidFill>
+              <a:srgbClr val="9B9B9B"/>
+            </a:solidFill>
+            <a:tailEnd type="triangle" w="med" len="med"/>
+          </a:ln>
+        </p:spPr>
+        <p:style>
+          <a:lnRef idx="2">
+            <a:schemeClr val="accent1"/>
+          </a:lnRef>
+          <a:fillRef idx="0">
+            <a:schemeClr val="accent1"/>
+          </a:fillRef>
+          <a:effectRef idx="1">
+            <a:schemeClr val="accent1"/>
+          </a:effectRef>
+          <a:fontRef idx="minor">
+            <a:schemeClr val="tx1"/>
+          </a:fontRef>
+        </p:style>
+      </p:cxnSp>
+      <p:sp>
+        <p:nvSpPr>
+          <p:cNvPr id="9015" name="TextBox 9014"/>
+          <p:cNvSpPr txBox="1"/>
+          <p:nvPr/>
+        </p:nvSpPr>
+        <p:spPr>
+          <a:xfrm>
+            <a:off x="8088000" y="3324340"/>
+            <a:ext cx="620000" cy="260000"/>
+          </a:xfrm>
+          <a:prstGeom prst="rect">
+            <a:avLst/>
+          </a:prstGeom>
+          <a:noFill/>
+        </p:spPr>
+        <p:txBody>
+          <a:bodyPr wrap="square" lIns="45720" rIns="45720" tIns="36576" bIns="36576" anchor="ctr">
+            <a:spAutoFit/>
+          </a:bodyPr>
+          <a:lstStyle/>
+          <a:p>
+            <a:pPr algn="ctr"/>
+            <a:r>
+              <a:rPr sz="900" b="1" i="0">
+                <a:solidFill>
+                  <a:srgbClr val="C00000"/>
+                </a:solidFill>
+                <a:latin typeface="Segoe UI"/>
+              </a:rPr>
+              <a:t>No</a:t>
+            </a:r>
+          </a:p>
+        </p:txBody>
+      </p:sp>
+      <p:cxnSp>
+        <p:nvCxnSpPr>
+          <p:cNvPr id="9016" name="Connector 9015"/>
+          <p:cNvCxnSpPr/>
+          <p:nvPr/>
+        </p:nvCxnSpPr>
+        <p:spPr>
+          <a:xfrm>
+            <a:off x="10660000" y="2860000"/>
+            <a:ext cx="300000" cy="0"/>
+          </a:xfrm>
+          <a:prstGeom prst="line">
+            <a:avLst/>
+          </a:prstGeom>
+          <a:ln w="19050">
+            <a:solidFill>
+              <a:srgbClr val="9B9B9B"/>
+            </a:solidFill>
+            <a:tailEnd type="triangle" w="med" len="med"/>
+          </a:ln>
+        </p:spPr>
+        <p:style>
+          <a:lnRef idx="2">
+            <a:schemeClr val="accent1"/>
+          </a:lnRef>
+          <a:fillRef idx="0">
+            <a:schemeClr val="accent1"/>
+          </a:fillRef>
+          <a:effectRef idx="1">
+            <a:schemeClr val="accent1"/>
+          </a:effectRef>
+          <a:fontRef idx="minor">
+            <a:schemeClr val="tx1"/>
+          </a:fontRef>
+        </p:style>
+      </p:cxnSp>
     </p:spTree>
     <p:extLst>
       <p:ext uri="{BB962C8B-B14F-4D97-AF65-F5344CB8AC3E}">
@@ -18429,6 +19438,576 @@
           </a:graphicData>
         </a:graphic>
       </p:graphicFrame>
+      <p:sp>
+        <p:nvSpPr>
+          <p:cNvPr id="973" name="Rounded Rectangle 972"/>
+          <p:cNvSpPr/>
+          <p:nvPr/>
+        </p:nvSpPr>
+        <p:spPr>
+          <a:xfrm>
+            <a:off x="500000" y="2500000"/>
+            <a:ext cx="1260000" cy="720000"/>
+          </a:xfrm>
+          <a:prstGeom prst="roundRect">
+            <a:avLst>
+              <a:gd name="adj" fmla="val 10000"/>
+            </a:avLst>
+          </a:prstGeom>
+          <a:noFill/>
+          <a:ln w="12700">
+            <a:solidFill>
+              <a:srgbClr val="BFBFBF"/>
+            </a:solidFill>
+          </a:ln>
+          <a:effectLst/>
+        </p:spPr>
+        <p:style>
+          <a:lnRef idx="1">
+            <a:schemeClr val="accent1"/>
+          </a:lnRef>
+          <a:fillRef idx="3">
+            <a:schemeClr val="accent1"/>
+          </a:fillRef>
+          <a:effectRef idx="2">
+            <a:schemeClr val="accent1"/>
+          </a:effectRef>
+          <a:fontRef idx="minor">
+            <a:schemeClr val="lt1"/>
+          </a:fontRef>
+        </p:style>
+        <p:txBody>
+          <a:bodyPr rtlCol="0" anchor="ctr" wrap="square" lIns="45720" rIns="45720" tIns="36576" bIns="36576"/>
+          <a:lstStyle/>
+          <a:p>
+            <a:pPr algn="ctr"/>
+            <a:r>
+              <a:rPr sz="900" b="1" i="0">
+                <a:solidFill>
+                  <a:srgbClr val="404040"/>
+                </a:solidFill>
+                <a:latin typeface="Segoe UI"/>
+              </a:rPr>
+              <a:t>Confirm dispute amount &amp; customer account</a:t>
+            </a:r>
+          </a:p>
+        </p:txBody>
+      </p:sp>
+      <p:sp>
+        <p:nvSpPr>
+          <p:cNvPr id="974" name="Rounded Rectangle 973"/>
+          <p:cNvSpPr/>
+          <p:nvPr/>
+        </p:nvSpPr>
+        <p:spPr>
+          <a:xfrm>
+            <a:off x="2400000" y="2500000"/>
+            <a:ext cx="1260000" cy="720000"/>
+          </a:xfrm>
+          <a:prstGeom prst="roundRect">
+            <a:avLst>
+              <a:gd name="adj" fmla="val 10000"/>
+            </a:avLst>
+          </a:prstGeom>
+          <a:noFill/>
+          <a:ln w="12700">
+            <a:solidFill>
+              <a:srgbClr val="BFBFBF"/>
+            </a:solidFill>
+          </a:ln>
+          <a:effectLst/>
+        </p:spPr>
+        <p:style>
+          <a:lnRef idx="1">
+            <a:schemeClr val="accent1"/>
+          </a:lnRef>
+          <a:fillRef idx="3">
+            <a:schemeClr val="accent1"/>
+          </a:fillRef>
+          <a:effectRef idx="2">
+            <a:schemeClr val="accent1"/>
+          </a:effectRef>
+          <a:fontRef idx="minor">
+            <a:schemeClr val="lt1"/>
+          </a:fontRef>
+        </p:style>
+        <p:txBody>
+          <a:bodyPr rtlCol="0" anchor="ctr" wrap="square" lIns="45720" rIns="45720" tIns="36576" bIns="36576"/>
+          <a:lstStyle/>
+          <a:p>
+            <a:pPr algn="ctr"/>
+            <a:r>
+              <a:rPr sz="900" b="1" i="0">
+                <a:solidFill>
+                  <a:srgbClr val="404040"/>
+                </a:solidFill>
+                <a:latin typeface="Segoe UI"/>
+              </a:rPr>
+              <a:t>Document rationale &amp; approval</a:t>
+            </a:r>
+          </a:p>
+        </p:txBody>
+      </p:sp>
+      <p:sp>
+        <p:nvSpPr>
+          <p:cNvPr id="975" name="Rounded Rectangle 974"/>
+          <p:cNvSpPr/>
+          <p:nvPr/>
+        </p:nvSpPr>
+        <p:spPr>
+          <a:xfrm>
+            <a:off x="4300000" y="2500000"/>
+            <a:ext cx="1260000" cy="720000"/>
+          </a:xfrm>
+          <a:prstGeom prst="roundRect">
+            <a:avLst>
+              <a:gd name="adj" fmla="val 10000"/>
+            </a:avLst>
+          </a:prstGeom>
+          <a:noFill/>
+          <a:ln w="12700">
+            <a:solidFill>
+              <a:srgbClr val="BFBFBF"/>
+            </a:solidFill>
+          </a:ln>
+          <a:effectLst/>
+        </p:spPr>
+        <p:style>
+          <a:lnRef idx="1">
+            <a:schemeClr val="accent1"/>
+          </a:lnRef>
+          <a:fillRef idx="3">
+            <a:schemeClr val="accent1"/>
+          </a:fillRef>
+          <a:effectRef idx="2">
+            <a:schemeClr val="accent1"/>
+          </a:effectRef>
+          <a:fontRef idx="minor">
+            <a:schemeClr val="lt1"/>
+          </a:fontRef>
+        </p:style>
+        <p:txBody>
+          <a:bodyPr rtlCol="0" anchor="ctr" wrap="square" lIns="45720" rIns="45720" tIns="36576" bIns="36576"/>
+          <a:lstStyle/>
+          <a:p>
+            <a:pPr algn="ctr"/>
+            <a:r>
+              <a:rPr sz="900" b="1" i="0">
+                <a:solidFill>
+                  <a:srgbClr val="404040"/>
+                </a:solidFill>
+                <a:latin typeface="Segoe UI"/>
+              </a:rPr>
+              <a:t>Post provisional credit within Visa SLA</a:t>
+            </a:r>
+          </a:p>
+        </p:txBody>
+      </p:sp>
+      <p:sp>
+        <p:nvSpPr>
+          <p:cNvPr id="976" name="Rounded Rectangle 975"/>
+          <p:cNvSpPr/>
+          <p:nvPr/>
+        </p:nvSpPr>
+        <p:spPr>
+          <a:xfrm>
+            <a:off x="6200000" y="2500000"/>
+            <a:ext cx="1260000" cy="720000"/>
+          </a:xfrm>
+          <a:prstGeom prst="roundRect">
+            <a:avLst>
+              <a:gd name="adj" fmla="val 10000"/>
+            </a:avLst>
+          </a:prstGeom>
+          <a:solidFill>
+            <a:srgbClr val="EDDBFB">
+              <a:alpha val="56863"/>
+            </a:srgbClr>
+          </a:solidFill>
+          <a:ln w="12700">
+            <a:solidFill>
+              <a:srgbClr val="9B40EA"/>
+            </a:solidFill>
+          </a:ln>
+          <a:effectLst/>
+        </p:spPr>
+        <p:style>
+          <a:lnRef idx="1">
+            <a:schemeClr val="accent1"/>
+          </a:lnRef>
+          <a:fillRef idx="3">
+            <a:schemeClr val="accent1"/>
+          </a:fillRef>
+          <a:effectRef idx="2">
+            <a:schemeClr val="accent1"/>
+          </a:effectRef>
+          <a:fontRef idx="minor">
+            <a:schemeClr val="lt1"/>
+          </a:fontRef>
+        </p:style>
+        <p:txBody>
+          <a:bodyPr rtlCol="0" anchor="ctr" wrap="square" lIns="45720" rIns="45720" tIns="36576" bIns="36576"/>
+          <a:lstStyle/>
+          <a:p>
+            <a:pPr algn="ctr"/>
+            <a:r>
+              <a:rPr sz="900" b="1" i="0">
+                <a:solidFill>
+                  <a:srgbClr val="404040"/>
+                </a:solidFill>
+                <a:latin typeface="Segoe UI"/>
+              </a:rPr>
+              <a:t>Notify customer of provisional credit issued</a:t>
+            </a:r>
+          </a:p>
+        </p:txBody>
+      </p:sp>
+      <p:sp>
+        <p:nvSpPr>
+          <p:cNvPr id="977" name="Rounded Rectangle 976"/>
+          <p:cNvSpPr/>
+          <p:nvPr/>
+        </p:nvSpPr>
+        <p:spPr>
+          <a:xfrm>
+            <a:off x="8100000" y="2500000"/>
+            <a:ext cx="1260000" cy="720000"/>
+          </a:xfrm>
+          <a:prstGeom prst="roundRect">
+            <a:avLst>
+              <a:gd name="adj" fmla="val 10000"/>
+            </a:avLst>
+          </a:prstGeom>
+          <a:noFill/>
+          <a:ln w="12700">
+            <a:solidFill>
+              <a:srgbClr val="BFBFBF"/>
+            </a:solidFill>
+          </a:ln>
+          <a:effectLst/>
+        </p:spPr>
+        <p:style>
+          <a:lnRef idx="1">
+            <a:schemeClr val="accent1"/>
+          </a:lnRef>
+          <a:fillRef idx="3">
+            <a:schemeClr val="accent1"/>
+          </a:fillRef>
+          <a:effectRef idx="2">
+            <a:schemeClr val="accent1"/>
+          </a:effectRef>
+          <a:fontRef idx="minor">
+            <a:schemeClr val="lt1"/>
+          </a:fontRef>
+        </p:style>
+        <p:txBody>
+          <a:bodyPr rtlCol="0" anchor="ctr" wrap="square" lIns="45720" rIns="45720" tIns="36576" bIns="36576"/>
+          <a:lstStyle/>
+          <a:p>
+            <a:pPr algn="ctr"/>
+            <a:r>
+              <a:rPr sz="900" b="1" i="0">
+                <a:solidFill>
+                  <a:srgbClr val="404040"/>
+                </a:solidFill>
+                <a:latin typeface="Segoe UI"/>
+              </a:rPr>
+              <a:t>Track provisional credit aging &amp; reversal</a:t>
+            </a:r>
+          </a:p>
+        </p:txBody>
+      </p:sp>
+      <p:grpSp>
+        <p:nvGrpSpPr>
+          <p:cNvPr id="9001" name="Handoff"/>
+          <p:cNvGrpSpPr/>
+          <p:nvPr/>
+        </p:nvGrpSpPr>
+        <p:grpSpPr>
+          <a:xfrm>
+            <a:off x="9660000" y="2734000"/>
+            <a:ext cx="252000" cy="252000"/>
+            <a:chOff x="9660000" y="2734000"/>
+            <a:chExt cx="252000" cy="252000"/>
+          </a:xfrm>
+        </p:grpSpPr>
+        <p:sp>
+          <p:nvSpPr>
+            <p:cNvPr id="9002" name="hoffc"/>
+            <p:cNvSpPr/>
+            <p:nvPr/>
+          </p:nvSpPr>
+          <p:spPr>
+            <a:xfrm>
+              <a:off x="9660000" y="2734000"/>
+              <a:ext cx="252000" cy="252000"/>
+            </a:xfrm>
+            <a:prstGeom prst="ellipse">
+              <a:avLst/>
+            </a:prstGeom>
+            <a:solidFill>
+              <a:srgbClr val="9DD4CF"/>
+            </a:solidFill>
+            <a:ln>
+              <a:noFill/>
+            </a:ln>
+          </p:spPr>
+          <p:txBody>
+            <a:bodyPr/>
+            <a:lstStyle/>
+            <a:p>
+              <a:endParaRPr lang="en-US"/>
+            </a:p>
+          </p:txBody>
+        </p:sp>
+        <p:sp>
+          <p:nvSpPr>
+            <p:cNvPr id="9003" name="hoffa"/>
+            <p:cNvSpPr/>
+            <p:nvPr/>
+          </p:nvSpPr>
+          <p:spPr>
+            <a:xfrm>
+              <a:off x="9710316" y="2797821"/>
+              <a:ext cx="161665" cy="124358"/>
+            </a:xfrm>
+            <a:prstGeom prst="rightArrow">
+              <a:avLst>
+                <a:gd name="adj1" fmla="val 50000"/>
+                <a:gd name="adj2" fmla="val 50000"/>
+              </a:avLst>
+            </a:prstGeom>
+            <a:solidFill>
+              <a:srgbClr val="FFFFFF"/>
+            </a:solidFill>
+            <a:ln>
+              <a:noFill/>
+            </a:ln>
+          </p:spPr>
+          <p:txBody>
+            <a:bodyPr/>
+            <a:lstStyle/>
+            <a:p>
+              <a:endParaRPr lang="en-US"/>
+            </a:p>
+          </p:txBody>
+        </p:sp>
+      </p:grpSp>
+      <p:cxnSp>
+        <p:nvCxnSpPr>
+          <p:cNvPr id="9004" name="Connector 9003"/>
+          <p:cNvCxnSpPr/>
+          <p:nvPr/>
+        </p:nvCxnSpPr>
+        <p:spPr>
+          <a:xfrm>
+            <a:off x="1760000" y="2860000"/>
+            <a:ext cx="640000" cy="0"/>
+          </a:xfrm>
+          <a:prstGeom prst="line">
+            <a:avLst/>
+          </a:prstGeom>
+          <a:ln w="19050">
+            <a:solidFill>
+              <a:srgbClr val="9B9B9B"/>
+            </a:solidFill>
+            <a:tailEnd type="triangle" w="med" len="med"/>
+          </a:ln>
+        </p:spPr>
+        <p:style>
+          <a:lnRef idx="2">
+            <a:schemeClr val="accent1"/>
+          </a:lnRef>
+          <a:fillRef idx="0">
+            <a:schemeClr val="accent1"/>
+          </a:fillRef>
+          <a:effectRef idx="1">
+            <a:schemeClr val="accent1"/>
+          </a:effectRef>
+          <a:fontRef idx="minor">
+            <a:schemeClr val="tx1"/>
+          </a:fontRef>
+        </p:style>
+      </p:cxnSp>
+      <p:cxnSp>
+        <p:nvCxnSpPr>
+          <p:cNvPr id="9005" name="Connector 9004"/>
+          <p:cNvCxnSpPr/>
+          <p:nvPr/>
+        </p:nvCxnSpPr>
+        <p:spPr>
+          <a:xfrm>
+            <a:off x="3660000" y="2860000"/>
+            <a:ext cx="640000" cy="0"/>
+          </a:xfrm>
+          <a:prstGeom prst="line">
+            <a:avLst/>
+          </a:prstGeom>
+          <a:ln w="19050">
+            <a:solidFill>
+              <a:srgbClr val="9B9B9B"/>
+            </a:solidFill>
+            <a:tailEnd type="triangle" w="med" len="med"/>
+          </a:ln>
+        </p:spPr>
+        <p:style>
+          <a:lnRef idx="2">
+            <a:schemeClr val="accent1"/>
+          </a:lnRef>
+          <a:fillRef idx="0">
+            <a:schemeClr val="accent1"/>
+          </a:fillRef>
+          <a:effectRef idx="1">
+            <a:schemeClr val="accent1"/>
+          </a:effectRef>
+          <a:fontRef idx="minor">
+            <a:schemeClr val="tx1"/>
+          </a:fontRef>
+        </p:style>
+      </p:cxnSp>
+      <p:cxnSp>
+        <p:nvCxnSpPr>
+          <p:cNvPr id="9006" name="Connector 9005"/>
+          <p:cNvCxnSpPr/>
+          <p:nvPr/>
+        </p:nvCxnSpPr>
+        <p:spPr>
+          <a:xfrm>
+            <a:off x="5560000" y="2860000"/>
+            <a:ext cx="640000" cy="0"/>
+          </a:xfrm>
+          <a:prstGeom prst="line">
+            <a:avLst/>
+          </a:prstGeom>
+          <a:ln w="19050">
+            <a:solidFill>
+              <a:srgbClr val="9B9B9B"/>
+            </a:solidFill>
+            <a:tailEnd type="triangle" w="med" len="med"/>
+          </a:ln>
+        </p:spPr>
+        <p:style>
+          <a:lnRef idx="2">
+            <a:schemeClr val="accent1"/>
+          </a:lnRef>
+          <a:fillRef idx="0">
+            <a:schemeClr val="accent1"/>
+          </a:fillRef>
+          <a:effectRef idx="1">
+            <a:schemeClr val="accent1"/>
+          </a:effectRef>
+          <a:fontRef idx="minor">
+            <a:schemeClr val="tx1"/>
+          </a:fontRef>
+        </p:style>
+      </p:cxnSp>
+      <p:cxnSp>
+        <p:nvCxnSpPr>
+          <p:cNvPr id="9007" name="Connector 9006"/>
+          <p:cNvCxnSpPr/>
+          <p:nvPr/>
+        </p:nvCxnSpPr>
+        <p:spPr>
+          <a:xfrm>
+            <a:off x="7460000" y="2860000"/>
+            <a:ext cx="640000" cy="0"/>
+          </a:xfrm>
+          <a:prstGeom prst="line">
+            <a:avLst/>
+          </a:prstGeom>
+          <a:ln w="19050">
+            <a:solidFill>
+              <a:srgbClr val="9B9B9B"/>
+            </a:solidFill>
+            <a:tailEnd type="triangle" w="med" len="med"/>
+          </a:ln>
+        </p:spPr>
+        <p:style>
+          <a:lnRef idx="2">
+            <a:schemeClr val="accent1"/>
+          </a:lnRef>
+          <a:fillRef idx="0">
+            <a:schemeClr val="accent1"/>
+          </a:fillRef>
+          <a:effectRef idx="1">
+            <a:schemeClr val="accent1"/>
+          </a:effectRef>
+          <a:fontRef idx="minor">
+            <a:schemeClr val="tx1"/>
+          </a:fontRef>
+        </p:style>
+      </p:cxnSp>
+      <p:cxnSp>
+        <p:nvCxnSpPr>
+          <p:cNvPr id="9008" name="Connector 9007"/>
+          <p:cNvCxnSpPr/>
+          <p:nvPr/>
+        </p:nvCxnSpPr>
+        <p:spPr>
+          <a:xfrm>
+            <a:off x="9360000" y="2860000"/>
+            <a:ext cx="300000" cy="0"/>
+          </a:xfrm>
+          <a:prstGeom prst="line">
+            <a:avLst/>
+          </a:prstGeom>
+          <a:ln w="19050">
+            <a:solidFill>
+              <a:srgbClr val="9B9B9B"/>
+            </a:solidFill>
+            <a:tailEnd type="triangle" w="med" len="med"/>
+          </a:ln>
+        </p:spPr>
+        <p:style>
+          <a:lnRef idx="2">
+            <a:schemeClr val="accent1"/>
+          </a:lnRef>
+          <a:fillRef idx="0">
+            <a:schemeClr val="accent1"/>
+          </a:fillRef>
+          <a:effectRef idx="1">
+            <a:schemeClr val="accent1"/>
+          </a:effectRef>
+          <a:fontRef idx="minor">
+            <a:schemeClr val="tx1"/>
+          </a:fontRef>
+        </p:style>
+      </p:cxnSp>
+      <p:sp>
+        <p:nvSpPr>
+          <p:cNvPr id="9009" name="TextBox 9008"/>
+          <p:cNvSpPr txBox="1"/>
+          <p:nvPr/>
+        </p:nvSpPr>
+        <p:spPr>
+          <a:xfrm>
+            <a:off x="4280000" y="3260000"/>
+            <a:ext cx="1300000" cy="430000"/>
+          </a:xfrm>
+          <a:prstGeom prst="rect">
+            <a:avLst/>
+          </a:prstGeom>
+          <a:noFill/>
+        </p:spPr>
+        <p:txBody>
+          <a:bodyPr wrap="square" lIns="45720" rIns="45720" tIns="36576" bIns="36576" anchor="ctr">
+            <a:spAutoFit/>
+          </a:bodyPr>
+          <a:lstStyle/>
+          <a:p>
+            <a:pPr algn="ctr"/>
+            <a:r>
+              <a:rPr sz="700" b="0" i="1">
+                <a:solidFill>
+                  <a:srgbClr val="404040"/>
+                </a:solidFill>
+                <a:latin typeface="Segoe UI"/>
+              </a:rPr>
+              <a:t>Per Visa dispute\nresolution SLA and\nBeem's cardholder agreement</a:t>
+            </a:r>
+          </a:p>
+        </p:txBody>
+      </p:sp>
     </p:spTree>
     <p:extLst>
       <p:ext uri="{BB962C8B-B14F-4D97-AF65-F5344CB8AC3E}">
@@ -19607,6 +21186,1106 @@
           </a:graphicData>
         </a:graphic>
       </p:graphicFrame>
+      <p:sp>
+        <p:nvSpPr>
+          <p:cNvPr id="973" name="Rounded Rectangle 972"/>
+          <p:cNvSpPr/>
+          <p:nvPr/>
+        </p:nvSpPr>
+        <p:spPr>
+          <a:xfrm>
+            <a:off x="300000" y="2500000"/>
+            <a:ext cx="1260000" cy="720000"/>
+          </a:xfrm>
+          <a:prstGeom prst="roundRect">
+            <a:avLst>
+              <a:gd name="adj" fmla="val 10000"/>
+            </a:avLst>
+          </a:prstGeom>
+          <a:noFill/>
+          <a:ln w="12700">
+            <a:solidFill>
+              <a:srgbClr val="BFBFBF"/>
+            </a:solidFill>
+          </a:ln>
+          <a:effectLst/>
+        </p:spPr>
+        <p:style>
+          <a:lnRef idx="1">
+            <a:schemeClr val="accent1"/>
+          </a:lnRef>
+          <a:fillRef idx="3">
+            <a:schemeClr val="accent1"/>
+          </a:fillRef>
+          <a:effectRef idx="2">
+            <a:schemeClr val="accent1"/>
+          </a:effectRef>
+          <a:fontRef idx="minor">
+            <a:schemeClr val="lt1"/>
+          </a:fontRef>
+        </p:style>
+        <p:txBody>
+          <a:bodyPr rtlCol="0" anchor="ctr" wrap="square" lIns="45720" rIns="45720" tIns="36576" bIns="36576"/>
+          <a:lstStyle/>
+          <a:p>
+            <a:pPr algn="ctr"/>
+            <a:r>
+              <a:rPr sz="900" b="1" i="0">
+                <a:solidFill>
+                  <a:srgbClr val="404040"/>
+                </a:solidFill>
+                <a:latin typeface="Segoe UI"/>
+              </a:rPr>
+              <a:t>Submit dispute to Central 1 (file the dispute)</a:t>
+            </a:r>
+          </a:p>
+        </p:txBody>
+      </p:sp>
+      <p:sp>
+        <p:nvSpPr>
+          <p:cNvPr id="974" name="TextBox 973"/>
+          <p:cNvSpPr txBox="1"/>
+          <p:nvPr/>
+        </p:nvSpPr>
+        <p:spPr>
+          <a:xfrm>
+            <a:off x="280000" y="3260000"/>
+            <a:ext cx="1300000" cy="430000"/>
+          </a:xfrm>
+          <a:prstGeom prst="rect">
+            <a:avLst/>
+          </a:prstGeom>
+          <a:noFill/>
+        </p:spPr>
+        <p:txBody>
+          <a:bodyPr wrap="square" lIns="45720" rIns="45720" tIns="36576" bIns="36576" anchor="ctr">
+            <a:spAutoFit/>
+          </a:bodyPr>
+          <a:lstStyle/>
+          <a:p>
+            <a:pPr algn="ctr"/>
+            <a:r>
+              <a:rPr sz="700" b="0" i="1">
+                <a:solidFill>
+                  <a:srgbClr val="404040"/>
+                </a:solidFill>
+                <a:latin typeface="Segoe UI"/>
+              </a:rPr>
+              <a:t>120 days from transaction date (75 days in specific conditions)*</a:t>
+            </a:r>
+          </a:p>
+        </p:txBody>
+      </p:sp>
+      <p:sp>
+        <p:nvSpPr>
+          <p:cNvPr id="975" name="Rounded Rectangle 974"/>
+          <p:cNvSpPr/>
+          <p:nvPr/>
+        </p:nvSpPr>
+        <p:spPr>
+          <a:xfrm>
+            <a:off x="1820000" y="2500000"/>
+            <a:ext cx="1260000" cy="720000"/>
+          </a:xfrm>
+          <a:prstGeom prst="roundRect">
+            <a:avLst>
+              <a:gd name="adj" fmla="val 10000"/>
+            </a:avLst>
+          </a:prstGeom>
+          <a:noFill/>
+          <a:ln w="12700">
+            <a:solidFill>
+              <a:srgbClr val="BFBFBF"/>
+            </a:solidFill>
+          </a:ln>
+          <a:effectLst/>
+        </p:spPr>
+        <p:style>
+          <a:lnRef idx="1">
+            <a:schemeClr val="accent1"/>
+          </a:lnRef>
+          <a:fillRef idx="3">
+            <a:schemeClr val="accent1"/>
+          </a:fillRef>
+          <a:effectRef idx="2">
+            <a:schemeClr val="accent1"/>
+          </a:effectRef>
+          <a:fontRef idx="minor">
+            <a:schemeClr val="lt1"/>
+          </a:fontRef>
+        </p:style>
+        <p:txBody>
+          <a:bodyPr rtlCol="0" anchor="ctr" wrap="square" lIns="45720" rIns="45720" tIns="36576" bIns="36576"/>
+          <a:lstStyle/>
+          <a:p>
+            <a:pPr algn="ctr"/>
+            <a:r>
+              <a:rPr sz="900" b="1" i="0">
+                <a:solidFill>
+                  <a:srgbClr val="404040"/>
+                </a:solidFill>
+                <a:latin typeface="Segoe UI"/>
+              </a:rPr>
+              <a:t>Monitor for Acquirer Dispute Response</a:t>
+            </a:r>
+          </a:p>
+        </p:txBody>
+      </p:sp>
+      <p:sp>
+        <p:nvSpPr>
+          <p:cNvPr id="976" name="Diamond 975"/>
+          <p:cNvSpPr/>
+          <p:nvPr/>
+        </p:nvSpPr>
+        <p:spPr>
+          <a:xfrm>
+            <a:off x="3530000" y="2425660"/>
+            <a:ext cx="1296000" cy="868680"/>
+          </a:xfrm>
+          <a:prstGeom prst="diamond">
+            <a:avLst/>
+          </a:prstGeom>
+          <a:solidFill>
+            <a:srgbClr val="FFFFFF"/>
+          </a:solidFill>
+          <a:ln w="12700">
+            <a:solidFill>
+              <a:srgbClr val="BFBFBF"/>
+            </a:solidFill>
+          </a:ln>
+          <a:effectLst/>
+        </p:spPr>
+        <p:style>
+          <a:lnRef idx="1">
+            <a:schemeClr val="accent1"/>
+          </a:lnRef>
+          <a:fillRef idx="3">
+            <a:schemeClr val="accent1"/>
+          </a:fillRef>
+          <a:effectRef idx="2">
+            <a:schemeClr val="accent1"/>
+          </a:effectRef>
+          <a:fontRef idx="minor">
+            <a:schemeClr val="lt1"/>
+          </a:fontRef>
+        </p:style>
+        <p:txBody>
+          <a:bodyPr rtlCol="0" anchor="ctr" wrap="square" lIns="0" rIns="0" tIns="36576" bIns="36576"/>
+          <a:lstStyle/>
+          <a:p>
+            <a:pPr algn="ctr"/>
+            <a:r>
+              <a:rPr sz="900" b="1" i="0">
+                <a:solidFill>
+                  <a:srgbClr val="404040"/>
+                </a:solidFill>
+                <a:latin typeface="Segoe UI"/>
+              </a:rPr>
+              <a:t>Acquirer accepts liability?</a:t>
+            </a:r>
+          </a:p>
+        </p:txBody>
+      </p:sp>
+      <p:sp>
+        <p:nvSpPr>
+          <p:cNvPr id="977" name="TextBox 976"/>
+          <p:cNvSpPr txBox="1"/>
+          <p:nvPr/>
+        </p:nvSpPr>
+        <p:spPr>
+          <a:xfrm>
+            <a:off x="3510000" y="3334340"/>
+            <a:ext cx="1300000" cy="300000"/>
+          </a:xfrm>
+          <a:prstGeom prst="rect">
+            <a:avLst/>
+          </a:prstGeom>
+          <a:noFill/>
+        </p:spPr>
+        <p:txBody>
+          <a:bodyPr wrap="square" lIns="45720" rIns="45720" tIns="36576" bIns="36576" anchor="ctr">
+            <a:spAutoFit/>
+          </a:bodyPr>
+          <a:lstStyle/>
+          <a:p>
+            <a:pPr algn="ctr"/>
+            <a:r>
+              <a:rPr sz="700" b="0" i="1">
+                <a:solidFill>
+                  <a:srgbClr val="404040"/>
+                </a:solidFill>
+                <a:latin typeface="Segoe UI"/>
+              </a:rPr>
+              <a:t>Acquirer response: 30 days</a:t>
+            </a:r>
+          </a:p>
+        </p:txBody>
+      </p:sp>
+      <p:sp>
+        <p:nvSpPr>
+          <p:cNvPr id="978" name="Rounded Rectangle 977"/>
+          <p:cNvSpPr/>
+          <p:nvPr/>
+        </p:nvSpPr>
+        <p:spPr>
+          <a:xfrm>
+            <a:off x="5276000" y="2500000"/>
+            <a:ext cx="1260000" cy="720000"/>
+          </a:xfrm>
+          <a:prstGeom prst="roundRect">
+            <a:avLst>
+              <a:gd name="adj" fmla="val 10000"/>
+            </a:avLst>
+          </a:prstGeom>
+          <a:noFill/>
+          <a:ln w="12700">
+            <a:solidFill>
+              <a:srgbClr val="BFBFBF"/>
+            </a:solidFill>
+          </a:ln>
+          <a:effectLst/>
+        </p:spPr>
+        <p:style>
+          <a:lnRef idx="1">
+            <a:schemeClr val="accent1"/>
+          </a:lnRef>
+          <a:fillRef idx="3">
+            <a:schemeClr val="accent1"/>
+          </a:fillRef>
+          <a:effectRef idx="2">
+            <a:schemeClr val="accent1"/>
+          </a:effectRef>
+          <a:fontRef idx="minor">
+            <a:schemeClr val="lt1"/>
+          </a:fontRef>
+        </p:style>
+        <p:txBody>
+          <a:bodyPr rtlCol="0" anchor="ctr" wrap="square" lIns="45720" rIns="45720" tIns="36576" bIns="36576"/>
+          <a:lstStyle/>
+          <a:p>
+            <a:pPr algn="ctr"/>
+            <a:r>
+              <a:rPr sz="900" b="1" i="0">
+                <a:solidFill>
+                  <a:srgbClr val="404040"/>
+                </a:solidFill>
+                <a:latin typeface="Segoe UI"/>
+              </a:rPr>
+              <a:t>Beem submits Pre-Arbitration (pushes back)</a:t>
+            </a:r>
+          </a:p>
+        </p:txBody>
+      </p:sp>
+      <p:sp>
+        <p:nvSpPr>
+          <p:cNvPr id="979" name="TextBox 978"/>
+          <p:cNvSpPr txBox="1"/>
+          <p:nvPr/>
+        </p:nvSpPr>
+        <p:spPr>
+          <a:xfrm>
+            <a:off x="5256000" y="3260000"/>
+            <a:ext cx="1300000" cy="250000"/>
+          </a:xfrm>
+          <a:prstGeom prst="rect">
+            <a:avLst/>
+          </a:prstGeom>
+          <a:noFill/>
+        </p:spPr>
+        <p:txBody>
+          <a:bodyPr wrap="square" lIns="45720" rIns="45720" tIns="36576" bIns="36576" anchor="ctr">
+            <a:spAutoFit/>
+          </a:bodyPr>
+          <a:lstStyle/>
+          <a:p>
+            <a:pPr algn="ctr"/>
+            <a:r>
+              <a:rPr sz="700" b="0" i="1">
+                <a:solidFill>
+                  <a:srgbClr val="404040"/>
+                </a:solidFill>
+                <a:latin typeface="Segoe UI"/>
+              </a:rPr>
+              <a:t>30 days</a:t>
+            </a:r>
+          </a:p>
+        </p:txBody>
+      </p:sp>
+      <p:sp>
+        <p:nvSpPr>
+          <p:cNvPr id="980" name="Rounded Rectangle 979"/>
+          <p:cNvSpPr/>
+          <p:nvPr/>
+        </p:nvSpPr>
+        <p:spPr>
+          <a:xfrm>
+            <a:off x="6796000" y="2500000"/>
+            <a:ext cx="1260000" cy="720000"/>
+          </a:xfrm>
+          <a:prstGeom prst="roundRect">
+            <a:avLst>
+              <a:gd name="adj" fmla="val 10000"/>
+            </a:avLst>
+          </a:prstGeom>
+          <a:noFill/>
+          <a:ln w="12700">
+            <a:solidFill>
+              <a:srgbClr val="BFBFBF"/>
+            </a:solidFill>
+          </a:ln>
+          <a:effectLst/>
+        </p:spPr>
+        <p:style>
+          <a:lnRef idx="1">
+            <a:schemeClr val="accent1"/>
+          </a:lnRef>
+          <a:fillRef idx="3">
+            <a:schemeClr val="accent1"/>
+          </a:fillRef>
+          <a:effectRef idx="2">
+            <a:schemeClr val="accent1"/>
+          </a:effectRef>
+          <a:fontRef idx="minor">
+            <a:schemeClr val="lt1"/>
+          </a:fontRef>
+        </p:style>
+        <p:txBody>
+          <a:bodyPr rtlCol="0" anchor="ctr" wrap="square" lIns="45720" rIns="45720" tIns="36576" bIns="36576"/>
+          <a:lstStyle/>
+          <a:p>
+            <a:pPr algn="ctr"/>
+            <a:r>
+              <a:rPr sz="900" b="1" i="0">
+                <a:solidFill>
+                  <a:srgbClr val="404040"/>
+                </a:solidFill>
+                <a:latin typeface="Segoe UI"/>
+              </a:rPr>
+              <a:t>Acquirer Pre-Arbitration response</a:t>
+            </a:r>
+          </a:p>
+        </p:txBody>
+      </p:sp>
+      <p:sp>
+        <p:nvSpPr>
+          <p:cNvPr id="981" name="TextBox 980"/>
+          <p:cNvSpPr txBox="1"/>
+          <p:nvPr/>
+        </p:nvSpPr>
+        <p:spPr>
+          <a:xfrm>
+            <a:off x="6776000" y="3260000"/>
+            <a:ext cx="1300000" cy="250000"/>
+          </a:xfrm>
+          <a:prstGeom prst="rect">
+            <a:avLst/>
+          </a:prstGeom>
+          <a:noFill/>
+        </p:spPr>
+        <p:txBody>
+          <a:bodyPr wrap="square" lIns="45720" rIns="45720" tIns="36576" bIns="36576" anchor="ctr">
+            <a:spAutoFit/>
+          </a:bodyPr>
+          <a:lstStyle/>
+          <a:p>
+            <a:pPr algn="ctr"/>
+            <a:r>
+              <a:rPr sz="700" b="0" i="1">
+                <a:solidFill>
+                  <a:srgbClr val="404040"/>
+                </a:solidFill>
+                <a:latin typeface="Segoe UI"/>
+              </a:rPr>
+              <a:t>30 days</a:t>
+            </a:r>
+          </a:p>
+        </p:txBody>
+      </p:sp>
+      <p:sp>
+        <p:nvSpPr>
+          <p:cNvPr id="982" name="Diamond 981"/>
+          <p:cNvSpPr/>
+          <p:nvPr/>
+        </p:nvSpPr>
+        <p:spPr>
+          <a:xfrm>
+            <a:off x="8506000" y="2425660"/>
+            <a:ext cx="1296000" cy="868680"/>
+          </a:xfrm>
+          <a:prstGeom prst="diamond">
+            <a:avLst/>
+          </a:prstGeom>
+          <a:solidFill>
+            <a:srgbClr val="FFFFFF"/>
+          </a:solidFill>
+          <a:ln w="12700">
+            <a:solidFill>
+              <a:srgbClr val="BFBFBF"/>
+            </a:solidFill>
+          </a:ln>
+          <a:effectLst/>
+        </p:spPr>
+        <p:style>
+          <a:lnRef idx="1">
+            <a:schemeClr val="accent1"/>
+          </a:lnRef>
+          <a:fillRef idx="3">
+            <a:schemeClr val="accent1"/>
+          </a:fillRef>
+          <a:effectRef idx="2">
+            <a:schemeClr val="accent1"/>
+          </a:effectRef>
+          <a:fontRef idx="minor">
+            <a:schemeClr val="lt1"/>
+          </a:fontRef>
+        </p:style>
+        <p:txBody>
+          <a:bodyPr rtlCol="0" anchor="ctr" wrap="square" lIns="0" rIns="0" tIns="36576" bIns="36576"/>
+          <a:lstStyle/>
+          <a:p>
+            <a:pPr algn="ctr"/>
+            <a:r>
+              <a:rPr sz="900" b="1" i="0">
+                <a:solidFill>
+                  <a:srgbClr val="404040"/>
+                </a:solidFill>
+                <a:latin typeface="Segoe UI"/>
+              </a:rPr>
+              <a:t>Resolved at pre-arb?</a:t>
+            </a:r>
+          </a:p>
+        </p:txBody>
+      </p:sp>
+      <p:sp>
+        <p:nvSpPr>
+          <p:cNvPr id="983" name="Rounded Rectangle 982"/>
+          <p:cNvSpPr/>
+          <p:nvPr/>
+        </p:nvSpPr>
+        <p:spPr>
+          <a:xfrm>
+            <a:off x="10252000" y="2500000"/>
+            <a:ext cx="1260000" cy="720000"/>
+          </a:xfrm>
+          <a:prstGeom prst="roundRect">
+            <a:avLst>
+              <a:gd name="adj" fmla="val 10000"/>
+            </a:avLst>
+          </a:prstGeom>
+          <a:noFill/>
+          <a:ln w="12700">
+            <a:solidFill>
+              <a:srgbClr val="BFBFBF"/>
+            </a:solidFill>
+          </a:ln>
+          <a:effectLst/>
+        </p:spPr>
+        <p:style>
+          <a:lnRef idx="1">
+            <a:schemeClr val="accent1"/>
+          </a:lnRef>
+          <a:fillRef idx="3">
+            <a:schemeClr val="accent1"/>
+          </a:fillRef>
+          <a:effectRef idx="2">
+            <a:schemeClr val="accent1"/>
+          </a:effectRef>
+          <a:fontRef idx="minor">
+            <a:schemeClr val="lt1"/>
+          </a:fontRef>
+        </p:style>
+        <p:txBody>
+          <a:bodyPr rtlCol="0" anchor="ctr" wrap="square" lIns="45720" rIns="45720" tIns="36576" bIns="36576"/>
+          <a:lstStyle/>
+          <a:p>
+            <a:pPr algn="ctr"/>
+            <a:r>
+              <a:rPr sz="900" b="1" i="0">
+                <a:solidFill>
+                  <a:srgbClr val="404040"/>
+                </a:solidFill>
+                <a:latin typeface="Segoe UI"/>
+              </a:rPr>
+              <a:t>Escalate to Arbitration</a:t>
+            </a:r>
+          </a:p>
+        </p:txBody>
+      </p:sp>
+      <p:grpSp>
+        <p:nvGrpSpPr>
+          <p:cNvPr id="9001" name="Handoff"/>
+          <p:cNvGrpSpPr/>
+          <p:nvPr/>
+        </p:nvGrpSpPr>
+        <p:grpSpPr>
+          <a:xfrm>
+            <a:off x="11812000" y="1900000"/>
+            <a:ext cx="252000" cy="252000"/>
+            <a:chOff x="11812000" y="1900000"/>
+            <a:chExt cx="252000" cy="252000"/>
+          </a:xfrm>
+        </p:grpSpPr>
+        <p:sp>
+          <p:nvSpPr>
+            <p:cNvPr id="9002" name="hoffc"/>
+            <p:cNvSpPr/>
+            <p:nvPr/>
+          </p:nvSpPr>
+          <p:spPr>
+            <a:xfrm>
+              <a:off x="11812000" y="1900000"/>
+              <a:ext cx="252000" cy="252000"/>
+            </a:xfrm>
+            <a:prstGeom prst="ellipse">
+              <a:avLst/>
+            </a:prstGeom>
+            <a:solidFill>
+              <a:srgbClr val="9DD4CF"/>
+            </a:solidFill>
+            <a:ln>
+              <a:noFill/>
+            </a:ln>
+          </p:spPr>
+          <p:txBody>
+            <a:bodyPr/>
+            <a:lstStyle/>
+            <a:p>
+              <a:endParaRPr lang="en-US"/>
+            </a:p>
+          </p:txBody>
+        </p:sp>
+        <p:sp>
+          <p:nvSpPr>
+            <p:cNvPr id="9003" name="hoffa"/>
+            <p:cNvSpPr/>
+            <p:nvPr/>
+          </p:nvSpPr>
+          <p:spPr>
+            <a:xfrm>
+              <a:off x="11862316" y="1963821"/>
+              <a:ext cx="161665" cy="124358"/>
+            </a:xfrm>
+            <a:prstGeom prst="rightArrow">
+              <a:avLst>
+                <a:gd name="adj1" fmla="val 50000"/>
+                <a:gd name="adj2" fmla="val 50000"/>
+              </a:avLst>
+            </a:prstGeom>
+            <a:solidFill>
+              <a:srgbClr val="FFFFFF"/>
+            </a:solidFill>
+            <a:ln>
+              <a:noFill/>
+            </a:ln>
+          </p:spPr>
+          <p:txBody>
+            <a:bodyPr/>
+            <a:lstStyle/>
+            <a:p>
+              <a:endParaRPr lang="en-US"/>
+            </a:p>
+          </p:txBody>
+        </p:sp>
+      </p:grpSp>
+      <p:cxnSp>
+        <p:nvCxnSpPr>
+          <p:cNvPr id="9004" name="Connector 9003"/>
+          <p:cNvCxnSpPr/>
+          <p:nvPr/>
+        </p:nvCxnSpPr>
+        <p:spPr>
+          <a:xfrm>
+            <a:off x="1560000" y="2860000"/>
+            <a:ext cx="260000" cy="0"/>
+          </a:xfrm>
+          <a:prstGeom prst="line">
+            <a:avLst/>
+          </a:prstGeom>
+          <a:ln w="19050">
+            <a:solidFill>
+              <a:srgbClr val="9B9B9B"/>
+            </a:solidFill>
+            <a:tailEnd type="triangle" w="med" len="med"/>
+          </a:ln>
+        </p:spPr>
+        <p:style>
+          <a:lnRef idx="2">
+            <a:schemeClr val="accent1"/>
+          </a:lnRef>
+          <a:fillRef idx="0">
+            <a:schemeClr val="accent1"/>
+          </a:fillRef>
+          <a:effectRef idx="1">
+            <a:schemeClr val="accent1"/>
+          </a:effectRef>
+          <a:fontRef idx="minor">
+            <a:schemeClr val="tx1"/>
+          </a:fontRef>
+        </p:style>
+      </p:cxnSp>
+      <p:cxnSp>
+        <p:nvCxnSpPr>
+          <p:cNvPr id="9005" name="Connector 9004"/>
+          <p:cNvCxnSpPr/>
+          <p:nvPr/>
+        </p:nvCxnSpPr>
+        <p:spPr>
+          <a:xfrm>
+            <a:off x="3080000" y="2860000"/>
+            <a:ext cx="450000" cy="0"/>
+          </a:xfrm>
+          <a:prstGeom prst="line">
+            <a:avLst/>
+          </a:prstGeom>
+          <a:ln w="19050">
+            <a:solidFill>
+              <a:srgbClr val="9B9B9B"/>
+            </a:solidFill>
+            <a:tailEnd type="triangle" w="med" len="med"/>
+          </a:ln>
+        </p:spPr>
+        <p:style>
+          <a:lnRef idx="2">
+            <a:schemeClr val="accent1"/>
+          </a:lnRef>
+          <a:fillRef idx="0">
+            <a:schemeClr val="accent1"/>
+          </a:fillRef>
+          <a:effectRef idx="1">
+            <a:schemeClr val="accent1"/>
+          </a:effectRef>
+          <a:fontRef idx="minor">
+            <a:schemeClr val="tx1"/>
+          </a:fontRef>
+        </p:style>
+      </p:cxnSp>
+      <p:cxnSp>
+        <p:nvCxnSpPr>
+          <p:cNvPr id="9006" name="Connector 9005"/>
+          <p:cNvCxnSpPr/>
+          <p:nvPr/>
+        </p:nvCxnSpPr>
+        <p:spPr>
+          <a:xfrm>
+            <a:off x="4826000" y="2860000"/>
+            <a:ext cx="450000" cy="0"/>
+          </a:xfrm>
+          <a:prstGeom prst="line">
+            <a:avLst/>
+          </a:prstGeom>
+          <a:ln w="19050">
+            <a:solidFill>
+              <a:srgbClr val="9B9B9B"/>
+            </a:solidFill>
+            <a:tailEnd type="triangle" w="med" len="med"/>
+          </a:ln>
+        </p:spPr>
+        <p:style>
+          <a:lnRef idx="2">
+            <a:schemeClr val="accent1"/>
+          </a:lnRef>
+          <a:fillRef idx="0">
+            <a:schemeClr val="accent1"/>
+          </a:fillRef>
+          <a:effectRef idx="1">
+            <a:schemeClr val="accent1"/>
+          </a:effectRef>
+          <a:fontRef idx="minor">
+            <a:schemeClr val="tx1"/>
+          </a:fontRef>
+        </p:style>
+      </p:cxnSp>
+      <p:sp>
+        <p:nvSpPr>
+          <p:cNvPr id="9007" name="TextBox 9006"/>
+          <p:cNvSpPr txBox="1"/>
+          <p:nvPr/>
+        </p:nvSpPr>
+        <p:spPr>
+          <a:xfrm>
+            <a:off x="4866000" y="2580000"/>
+            <a:ext cx="620000" cy="260000"/>
+          </a:xfrm>
+          <a:prstGeom prst="rect">
+            <a:avLst/>
+          </a:prstGeom>
+          <a:noFill/>
+        </p:spPr>
+        <p:txBody>
+          <a:bodyPr wrap="square" lIns="45720" rIns="45720" tIns="36576" bIns="36576" anchor="ctr">
+            <a:spAutoFit/>
+          </a:bodyPr>
+          <a:lstStyle/>
+          <a:p>
+            <a:pPr algn="ctr"/>
+            <a:r>
+              <a:rPr sz="900" b="1" i="0">
+                <a:solidFill>
+                  <a:srgbClr val="C00000"/>
+                </a:solidFill>
+                <a:latin typeface="Segoe UI"/>
+              </a:rPr>
+              <a:t>No</a:t>
+            </a:r>
+          </a:p>
+        </p:txBody>
+      </p:sp>
+      <p:cxnSp>
+        <p:nvCxnSpPr>
+          <p:cNvPr id="9008" name="Connector 9007"/>
+          <p:cNvCxnSpPr/>
+          <p:nvPr/>
+        </p:nvCxnSpPr>
+        <p:spPr>
+          <a:xfrm flipV="1">
+            <a:off x="4178000" y="2152000"/>
+            <a:ext cx="7760000" cy="273660"/>
+          </a:xfrm>
+          <a:prstGeom prst="bentConnector3">
+            <a:avLst/>
+          </a:prstGeom>
+          <a:ln w="19050">
+            <a:solidFill>
+              <a:srgbClr val="9B9B9B"/>
+            </a:solidFill>
+            <a:tailEnd type="triangle" w="med" len="med"/>
+          </a:ln>
+        </p:spPr>
+        <p:style>
+          <a:lnRef idx="2">
+            <a:schemeClr val="accent1"/>
+          </a:lnRef>
+          <a:fillRef idx="0">
+            <a:schemeClr val="accent1"/>
+          </a:fillRef>
+          <a:effectRef idx="1">
+            <a:schemeClr val="accent1"/>
+          </a:effectRef>
+          <a:fontRef idx="minor">
+            <a:schemeClr val="tx1"/>
+          </a:fontRef>
+        </p:style>
+      </p:cxnSp>
+      <p:sp>
+        <p:nvSpPr>
+          <p:cNvPr id="9009" name="TextBox 9008"/>
+          <p:cNvSpPr txBox="1"/>
+          <p:nvPr/>
+        </p:nvSpPr>
+        <p:spPr>
+          <a:xfrm>
+            <a:off x="3858000" y="2145660"/>
+            <a:ext cx="620000" cy="260000"/>
+          </a:xfrm>
+          <a:prstGeom prst="rect">
+            <a:avLst/>
+          </a:prstGeom>
+          <a:noFill/>
+        </p:spPr>
+        <p:txBody>
+          <a:bodyPr wrap="square" lIns="45720" rIns="45720" tIns="36576" bIns="36576" anchor="ctr">
+            <a:spAutoFit/>
+          </a:bodyPr>
+          <a:lstStyle/>
+          <a:p>
+            <a:pPr algn="ctr"/>
+            <a:r>
+              <a:rPr sz="900" b="1" i="0">
+                <a:solidFill>
+                  <a:srgbClr val="009A44"/>
+                </a:solidFill>
+                <a:latin typeface="Segoe UI"/>
+              </a:rPr>
+              <a:t>Yes</a:t>
+            </a:r>
+          </a:p>
+        </p:txBody>
+      </p:sp>
+      <p:cxnSp>
+        <p:nvCxnSpPr>
+          <p:cNvPr id="9010" name="Connector 9009"/>
+          <p:cNvCxnSpPr/>
+          <p:nvPr/>
+        </p:nvCxnSpPr>
+        <p:spPr>
+          <a:xfrm>
+            <a:off x="6536000" y="2860000"/>
+            <a:ext cx="260000" cy="0"/>
+          </a:xfrm>
+          <a:prstGeom prst="line">
+            <a:avLst/>
+          </a:prstGeom>
+          <a:ln w="19050">
+            <a:solidFill>
+              <a:srgbClr val="9B9B9B"/>
+            </a:solidFill>
+            <a:tailEnd type="triangle" w="med" len="med"/>
+          </a:ln>
+        </p:spPr>
+        <p:style>
+          <a:lnRef idx="2">
+            <a:schemeClr val="accent1"/>
+          </a:lnRef>
+          <a:fillRef idx="0">
+            <a:schemeClr val="accent1"/>
+          </a:fillRef>
+          <a:effectRef idx="1">
+            <a:schemeClr val="accent1"/>
+          </a:effectRef>
+          <a:fontRef idx="minor">
+            <a:schemeClr val="tx1"/>
+          </a:fontRef>
+        </p:style>
+      </p:cxnSp>
+      <p:cxnSp>
+        <p:nvCxnSpPr>
+          <p:cNvPr id="9011" name="Connector 9010"/>
+          <p:cNvCxnSpPr/>
+          <p:nvPr/>
+        </p:nvCxnSpPr>
+        <p:spPr>
+          <a:xfrm>
+            <a:off x="8056000" y="2860000"/>
+            <a:ext cx="450000" cy="0"/>
+          </a:xfrm>
+          <a:prstGeom prst="line">
+            <a:avLst/>
+          </a:prstGeom>
+          <a:ln w="19050">
+            <a:solidFill>
+              <a:srgbClr val="9B9B9B"/>
+            </a:solidFill>
+            <a:tailEnd type="triangle" w="med" len="med"/>
+          </a:ln>
+        </p:spPr>
+        <p:style>
+          <a:lnRef idx="2">
+            <a:schemeClr val="accent1"/>
+          </a:lnRef>
+          <a:fillRef idx="0">
+            <a:schemeClr val="accent1"/>
+          </a:fillRef>
+          <a:effectRef idx="1">
+            <a:schemeClr val="accent1"/>
+          </a:effectRef>
+          <a:fontRef idx="minor">
+            <a:schemeClr val="tx1"/>
+          </a:fontRef>
+        </p:style>
+      </p:cxnSp>
+      <p:cxnSp>
+        <p:nvCxnSpPr>
+          <p:cNvPr id="9012" name="Connector 9011"/>
+          <p:cNvCxnSpPr/>
+          <p:nvPr/>
+        </p:nvCxnSpPr>
+        <p:spPr>
+          <a:xfrm flipV="1">
+            <a:off x="9154000" y="2152000"/>
+            <a:ext cx="2784000" cy="273660"/>
+          </a:xfrm>
+          <a:prstGeom prst="bentConnector3">
+            <a:avLst/>
+          </a:prstGeom>
+          <a:ln w="19050">
+            <a:solidFill>
+              <a:srgbClr val="9B9B9B"/>
+            </a:solidFill>
+            <a:tailEnd type="triangle" w="med" len="med"/>
+          </a:ln>
+        </p:spPr>
+        <p:style>
+          <a:lnRef idx="2">
+            <a:schemeClr val="accent1"/>
+          </a:lnRef>
+          <a:fillRef idx="0">
+            <a:schemeClr val="accent1"/>
+          </a:fillRef>
+          <a:effectRef idx="1">
+            <a:schemeClr val="accent1"/>
+          </a:effectRef>
+          <a:fontRef idx="minor">
+            <a:schemeClr val="tx1"/>
+          </a:fontRef>
+        </p:style>
+      </p:cxnSp>
+      <p:sp>
+        <p:nvSpPr>
+          <p:cNvPr id="9013" name="TextBox 9012"/>
+          <p:cNvSpPr txBox="1"/>
+          <p:nvPr/>
+        </p:nvSpPr>
+        <p:spPr>
+          <a:xfrm>
+            <a:off x="8834000" y="2145660"/>
+            <a:ext cx="620000" cy="260000"/>
+          </a:xfrm>
+          <a:prstGeom prst="rect">
+            <a:avLst/>
+          </a:prstGeom>
+          <a:noFill/>
+        </p:spPr>
+        <p:txBody>
+          <a:bodyPr wrap="square" lIns="45720" rIns="45720" tIns="36576" bIns="36576" anchor="ctr">
+            <a:spAutoFit/>
+          </a:bodyPr>
+          <a:lstStyle/>
+          <a:p>
+            <a:pPr algn="ctr"/>
+            <a:r>
+              <a:rPr sz="900" b="1" i="0">
+                <a:solidFill>
+                  <a:srgbClr val="009A44"/>
+                </a:solidFill>
+                <a:latin typeface="Segoe UI"/>
+              </a:rPr>
+              <a:t>Yes</a:t>
+            </a:r>
+          </a:p>
+        </p:txBody>
+      </p:sp>
+      <p:cxnSp>
+        <p:nvCxnSpPr>
+          <p:cNvPr id="9014" name="Connector 9013"/>
+          <p:cNvCxnSpPr/>
+          <p:nvPr/>
+        </p:nvCxnSpPr>
+        <p:spPr>
+          <a:xfrm>
+            <a:off x="9802000" y="2860000"/>
+            <a:ext cx="450000" cy="0"/>
+          </a:xfrm>
+          <a:prstGeom prst="line">
+            <a:avLst/>
+          </a:prstGeom>
+          <a:ln w="19050">
+            <a:solidFill>
+              <a:srgbClr val="9B9B9B"/>
+            </a:solidFill>
+            <a:tailEnd type="triangle" w="med" len="med"/>
+          </a:ln>
+        </p:spPr>
+        <p:style>
+          <a:lnRef idx="2">
+            <a:schemeClr val="accent1"/>
+          </a:lnRef>
+          <a:fillRef idx="0">
+            <a:schemeClr val="accent1"/>
+          </a:fillRef>
+          <a:effectRef idx="1">
+            <a:schemeClr val="accent1"/>
+          </a:effectRef>
+          <a:fontRef idx="minor">
+            <a:schemeClr val="tx1"/>
+          </a:fontRef>
+        </p:style>
+      </p:cxnSp>
+      <p:sp>
+        <p:nvSpPr>
+          <p:cNvPr id="9015" name="TextBox 9014"/>
+          <p:cNvSpPr txBox="1"/>
+          <p:nvPr/>
+        </p:nvSpPr>
+        <p:spPr>
+          <a:xfrm>
+            <a:off x="9842000" y="2580000"/>
+            <a:ext cx="620000" cy="260000"/>
+          </a:xfrm>
+          <a:prstGeom prst="rect">
+            <a:avLst/>
+          </a:prstGeom>
+          <a:noFill/>
+        </p:spPr>
+        <p:txBody>
+          <a:bodyPr wrap="square" lIns="45720" rIns="45720" tIns="36576" bIns="36576" anchor="ctr">
+            <a:spAutoFit/>
+          </a:bodyPr>
+          <a:lstStyle/>
+          <a:p>
+            <a:pPr algn="ctr"/>
+            <a:r>
+              <a:rPr sz="900" b="1" i="0">
+                <a:solidFill>
+                  <a:srgbClr val="C00000"/>
+                </a:solidFill>
+                <a:latin typeface="Segoe UI"/>
+              </a:rPr>
+              <a:t>No</a:t>
+            </a:r>
+          </a:p>
+        </p:txBody>
+      </p:sp>
+      <p:cxnSp>
+        <p:nvCxnSpPr>
+          <p:cNvPr id="9016" name="Connector 9015"/>
+          <p:cNvCxnSpPr/>
+          <p:nvPr/>
+        </p:nvCxnSpPr>
+        <p:spPr>
+          <a:xfrm flipV="1">
+            <a:off x="10882000" y="2152000"/>
+            <a:ext cx="1056000" cy="348000"/>
+          </a:xfrm>
+          <a:prstGeom prst="bentConnector3">
+            <a:avLst/>
+          </a:prstGeom>
+          <a:ln w="19050">
+            <a:solidFill>
+              <a:srgbClr val="9B9B9B"/>
+            </a:solidFill>
+            <a:tailEnd type="triangle" w="med" len="med"/>
+          </a:ln>
+        </p:spPr>
+        <p:style>
+          <a:lnRef idx="2">
+            <a:schemeClr val="accent1"/>
+          </a:lnRef>
+          <a:fillRef idx="0">
+            <a:schemeClr val="accent1"/>
+          </a:fillRef>
+          <a:effectRef idx="1">
+            <a:schemeClr val="accent1"/>
+          </a:effectRef>
+          <a:fontRef idx="minor">
+            <a:schemeClr val="tx1"/>
+          </a:fontRef>
+        </p:style>
+      </p:cxnSp>
+      <p:sp>
+        <p:nvSpPr>
+          <p:cNvPr id="9017" name="TextBox 9016"/>
+          <p:cNvSpPr txBox="1"/>
+          <p:nvPr/>
+        </p:nvSpPr>
+        <p:spPr>
+          <a:xfrm>
+            <a:off x="5276000" y="4120000"/>
+            <a:ext cx="2600000" cy="300000"/>
+          </a:xfrm>
+          <a:prstGeom prst="rect">
+            <a:avLst/>
+          </a:prstGeom>
+          <a:noFill/>
+        </p:spPr>
+        <p:txBody>
+          <a:bodyPr wrap="square" lIns="45720" rIns="45720" tIns="36576" bIns="36576" anchor="ctr">
+            <a:spAutoFit/>
+          </a:bodyPr>
+          <a:lstStyle/>
+          <a:p>
+            <a:pPr algn="ctr"/>
+            <a:r>
+              <a:rPr sz="700" b="0" i="1">
+                <a:solidFill>
+                  <a:srgbClr val="404040"/>
+                </a:solidFill>
+                <a:latin typeface="Segoe UI"/>
+              </a:rPr>
+              <a:t>Complete case audit trail is maintained throughout Stage 4</a:t>
+            </a:r>
+          </a:p>
+        </p:txBody>
+      </p:sp>
     </p:spTree>
     <p:extLst>
       <p:ext uri="{BB962C8B-B14F-4D97-AF65-F5344CB8AC3E}">
@@ -20783,6 +23462,787 @@
           </a:graphicData>
         </a:graphic>
       </p:graphicFrame>
+      <p:sp>
+        <p:nvSpPr>
+          <p:cNvPr id="973" name="Rounded Rectangle 972"/>
+          <p:cNvSpPr/>
+          <p:nvPr/>
+        </p:nvSpPr>
+        <p:spPr>
+          <a:xfrm>
+            <a:off x="300000" y="2500000"/>
+            <a:ext cx="1260000" cy="720000"/>
+          </a:xfrm>
+          <a:prstGeom prst="roundRect">
+            <a:avLst>
+              <a:gd name="adj" fmla="val 10000"/>
+            </a:avLst>
+          </a:prstGeom>
+          <a:noFill/>
+          <a:ln w="12700">
+            <a:solidFill>
+              <a:srgbClr val="BFBFBF"/>
+            </a:solidFill>
+          </a:ln>
+          <a:effectLst/>
+        </p:spPr>
+        <p:style>
+          <a:lnRef idx="1">
+            <a:schemeClr val="accent1"/>
+          </a:lnRef>
+          <a:fillRef idx="3">
+            <a:schemeClr val="accent1"/>
+          </a:fillRef>
+          <a:effectRef idx="2">
+            <a:schemeClr val="accent1"/>
+          </a:effectRef>
+          <a:fontRef idx="minor">
+            <a:schemeClr val="lt1"/>
+          </a:fontRef>
+        </p:style>
+        <p:txBody>
+          <a:bodyPr rtlCol="0" anchor="ctr" wrap="square" lIns="45720" rIns="45720" tIns="36576" bIns="36576"/>
+          <a:lstStyle/>
+          <a:p>
+            <a:pPr algn="ctr"/>
+            <a:r>
+              <a:rPr sz="900" b="1" i="0">
+                <a:solidFill>
+                  <a:srgbClr val="404040"/>
+                </a:solidFill>
+                <a:latin typeface="Segoe UI"/>
+              </a:rPr>
+              <a:t>Visa Arbitration ruling (if escalated)</a:t>
+            </a:r>
+          </a:p>
+        </p:txBody>
+      </p:sp>
+      <p:sp>
+        <p:nvSpPr>
+          <p:cNvPr id="974" name="TextBox 973"/>
+          <p:cNvSpPr txBox="1"/>
+          <p:nvPr/>
+        </p:nvSpPr>
+        <p:spPr>
+          <a:xfrm>
+            <a:off x="280000" y="3260000"/>
+            <a:ext cx="1300000" cy="250000"/>
+          </a:xfrm>
+          <a:prstGeom prst="rect">
+            <a:avLst/>
+          </a:prstGeom>
+          <a:noFill/>
+        </p:spPr>
+        <p:txBody>
+          <a:bodyPr wrap="square" lIns="45720" rIns="45720" tIns="36576" bIns="36576" anchor="ctr">
+            <a:spAutoFit/>
+          </a:bodyPr>
+          <a:lstStyle/>
+          <a:p>
+            <a:pPr algn="ctr"/>
+            <a:r>
+              <a:rPr sz="700" b="0" i="1">
+                <a:solidFill>
+                  <a:srgbClr val="404040"/>
+                </a:solidFill>
+                <a:latin typeface="Segoe UI"/>
+              </a:rPr>
+              <a:t>10 days</a:t>
+            </a:r>
+          </a:p>
+        </p:txBody>
+      </p:sp>
+      <p:sp>
+        <p:nvSpPr>
+          <p:cNvPr id="975" name="Diamond 974"/>
+          <p:cNvSpPr/>
+          <p:nvPr/>
+        </p:nvSpPr>
+        <p:spPr>
+          <a:xfrm>
+            <a:off x="2010000" y="2425660"/>
+            <a:ext cx="1296000" cy="868680"/>
+          </a:xfrm>
+          <a:prstGeom prst="diamond">
+            <a:avLst/>
+          </a:prstGeom>
+          <a:solidFill>
+            <a:srgbClr val="FFFFFF"/>
+          </a:solidFill>
+          <a:ln w="12700">
+            <a:solidFill>
+              <a:srgbClr val="BFBFBF"/>
+            </a:solidFill>
+          </a:ln>
+          <a:effectLst/>
+        </p:spPr>
+        <p:style>
+          <a:lnRef idx="1">
+            <a:schemeClr val="accent1"/>
+          </a:lnRef>
+          <a:fillRef idx="3">
+            <a:schemeClr val="accent1"/>
+          </a:fillRef>
+          <a:effectRef idx="2">
+            <a:schemeClr val="accent1"/>
+          </a:effectRef>
+          <a:fontRef idx="minor">
+            <a:schemeClr val="lt1"/>
+          </a:fontRef>
+        </p:style>
+        <p:txBody>
+          <a:bodyPr rtlCol="0" anchor="ctr" wrap="square" lIns="0" rIns="0" tIns="36576" bIns="36576"/>
+          <a:lstStyle/>
+          <a:p>
+            <a:pPr algn="ctr"/>
+            <a:r>
+              <a:rPr sz="900" b="1" i="0">
+                <a:solidFill>
+                  <a:srgbClr val="404040"/>
+                </a:solidFill>
+                <a:latin typeface="Segoe UI"/>
+              </a:rPr>
+              <a:t>Ruled in Beem's favor?</a:t>
+            </a:r>
+          </a:p>
+        </p:txBody>
+      </p:sp>
+      <p:sp>
+        <p:nvSpPr>
+          <p:cNvPr id="976" name="Rounded Rectangle 975"/>
+          <p:cNvSpPr/>
+          <p:nvPr/>
+        </p:nvSpPr>
+        <p:spPr>
+          <a:xfrm>
+            <a:off x="3756000" y="2500000"/>
+            <a:ext cx="1260000" cy="720000"/>
+          </a:xfrm>
+          <a:prstGeom prst="roundRect">
+            <a:avLst>
+              <a:gd name="adj" fmla="val 10000"/>
+            </a:avLst>
+          </a:prstGeom>
+          <a:noFill/>
+          <a:ln w="12700">
+            <a:solidFill>
+              <a:srgbClr val="BFBFBF"/>
+            </a:solidFill>
+          </a:ln>
+          <a:effectLst/>
+        </p:spPr>
+        <p:style>
+          <a:lnRef idx="1">
+            <a:schemeClr val="accent1"/>
+          </a:lnRef>
+          <a:fillRef idx="3">
+            <a:schemeClr val="accent1"/>
+          </a:fillRef>
+          <a:effectRef idx="2">
+            <a:schemeClr val="accent1"/>
+          </a:effectRef>
+          <a:fontRef idx="minor">
+            <a:schemeClr val="lt1"/>
+          </a:fontRef>
+        </p:style>
+        <p:txBody>
+          <a:bodyPr rtlCol="0" anchor="ctr" wrap="square" lIns="45720" rIns="45720" tIns="36576" bIns="36576"/>
+          <a:lstStyle/>
+          <a:p>
+            <a:pPr algn="ctr"/>
+            <a:r>
+              <a:rPr sz="900" b="1" i="0">
+                <a:solidFill>
+                  <a:srgbClr val="404040"/>
+                </a:solidFill>
+                <a:latin typeface="Segoe UI"/>
+              </a:rPr>
+              <a:t>Finalize or reverse the provisional credit, as applicable</a:t>
+            </a:r>
+          </a:p>
+        </p:txBody>
+      </p:sp>
+      <p:sp>
+        <p:nvSpPr>
+          <p:cNvPr id="977" name="TextBox 976"/>
+          <p:cNvSpPr txBox="1"/>
+          <p:nvPr/>
+        </p:nvSpPr>
+        <p:spPr>
+          <a:xfrm>
+            <a:off x="3716000" y="3260000"/>
+            <a:ext cx="1340000" cy="430000"/>
+          </a:xfrm>
+          <a:prstGeom prst="rect">
+            <a:avLst/>
+          </a:prstGeom>
+          <a:noFill/>
+        </p:spPr>
+        <p:txBody>
+          <a:bodyPr wrap="square" lIns="45720" rIns="45720" tIns="36576" bIns="36576" anchor="ctr">
+            <a:spAutoFit/>
+          </a:bodyPr>
+          <a:lstStyle/>
+          <a:p>
+            <a:pPr algn="ctr"/>
+            <a:r>
+              <a:rPr sz="700" b="0" i="1">
+                <a:solidFill>
+                  <a:srgbClr val="404040"/>
+                </a:solidFill>
+                <a:latin typeface="Segoe UI"/>
+              </a:rPr>
+              <a:t>Retain credit if ruled in Beem's favor; reverse if ruled against Beem</a:t>
+            </a:r>
+          </a:p>
+        </p:txBody>
+      </p:sp>
+      <p:sp>
+        <p:nvSpPr>
+          <p:cNvPr id="978" name="Rounded Rectangle 977"/>
+          <p:cNvSpPr/>
+          <p:nvPr/>
+        </p:nvSpPr>
+        <p:spPr>
+          <a:xfrm>
+            <a:off x="5316000" y="2500000"/>
+            <a:ext cx="1260000" cy="720000"/>
+          </a:xfrm>
+          <a:prstGeom prst="roundRect">
+            <a:avLst>
+              <a:gd name="adj" fmla="val 10000"/>
+            </a:avLst>
+          </a:prstGeom>
+          <a:solidFill>
+            <a:srgbClr val="EDDBFB">
+              <a:alpha val="56863"/>
+            </a:srgbClr>
+          </a:solidFill>
+          <a:ln w="12700">
+            <a:solidFill>
+              <a:srgbClr val="9B40EA"/>
+            </a:solidFill>
+          </a:ln>
+          <a:effectLst/>
+        </p:spPr>
+        <p:style>
+          <a:lnRef idx="1">
+            <a:schemeClr val="accent1"/>
+          </a:lnRef>
+          <a:fillRef idx="3">
+            <a:schemeClr val="accent1"/>
+          </a:fillRef>
+          <a:effectRef idx="2">
+            <a:schemeClr val="accent1"/>
+          </a:effectRef>
+          <a:fontRef idx="minor">
+            <a:schemeClr val="lt1"/>
+          </a:fontRef>
+        </p:style>
+        <p:txBody>
+          <a:bodyPr rtlCol="0" anchor="ctr" wrap="square" lIns="45720" rIns="45720" tIns="36576" bIns="36576"/>
+          <a:lstStyle/>
+          <a:p>
+            <a:pPr algn="ctr"/>
+            <a:r>
+              <a:rPr sz="900" b="1" i="0">
+                <a:solidFill>
+                  <a:srgbClr val="404040"/>
+                </a:solidFill>
+                <a:latin typeface="Segoe UI"/>
+              </a:rPr>
+              <a:t>Notify cardholder of the decision</a:t>
+            </a:r>
+          </a:p>
+        </p:txBody>
+      </p:sp>
+      <p:sp>
+        <p:nvSpPr>
+          <p:cNvPr id="979" name="Rounded Rectangle 978"/>
+          <p:cNvSpPr/>
+          <p:nvPr/>
+        </p:nvSpPr>
+        <p:spPr>
+          <a:xfrm>
+            <a:off x="6876000" y="2500000"/>
+            <a:ext cx="1260000" cy="720000"/>
+          </a:xfrm>
+          <a:prstGeom prst="roundRect">
+            <a:avLst>
+              <a:gd name="adj" fmla="val 10000"/>
+            </a:avLst>
+          </a:prstGeom>
+          <a:noFill/>
+          <a:ln w="12700">
+            <a:solidFill>
+              <a:srgbClr val="BFBFBF"/>
+            </a:solidFill>
+          </a:ln>
+          <a:effectLst/>
+        </p:spPr>
+        <p:style>
+          <a:lnRef idx="1">
+            <a:schemeClr val="accent1"/>
+          </a:lnRef>
+          <a:fillRef idx="3">
+            <a:schemeClr val="accent1"/>
+          </a:fillRef>
+          <a:effectRef idx="2">
+            <a:schemeClr val="accent1"/>
+          </a:effectRef>
+          <a:fontRef idx="minor">
+            <a:schemeClr val="lt1"/>
+          </a:fontRef>
+        </p:style>
+        <p:txBody>
+          <a:bodyPr rtlCol="0" anchor="ctr" wrap="square" lIns="45720" rIns="45720" tIns="36576" bIns="36576"/>
+          <a:lstStyle/>
+          <a:p>
+            <a:pPr algn="ctr"/>
+            <a:r>
+              <a:rPr sz="900" b="1" i="0">
+                <a:solidFill>
+                  <a:srgbClr val="404040"/>
+                </a:solidFill>
+                <a:latin typeface="Segoe UI"/>
+              </a:rPr>
+              <a:t>Record recoveries, losses, fees &amp; GL entries</a:t>
+            </a:r>
+          </a:p>
+        </p:txBody>
+      </p:sp>
+      <p:sp>
+        <p:nvSpPr>
+          <p:cNvPr id="980" name="Rounded Rectangle 979"/>
+          <p:cNvSpPr/>
+          <p:nvPr/>
+        </p:nvSpPr>
+        <p:spPr>
+          <a:xfrm>
+            <a:off x="8436000" y="2500000"/>
+            <a:ext cx="1260000" cy="720000"/>
+          </a:xfrm>
+          <a:prstGeom prst="roundRect">
+            <a:avLst>
+              <a:gd name="adj" fmla="val 10000"/>
+            </a:avLst>
+          </a:prstGeom>
+          <a:noFill/>
+          <a:ln w="12700">
+            <a:solidFill>
+              <a:srgbClr val="BFBFBF"/>
+            </a:solidFill>
+          </a:ln>
+          <a:effectLst/>
+        </p:spPr>
+        <p:style>
+          <a:lnRef idx="1">
+            <a:schemeClr val="accent1"/>
+          </a:lnRef>
+          <a:fillRef idx="3">
+            <a:schemeClr val="accent1"/>
+          </a:fillRef>
+          <a:effectRef idx="2">
+            <a:schemeClr val="accent1"/>
+          </a:effectRef>
+          <a:fontRef idx="minor">
+            <a:schemeClr val="lt1"/>
+          </a:fontRef>
+        </p:style>
+        <p:txBody>
+          <a:bodyPr rtlCol="0" anchor="ctr" wrap="square" lIns="45720" rIns="45720" tIns="36576" bIns="36576"/>
+          <a:lstStyle/>
+          <a:p>
+            <a:pPr algn="ctr"/>
+            <a:r>
+              <a:rPr sz="900" b="1" i="0">
+                <a:solidFill>
+                  <a:srgbClr val="404040"/>
+                </a:solidFill>
+                <a:latin typeface="Segoe UI"/>
+              </a:rPr>
+              <a:t>Archive supporting evidence &amp; close case</a:t>
+            </a:r>
+          </a:p>
+        </p:txBody>
+      </p:sp>
+      <p:sp>
+        <p:nvSpPr>
+          <p:cNvPr id="981" name="Rounded Rectangle 980"/>
+          <p:cNvSpPr/>
+          <p:nvPr/>
+        </p:nvSpPr>
+        <p:spPr>
+          <a:xfrm>
+            <a:off x="9996000" y="2500000"/>
+            <a:ext cx="1260000" cy="720000"/>
+          </a:xfrm>
+          <a:prstGeom prst="roundRect">
+            <a:avLst>
+              <a:gd name="adj" fmla="val 10000"/>
+            </a:avLst>
+          </a:prstGeom>
+          <a:noFill/>
+          <a:ln w="12700">
+            <a:solidFill>
+              <a:srgbClr val="BFBFBF"/>
+            </a:solidFill>
+          </a:ln>
+          <a:effectLst/>
+        </p:spPr>
+        <p:style>
+          <a:lnRef idx="1">
+            <a:schemeClr val="accent1"/>
+          </a:lnRef>
+          <a:fillRef idx="3">
+            <a:schemeClr val="accent1"/>
+          </a:fillRef>
+          <a:effectRef idx="2">
+            <a:schemeClr val="accent1"/>
+          </a:effectRef>
+          <a:fontRef idx="minor">
+            <a:schemeClr val="lt1"/>
+          </a:fontRef>
+        </p:style>
+        <p:txBody>
+          <a:bodyPr rtlCol="0" anchor="ctr" wrap="square" lIns="45720" rIns="45720" tIns="36576" bIns="36576"/>
+          <a:lstStyle/>
+          <a:p>
+            <a:pPr algn="ctr"/>
+            <a:r>
+              <a:rPr sz="900" b="1" i="0">
+                <a:solidFill>
+                  <a:srgbClr val="404040"/>
+                </a:solidFill>
+                <a:latin typeface="Segoe UI"/>
+              </a:rPr>
+              <a:t>Prepare reporting &amp; trend analysis</a:t>
+            </a:r>
+          </a:p>
+        </p:txBody>
+      </p:sp>
+      <p:cxnSp>
+        <p:nvCxnSpPr>
+          <p:cNvPr id="982" name="Connector 981"/>
+          <p:cNvCxnSpPr/>
+          <p:nvPr/>
+        </p:nvCxnSpPr>
+        <p:spPr>
+          <a:xfrm>
+            <a:off x="1560000" y="2860000"/>
+            <a:ext cx="450000" cy="0"/>
+          </a:xfrm>
+          <a:prstGeom prst="line">
+            <a:avLst/>
+          </a:prstGeom>
+          <a:ln w="19050">
+            <a:solidFill>
+              <a:srgbClr val="9B9B9B"/>
+            </a:solidFill>
+            <a:tailEnd type="triangle" w="med" len="med"/>
+          </a:ln>
+        </p:spPr>
+        <p:style>
+          <a:lnRef idx="2">
+            <a:schemeClr val="accent1"/>
+          </a:lnRef>
+          <a:fillRef idx="0">
+            <a:schemeClr val="accent1"/>
+          </a:fillRef>
+          <a:effectRef idx="1">
+            <a:schemeClr val="accent1"/>
+          </a:effectRef>
+          <a:fontRef idx="minor">
+            <a:schemeClr val="tx1"/>
+          </a:fontRef>
+        </p:style>
+      </p:cxnSp>
+      <p:cxnSp>
+        <p:nvCxnSpPr>
+          <p:cNvPr id="983" name="Connector 982"/>
+          <p:cNvCxnSpPr/>
+          <p:nvPr/>
+        </p:nvCxnSpPr>
+        <p:spPr>
+          <a:xfrm>
+            <a:off x="3306000" y="2770000"/>
+            <a:ext cx="450000" cy="0"/>
+          </a:xfrm>
+          <a:prstGeom prst="line">
+            <a:avLst/>
+          </a:prstGeom>
+          <a:ln w="19050">
+            <a:solidFill>
+              <a:srgbClr val="9B9B9B"/>
+            </a:solidFill>
+            <a:tailEnd type="triangle" w="med" len="med"/>
+          </a:ln>
+        </p:spPr>
+        <p:style>
+          <a:lnRef idx="2">
+            <a:schemeClr val="accent1"/>
+          </a:lnRef>
+          <a:fillRef idx="0">
+            <a:schemeClr val="accent1"/>
+          </a:fillRef>
+          <a:effectRef idx="1">
+            <a:schemeClr val="accent1"/>
+          </a:effectRef>
+          <a:fontRef idx="minor">
+            <a:schemeClr val="tx1"/>
+          </a:fontRef>
+        </p:style>
+      </p:cxnSp>
+      <p:sp>
+        <p:nvSpPr>
+          <p:cNvPr id="984" name="TextBox 983"/>
+          <p:cNvSpPr txBox="1"/>
+          <p:nvPr/>
+        </p:nvSpPr>
+        <p:spPr>
+          <a:xfrm>
+            <a:off x="3046000" y="2480000"/>
+            <a:ext cx="620000" cy="260000"/>
+          </a:xfrm>
+          <a:prstGeom prst="rect">
+            <a:avLst/>
+          </a:prstGeom>
+          <a:noFill/>
+        </p:spPr>
+        <p:txBody>
+          <a:bodyPr wrap="square" lIns="45720" rIns="45720" tIns="36576" bIns="36576" anchor="ctr">
+            <a:spAutoFit/>
+          </a:bodyPr>
+          <a:lstStyle/>
+          <a:p>
+            <a:pPr algn="ctr"/>
+            <a:r>
+              <a:rPr sz="900" b="1" i="0">
+                <a:solidFill>
+                  <a:srgbClr val="009A44"/>
+                </a:solidFill>
+                <a:latin typeface="Segoe UI"/>
+              </a:rPr>
+              <a:t>Yes</a:t>
+            </a:r>
+          </a:p>
+        </p:txBody>
+      </p:sp>
+      <p:cxnSp>
+        <p:nvCxnSpPr>
+          <p:cNvPr id="985" name="Connector 984"/>
+          <p:cNvCxnSpPr/>
+          <p:nvPr/>
+        </p:nvCxnSpPr>
+        <p:spPr>
+          <a:xfrm flipV="1">
+            <a:off x="2658000" y="3220000"/>
+            <a:ext cx="1728000" cy="74340"/>
+          </a:xfrm>
+          <a:prstGeom prst="bentConnector3">
+            <a:avLst/>
+          </a:prstGeom>
+          <a:ln w="19050">
+            <a:solidFill>
+              <a:srgbClr val="9B9B9B"/>
+            </a:solidFill>
+            <a:tailEnd type="triangle" w="med" len="med"/>
+          </a:ln>
+        </p:spPr>
+        <p:style>
+          <a:lnRef idx="2">
+            <a:schemeClr val="accent1"/>
+          </a:lnRef>
+          <a:fillRef idx="0">
+            <a:schemeClr val="accent1"/>
+          </a:fillRef>
+          <a:effectRef idx="1">
+            <a:schemeClr val="accent1"/>
+          </a:effectRef>
+          <a:fontRef idx="minor">
+            <a:schemeClr val="tx1"/>
+          </a:fontRef>
+        </p:style>
+      </p:cxnSp>
+      <p:sp>
+        <p:nvSpPr>
+          <p:cNvPr id="986" name="TextBox 985"/>
+          <p:cNvSpPr txBox="1"/>
+          <p:nvPr/>
+        </p:nvSpPr>
+        <p:spPr>
+          <a:xfrm>
+            <a:off x="2698000" y="3324340"/>
+            <a:ext cx="620000" cy="260000"/>
+          </a:xfrm>
+          <a:prstGeom prst="rect">
+            <a:avLst/>
+          </a:prstGeom>
+          <a:noFill/>
+        </p:spPr>
+        <p:txBody>
+          <a:bodyPr wrap="square" lIns="45720" rIns="45720" tIns="36576" bIns="36576" anchor="ctr">
+            <a:spAutoFit/>
+          </a:bodyPr>
+          <a:lstStyle/>
+          <a:p>
+            <a:pPr algn="ctr"/>
+            <a:r>
+              <a:rPr sz="900" b="1" i="0">
+                <a:solidFill>
+                  <a:srgbClr val="C00000"/>
+                </a:solidFill>
+                <a:latin typeface="Segoe UI"/>
+              </a:rPr>
+              <a:t>No</a:t>
+            </a:r>
+          </a:p>
+        </p:txBody>
+      </p:sp>
+      <p:cxnSp>
+        <p:nvCxnSpPr>
+          <p:cNvPr id="987" name="Connector 986"/>
+          <p:cNvCxnSpPr/>
+          <p:nvPr/>
+        </p:nvCxnSpPr>
+        <p:spPr>
+          <a:xfrm>
+            <a:off x="5016000" y="2860000"/>
+            <a:ext cx="300000" cy="0"/>
+          </a:xfrm>
+          <a:prstGeom prst="line">
+            <a:avLst/>
+          </a:prstGeom>
+          <a:ln w="19050">
+            <a:solidFill>
+              <a:srgbClr val="9B9B9B"/>
+            </a:solidFill>
+            <a:tailEnd type="triangle" w="med" len="med"/>
+          </a:ln>
+        </p:spPr>
+        <p:style>
+          <a:lnRef idx="2">
+            <a:schemeClr val="accent1"/>
+          </a:lnRef>
+          <a:fillRef idx="0">
+            <a:schemeClr val="accent1"/>
+          </a:fillRef>
+          <a:effectRef idx="1">
+            <a:schemeClr val="accent1"/>
+          </a:effectRef>
+          <a:fontRef idx="minor">
+            <a:schemeClr val="tx1"/>
+          </a:fontRef>
+        </p:style>
+      </p:cxnSp>
+      <p:cxnSp>
+        <p:nvCxnSpPr>
+          <p:cNvPr id="988" name="Connector 987"/>
+          <p:cNvCxnSpPr/>
+          <p:nvPr/>
+        </p:nvCxnSpPr>
+        <p:spPr>
+          <a:xfrm>
+            <a:off x="6576000" y="2860000"/>
+            <a:ext cx="300000" cy="0"/>
+          </a:xfrm>
+          <a:prstGeom prst="line">
+            <a:avLst/>
+          </a:prstGeom>
+          <a:ln w="19050">
+            <a:solidFill>
+              <a:srgbClr val="9B9B9B"/>
+            </a:solidFill>
+            <a:tailEnd type="triangle" w="med" len="med"/>
+          </a:ln>
+        </p:spPr>
+        <p:style>
+          <a:lnRef idx="2">
+            <a:schemeClr val="accent1"/>
+          </a:lnRef>
+          <a:fillRef idx="0">
+            <a:schemeClr val="accent1"/>
+          </a:fillRef>
+          <a:effectRef idx="1">
+            <a:schemeClr val="accent1"/>
+          </a:effectRef>
+          <a:fontRef idx="minor">
+            <a:schemeClr val="tx1"/>
+          </a:fontRef>
+        </p:style>
+      </p:cxnSp>
+      <p:cxnSp>
+        <p:nvCxnSpPr>
+          <p:cNvPr id="989" name="Connector 988"/>
+          <p:cNvCxnSpPr/>
+          <p:nvPr/>
+        </p:nvCxnSpPr>
+        <p:spPr>
+          <a:xfrm>
+            <a:off x="8136000" y="2860000"/>
+            <a:ext cx="300000" cy="0"/>
+          </a:xfrm>
+          <a:prstGeom prst="line">
+            <a:avLst/>
+          </a:prstGeom>
+          <a:ln w="19050">
+            <a:solidFill>
+              <a:srgbClr val="9B9B9B"/>
+            </a:solidFill>
+            <a:tailEnd type="triangle" w="med" len="med"/>
+          </a:ln>
+        </p:spPr>
+        <p:style>
+          <a:lnRef idx="2">
+            <a:schemeClr val="accent1"/>
+          </a:lnRef>
+          <a:fillRef idx="0">
+            <a:schemeClr val="accent1"/>
+          </a:fillRef>
+          <a:effectRef idx="1">
+            <a:schemeClr val="accent1"/>
+          </a:effectRef>
+          <a:fontRef idx="minor">
+            <a:schemeClr val="tx1"/>
+          </a:fontRef>
+        </p:style>
+      </p:cxnSp>
+      <p:cxnSp>
+        <p:nvCxnSpPr>
+          <p:cNvPr id="990" name="Connector 989"/>
+          <p:cNvCxnSpPr/>
+          <p:nvPr/>
+        </p:nvCxnSpPr>
+        <p:spPr>
+          <a:xfrm>
+            <a:off x="9696000" y="2860000"/>
+            <a:ext cx="300000" cy="0"/>
+          </a:xfrm>
+          <a:prstGeom prst="line">
+            <a:avLst/>
+          </a:prstGeom>
+          <a:ln w="19050">
+            <a:solidFill>
+              <a:srgbClr val="9B9B9B"/>
+            </a:solidFill>
+            <a:tailEnd type="triangle" w="med" len="med"/>
+          </a:ln>
+        </p:spPr>
+        <p:style>
+          <a:lnRef idx="2">
+            <a:schemeClr val="accent1"/>
+          </a:lnRef>
+          <a:fillRef idx="0">
+            <a:schemeClr val="accent1"/>
+          </a:fillRef>
+          <a:effectRef idx="1">
+            <a:schemeClr val="accent1"/>
+          </a:effectRef>
+          <a:fontRef idx="minor">
+            <a:schemeClr val="tx1"/>
+          </a:fontRef>
+        </p:style>
+      </p:cxnSp>
     </p:spTree>
     <p:extLst>
       <p:ext uri="{BB962C8B-B14F-4D97-AF65-F5344CB8AC3E}">

--- a/Dispute Resolution/Dispute Resolution Process Flow.pptx
+++ b/Dispute Resolution/Dispute Resolution Process Flow.pptx
@@ -21195,7 +21195,7 @@
         <p:spPr>
           <a:xfrm>
             <a:off x="300000" y="2500000"/>
-            <a:ext cx="1260000" cy="720000"/>
+            <a:ext cx="1550000" cy="720000"/>
           </a:xfrm>
           <a:prstGeom prst="roundRect">
             <a:avLst>
@@ -21236,7 +21236,7 @@
                 </a:solidFill>
                 <a:latin typeface="Segoe UI"/>
               </a:rPr>
-              <a:t>Submit dispute to Central 1 (file the dispute)</a:t>
+              <a:t>Submit dispute to Central 1 (Visa VROL) &amp; monitor Acquirer response</a:t>
             </a:r>
           </a:p>
         </p:txBody>
@@ -21250,7 +21250,7 @@
         <p:spPr>
           <a:xfrm>
             <a:off x="280000" y="3260000"/>
-            <a:ext cx="1300000" cy="430000"/>
+            <a:ext cx="1550000" cy="430000"/>
           </a:xfrm>
           <a:prstGeom prst="rect">
             <a:avLst/>
@@ -21278,14 +21278,104 @@
       </p:sp>
       <p:sp>
         <p:nvSpPr>
-          <p:cNvPr id="975" name="Rounded Rectangle 974"/>
+          <p:cNvPr id="975" name="Diamond 974"/>
           <p:cNvSpPr/>
           <p:nvPr/>
         </p:nvSpPr>
         <p:spPr>
           <a:xfrm>
-            <a:off x="1820000" y="2500000"/>
-            <a:ext cx="1260000" cy="720000"/>
+            <a:off x="2250000" y="2425660"/>
+            <a:ext cx="1296000" cy="868680"/>
+          </a:xfrm>
+          <a:prstGeom prst="diamond">
+            <a:avLst/>
+          </a:prstGeom>
+          <a:solidFill>
+            <a:srgbClr val="FFFFFF"/>
+          </a:solidFill>
+          <a:ln w="12700">
+            <a:solidFill>
+              <a:srgbClr val="BFBFBF"/>
+            </a:solidFill>
+          </a:ln>
+          <a:effectLst/>
+        </p:spPr>
+        <p:style>
+          <a:lnRef idx="1">
+            <a:schemeClr val="accent1"/>
+          </a:lnRef>
+          <a:fillRef idx="3">
+            <a:schemeClr val="accent1"/>
+          </a:fillRef>
+          <a:effectRef idx="2">
+            <a:schemeClr val="accent1"/>
+          </a:effectRef>
+          <a:fontRef idx="minor">
+            <a:schemeClr val="lt1"/>
+          </a:fontRef>
+        </p:style>
+        <p:txBody>
+          <a:bodyPr rtlCol="0" anchor="ctr" wrap="square" lIns="0" rIns="0" tIns="36576" bIns="36576"/>
+          <a:lstStyle/>
+          <a:p>
+            <a:pPr algn="ctr"/>
+            <a:r>
+              <a:rPr sz="900" b="1" i="0">
+                <a:solidFill>
+                  <a:srgbClr val="404040"/>
+                </a:solidFill>
+                <a:latin typeface="Segoe UI"/>
+              </a:rPr>
+              <a:t>Acquirer accepts liability?</a:t>
+            </a:r>
+          </a:p>
+        </p:txBody>
+      </p:sp>
+      <p:sp>
+        <p:nvSpPr>
+          <p:cNvPr id="976" name="TextBox 975"/>
+          <p:cNvSpPr txBox="1"/>
+          <p:nvPr/>
+        </p:nvSpPr>
+        <p:spPr>
+          <a:xfrm>
+            <a:off x="2230000" y="3334340"/>
+            <a:ext cx="1300000" cy="300000"/>
+          </a:xfrm>
+          <a:prstGeom prst="rect">
+            <a:avLst/>
+          </a:prstGeom>
+          <a:noFill/>
+        </p:spPr>
+        <p:txBody>
+          <a:bodyPr wrap="square" lIns="45720" rIns="45720" tIns="36576" bIns="36576" anchor="ctr">
+            <a:spAutoFit/>
+          </a:bodyPr>
+          <a:lstStyle/>
+          <a:p>
+            <a:pPr algn="ctr"/>
+            <a:r>
+              <a:rPr sz="700" b="0" i="1">
+                <a:solidFill>
+                  <a:srgbClr val="404040"/>
+                </a:solidFill>
+                <a:latin typeface="Segoe UI"/>
+              </a:rPr>
+              <a:t>Acquirer response: 30 days</a:t>
+            </a:r>
+          </a:p>
+        </p:txBody>
+      </p:sp>
+      <p:sp>
+        <p:nvSpPr>
+          <p:cNvPr id="977" name="Rounded Rectangle 976"/>
+          <p:cNvSpPr/>
+          <p:nvPr/>
+        </p:nvSpPr>
+        <p:spPr>
+          <a:xfrm>
+            <a:off x="3946000" y="2500000"/>
+            <a:ext cx="1550000" cy="720000"/>
           </a:xfrm>
           <a:prstGeom prst="roundRect">
             <a:avLst>
@@ -21326,20 +21416,55 @@
                 </a:solidFill>
                 <a:latin typeface="Segoe UI"/>
               </a:rPr>
-              <a:t>Monitor for Acquirer Dispute Response</a:t>
+              <a:t>Beem submits Pre-Arbitration (pushes back) &amp; Acquirer responds</a:t>
             </a:r>
           </a:p>
         </p:txBody>
       </p:sp>
       <p:sp>
         <p:nvSpPr>
-          <p:cNvPr id="976" name="Diamond 975"/>
+          <p:cNvPr id="978" name="TextBox 977"/>
+          <p:cNvSpPr txBox="1"/>
+          <p:nvPr/>
+        </p:nvSpPr>
+        <p:spPr>
+          <a:xfrm>
+            <a:off x="3926000" y="3260000"/>
+            <a:ext cx="1300000" cy="250000"/>
+          </a:xfrm>
+          <a:prstGeom prst="rect">
+            <a:avLst/>
+          </a:prstGeom>
+          <a:noFill/>
+        </p:spPr>
+        <p:txBody>
+          <a:bodyPr wrap="square" lIns="45720" rIns="45720" tIns="36576" bIns="36576" anchor="ctr">
+            <a:spAutoFit/>
+          </a:bodyPr>
+          <a:lstStyle/>
+          <a:p>
+            <a:pPr algn="ctr"/>
+            <a:r>
+              <a:rPr sz="700" b="0" i="1">
+                <a:solidFill>
+                  <a:srgbClr val="404040"/>
+                </a:solidFill>
+                <a:latin typeface="Segoe UI"/>
+              </a:rPr>
+              <a:t>30 days each</a:t>
+            </a:r>
+          </a:p>
+        </p:txBody>
+      </p:sp>
+      <p:sp>
+        <p:nvSpPr>
+          <p:cNvPr id="979" name="Diamond 978"/>
           <p:cNvSpPr/>
           <p:nvPr/>
         </p:nvSpPr>
         <p:spPr>
           <a:xfrm>
-            <a:off x="3530000" y="2425660"/>
+            <a:off x="5896000" y="2425660"/>
             <a:ext cx="1296000" cy="868680"/>
           </a:xfrm>
           <a:prstGeom prst="diamond">
@@ -21375,61 +21500,81 @@
           <a:p>
             <a:pPr algn="ctr"/>
             <a:r>
-              <a:rPr sz="900" b="1" i="0">
+              <a:rPr sz="800" b="1" i="0">
                 <a:solidFill>
                   <a:srgbClr val="404040"/>
                 </a:solidFill>
                 <a:latin typeface="Segoe UI"/>
               </a:rPr>
-              <a:t>Acquirer accepts liability?</a:t>
+              <a:t>Compelling Evidence provided?</a:t>
             </a:r>
           </a:p>
         </p:txBody>
       </p:sp>
       <p:sp>
         <p:nvSpPr>
-          <p:cNvPr id="977" name="TextBox 976"/>
-          <p:cNvSpPr txBox="1"/>
-          <p:nvPr/>
-        </p:nvSpPr>
-        <p:spPr>
-          <a:xfrm>
-            <a:off x="3510000" y="3334340"/>
-            <a:ext cx="1300000" cy="300000"/>
-          </a:xfrm>
-          <a:prstGeom prst="rect">
-            <a:avLst/>
-          </a:prstGeom>
-          <a:noFill/>
-        </p:spPr>
-        <p:txBody>
-          <a:bodyPr wrap="square" lIns="45720" rIns="45720" tIns="36576" bIns="36576" anchor="ctr">
-            <a:spAutoFit/>
-          </a:bodyPr>
-          <a:lstStyle/>
-          <a:p>
-            <a:pPr algn="ctr"/>
-            <a:r>
-              <a:rPr sz="700" b="0" i="1">
-                <a:solidFill>
-                  <a:srgbClr val="404040"/>
-                </a:solidFill>
-                <a:latin typeface="Segoe UI"/>
-              </a:rPr>
-              <a:t>Acquirer response: 30 days</a:t>
-            </a:r>
-          </a:p>
-        </p:txBody>
-      </p:sp>
-      <p:sp>
-        <p:nvSpPr>
-          <p:cNvPr id="978" name="Rounded Rectangle 977"/>
+          <p:cNvPr id="980" name="Diamond 979"/>
           <p:cNvSpPr/>
           <p:nvPr/>
         </p:nvSpPr>
         <p:spPr>
           <a:xfrm>
-            <a:off x="5276000" y="2500000"/>
+            <a:off x="7592000" y="2425660"/>
+            <a:ext cx="1296000" cy="868680"/>
+          </a:xfrm>
+          <a:prstGeom prst="diamond">
+            <a:avLst/>
+          </a:prstGeom>
+          <a:solidFill>
+            <a:srgbClr val="FFFFFF"/>
+          </a:solidFill>
+          <a:ln w="12700">
+            <a:solidFill>
+              <a:srgbClr val="BFBFBF"/>
+            </a:solidFill>
+          </a:ln>
+          <a:effectLst/>
+        </p:spPr>
+        <p:style>
+          <a:lnRef idx="1">
+            <a:schemeClr val="accent1"/>
+          </a:lnRef>
+          <a:fillRef idx="3">
+            <a:schemeClr val="accent1"/>
+          </a:fillRef>
+          <a:effectRef idx="2">
+            <a:schemeClr val="accent1"/>
+          </a:effectRef>
+          <a:fontRef idx="minor">
+            <a:schemeClr val="lt1"/>
+          </a:fontRef>
+        </p:style>
+        <p:txBody>
+          <a:bodyPr rtlCol="0" anchor="ctr" wrap="square" lIns="0" rIns="0" tIns="36576" bIns="36576"/>
+          <a:lstStyle/>
+          <a:p>
+            <a:pPr algn="ctr"/>
+            <a:r>
+              <a:rPr sz="900" b="1" i="0">
+                <a:solidFill>
+                  <a:srgbClr val="404040"/>
+                </a:solidFill>
+                <a:latin typeface="Segoe UI"/>
+              </a:rPr>
+              <a:t>Resolved at pre-arb?</a:t>
+            </a:r>
+          </a:p>
+        </p:txBody>
+      </p:sp>
+      <p:sp>
+        <p:nvSpPr>
+          <p:cNvPr id="981" name="Rounded Rectangle 980"/>
+          <p:cNvSpPr/>
+          <p:nvPr/>
+        </p:nvSpPr>
+        <p:spPr>
+          <a:xfrm>
+            <a:off x="9288000" y="2500000"/>
             <a:ext cx="1260000" cy="720000"/>
           </a:xfrm>
           <a:prstGeom prst="roundRect">
@@ -21471,21 +21616,21 @@
                 </a:solidFill>
                 <a:latin typeface="Segoe UI"/>
               </a:rPr>
-              <a:t>Beem submits Pre-Arbitration (pushes back)</a:t>
+              <a:t>Escalate to Arbitration</a:t>
             </a:r>
           </a:p>
         </p:txBody>
       </p:sp>
       <p:sp>
         <p:nvSpPr>
-          <p:cNvPr id="979" name="TextBox 978"/>
+          <p:cNvPr id="982" name="TextBox 981"/>
           <p:cNvSpPr txBox="1"/>
           <p:nvPr/>
         </p:nvSpPr>
         <p:spPr>
           <a:xfrm>
-            <a:off x="5256000" y="3260000"/>
-            <a:ext cx="1300000" cy="250000"/>
+            <a:off x="9248000" y="3260000"/>
+            <a:ext cx="1500000" cy="650000"/>
           </a:xfrm>
           <a:prstGeom prst="rect">
             <a:avLst/>
@@ -21506,20 +21651,20 @@
                 </a:solidFill>
                 <a:latin typeface="Segoe UI"/>
               </a:rPr>
-              <a:t>30 days</a:t>
+              <a:t>Beem's filing deadline: 10 days from Acquirer's Pre-Arbitration response. Submit VROL Questionnaire &amp; supporting documentation.</a:t>
             </a:r>
           </a:p>
         </p:txBody>
       </p:sp>
       <p:sp>
         <p:nvSpPr>
-          <p:cNvPr id="980" name="Rounded Rectangle 979"/>
+          <p:cNvPr id="983" name="Rounded Rectangle 982"/>
           <p:cNvSpPr/>
           <p:nvPr/>
         </p:nvSpPr>
         <p:spPr>
           <a:xfrm>
-            <a:off x="6796000" y="2500000"/>
+            <a:off x="5836000" y="4000000"/>
             <a:ext cx="1260000" cy="720000"/>
           </a:xfrm>
           <a:prstGeom prst="roundRect">
@@ -21527,10 +21672,14 @@
               <a:gd name="adj" fmla="val 10000"/>
             </a:avLst>
           </a:prstGeom>
-          <a:noFill/>
+          <a:solidFill>
+            <a:srgbClr val="EDDBFB">
+              <a:alpha val="56863"/>
+            </a:srgbClr>
+          </a:solidFill>
           <a:ln w="12700">
             <a:solidFill>
-              <a:srgbClr val="BFBFBF"/>
+              <a:srgbClr val="9B40EA"/>
             </a:solidFill>
           </a:ln>
           <a:effectLst/>
@@ -21561,152 +21710,7 @@
                 </a:solidFill>
                 <a:latin typeface="Segoe UI"/>
               </a:rPr>
-              <a:t>Acquirer Pre-Arbitration response</a:t>
-            </a:r>
-          </a:p>
-        </p:txBody>
-      </p:sp>
-      <p:sp>
-        <p:nvSpPr>
-          <p:cNvPr id="981" name="TextBox 980"/>
-          <p:cNvSpPr txBox="1"/>
-          <p:nvPr/>
-        </p:nvSpPr>
-        <p:spPr>
-          <a:xfrm>
-            <a:off x="6776000" y="3260000"/>
-            <a:ext cx="1300000" cy="250000"/>
-          </a:xfrm>
-          <a:prstGeom prst="rect">
-            <a:avLst/>
-          </a:prstGeom>
-          <a:noFill/>
-        </p:spPr>
-        <p:txBody>
-          <a:bodyPr wrap="square" lIns="45720" rIns="45720" tIns="36576" bIns="36576" anchor="ctr">
-            <a:spAutoFit/>
-          </a:bodyPr>
-          <a:lstStyle/>
-          <a:p>
-            <a:pPr algn="ctr"/>
-            <a:r>
-              <a:rPr sz="700" b="0" i="1">
-                <a:solidFill>
-                  <a:srgbClr val="404040"/>
-                </a:solidFill>
-                <a:latin typeface="Segoe UI"/>
-              </a:rPr>
-              <a:t>30 days</a:t>
-            </a:r>
-          </a:p>
-        </p:txBody>
-      </p:sp>
-      <p:sp>
-        <p:nvSpPr>
-          <p:cNvPr id="982" name="Diamond 981"/>
-          <p:cNvSpPr/>
-          <p:nvPr/>
-        </p:nvSpPr>
-        <p:spPr>
-          <a:xfrm>
-            <a:off x="8506000" y="2425660"/>
-            <a:ext cx="1296000" cy="868680"/>
-          </a:xfrm>
-          <a:prstGeom prst="diamond">
-            <a:avLst/>
-          </a:prstGeom>
-          <a:solidFill>
-            <a:srgbClr val="FFFFFF"/>
-          </a:solidFill>
-          <a:ln w="12700">
-            <a:solidFill>
-              <a:srgbClr val="BFBFBF"/>
-            </a:solidFill>
-          </a:ln>
-          <a:effectLst/>
-        </p:spPr>
-        <p:style>
-          <a:lnRef idx="1">
-            <a:schemeClr val="accent1"/>
-          </a:lnRef>
-          <a:fillRef idx="3">
-            <a:schemeClr val="accent1"/>
-          </a:fillRef>
-          <a:effectRef idx="2">
-            <a:schemeClr val="accent1"/>
-          </a:effectRef>
-          <a:fontRef idx="minor">
-            <a:schemeClr val="lt1"/>
-          </a:fontRef>
-        </p:style>
-        <p:txBody>
-          <a:bodyPr rtlCol="0" anchor="ctr" wrap="square" lIns="0" rIns="0" tIns="36576" bIns="36576"/>
-          <a:lstStyle/>
-          <a:p>
-            <a:pPr algn="ctr"/>
-            <a:r>
-              <a:rPr sz="900" b="1" i="0">
-                <a:solidFill>
-                  <a:srgbClr val="404040"/>
-                </a:solidFill>
-                <a:latin typeface="Segoe UI"/>
-              </a:rPr>
-              <a:t>Resolved at pre-arb?</a:t>
-            </a:r>
-          </a:p>
-        </p:txBody>
-      </p:sp>
-      <p:sp>
-        <p:nvSpPr>
-          <p:cNvPr id="983" name="Rounded Rectangle 982"/>
-          <p:cNvSpPr/>
-          <p:nvPr/>
-        </p:nvSpPr>
-        <p:spPr>
-          <a:xfrm>
-            <a:off x="10252000" y="2500000"/>
-            <a:ext cx="1260000" cy="720000"/>
-          </a:xfrm>
-          <a:prstGeom prst="roundRect">
-            <a:avLst>
-              <a:gd name="adj" fmla="val 10000"/>
-            </a:avLst>
-          </a:prstGeom>
-          <a:noFill/>
-          <a:ln w="12700">
-            <a:solidFill>
-              <a:srgbClr val="BFBFBF"/>
-            </a:solidFill>
-          </a:ln>
-          <a:effectLst/>
-        </p:spPr>
-        <p:style>
-          <a:lnRef idx="1">
-            <a:schemeClr val="accent1"/>
-          </a:lnRef>
-          <a:fillRef idx="3">
-            <a:schemeClr val="accent1"/>
-          </a:fillRef>
-          <a:effectRef idx="2">
-            <a:schemeClr val="accent1"/>
-          </a:effectRef>
-          <a:fontRef idx="minor">
-            <a:schemeClr val="lt1"/>
-          </a:fontRef>
-        </p:style>
-        <p:txBody>
-          <a:bodyPr rtlCol="0" anchor="ctr" wrap="square" lIns="45720" rIns="45720" tIns="36576" bIns="36576"/>
-          <a:lstStyle/>
-          <a:p>
-            <a:pPr algn="ctr"/>
-            <a:r>
-              <a:rPr sz="900" b="1" i="0">
-                <a:solidFill>
-                  <a:srgbClr val="404040"/>
-                </a:solidFill>
-                <a:latin typeface="Segoe UI"/>
-              </a:rPr>
-              <a:t>Escalate to Arbitration</a:t>
+              <a:t>Contact cardholder to review evidence &amp; obtain explanation</a:t>
             </a:r>
           </a:p>
         </p:txBody>
@@ -21719,9 +21723,9 @@
         </p:nvGrpSpPr>
         <p:grpSpPr>
           <a:xfrm>
-            <a:off x="11812000" y="1900000"/>
+            <a:off x="10848000" y="1900000"/>
             <a:ext cx="252000" cy="252000"/>
-            <a:chOff x="11812000" y="1900000"/>
+            <a:chOff x="10848000" y="1900000"/>
             <a:chExt cx="252000" cy="252000"/>
           </a:xfrm>
         </p:grpSpPr>
@@ -21733,7 +21737,7 @@
           </p:nvSpPr>
           <p:spPr>
             <a:xfrm>
-              <a:off x="11812000" y="1900000"/>
+              <a:off x="10848000" y="1900000"/>
               <a:ext cx="252000" cy="252000"/>
             </a:xfrm>
             <a:prstGeom prst="ellipse">
@@ -21762,7 +21766,7 @@
           </p:nvSpPr>
           <p:spPr>
             <a:xfrm>
-              <a:off x="11862316" y="1963821"/>
+              <a:off x="10898316" y="1963821"/>
               <a:ext cx="161665" cy="124358"/>
             </a:xfrm>
             <a:prstGeom prst="rightArrow">
@@ -21795,8 +21799,8 @@
         </p:nvCxnSpPr>
         <p:spPr>
           <a:xfrm>
-            <a:off x="1560000" y="2860000"/>
-            <a:ext cx="260000" cy="0"/>
+            <a:off x="1850000" y="2860000"/>
+            <a:ext cx="400000" cy="0"/>
           </a:xfrm>
           <a:prstGeom prst="line">
             <a:avLst/>
@@ -21831,8 +21835,150 @@
         </p:nvCxnSpPr>
         <p:spPr>
           <a:xfrm>
-            <a:off x="3080000" y="2860000"/>
-            <a:ext cx="450000" cy="0"/>
+            <a:off x="3546000" y="2860000"/>
+            <a:ext cx="400000" cy="0"/>
+          </a:xfrm>
+          <a:prstGeom prst="line">
+            <a:avLst/>
+          </a:prstGeom>
+          <a:ln w="19050">
+            <a:solidFill>
+              <a:srgbClr val="9B9B9B"/>
+            </a:solidFill>
+            <a:tailEnd type="triangle" w="med" len="med"/>
+          </a:ln>
+        </p:spPr>
+        <p:style>
+          <a:lnRef idx="2">
+            <a:schemeClr val="accent1"/>
+          </a:lnRef>
+          <a:fillRef idx="0">
+            <a:schemeClr val="accent1"/>
+          </a:fillRef>
+          <a:effectRef idx="1">
+            <a:schemeClr val="accent1"/>
+          </a:effectRef>
+          <a:fontRef idx="minor">
+            <a:schemeClr val="tx1"/>
+          </a:fontRef>
+        </p:style>
+      </p:cxnSp>
+      <p:sp>
+        <p:nvSpPr>
+          <p:cNvPr id="9006" name="TextBox 9005"/>
+          <p:cNvSpPr txBox="1"/>
+          <p:nvPr/>
+        </p:nvSpPr>
+        <p:spPr>
+          <a:xfrm>
+            <a:off x="3586000" y="2580000"/>
+            <a:ext cx="620000" cy="260000"/>
+          </a:xfrm>
+          <a:prstGeom prst="rect">
+            <a:avLst/>
+          </a:prstGeom>
+          <a:noFill/>
+        </p:spPr>
+        <p:txBody>
+          <a:bodyPr wrap="square" lIns="45720" rIns="45720" tIns="36576" bIns="36576" anchor="ctr">
+            <a:spAutoFit/>
+          </a:bodyPr>
+          <a:lstStyle/>
+          <a:p>
+            <a:pPr algn="ctr"/>
+            <a:r>
+              <a:rPr sz="900" b="1" i="0">
+                <a:solidFill>
+                  <a:srgbClr val="C00000"/>
+                </a:solidFill>
+                <a:latin typeface="Segoe UI"/>
+              </a:rPr>
+              <a:t>No</a:t>
+            </a:r>
+          </a:p>
+        </p:txBody>
+      </p:sp>
+      <p:cxnSp>
+        <p:nvCxnSpPr>
+          <p:cNvPr id="9007" name="Connector 9006"/>
+          <p:cNvCxnSpPr/>
+          <p:nvPr/>
+        </p:nvCxnSpPr>
+        <p:spPr>
+          <a:xfrm flipV="1">
+            <a:off x="2898000" y="2152000"/>
+            <a:ext cx="8076000" cy="273660"/>
+          </a:xfrm>
+          <a:prstGeom prst="bentConnector3">
+            <a:avLst/>
+          </a:prstGeom>
+          <a:ln w="19050">
+            <a:solidFill>
+              <a:srgbClr val="9B9B9B"/>
+            </a:solidFill>
+            <a:tailEnd type="triangle" w="med" len="med"/>
+          </a:ln>
+        </p:spPr>
+        <p:style>
+          <a:lnRef idx="2">
+            <a:schemeClr val="accent1"/>
+          </a:lnRef>
+          <a:fillRef idx="0">
+            <a:schemeClr val="accent1"/>
+          </a:fillRef>
+          <a:effectRef idx="1">
+            <a:schemeClr val="accent1"/>
+          </a:effectRef>
+          <a:fontRef idx="minor">
+            <a:schemeClr val="tx1"/>
+          </a:fontRef>
+        </p:style>
+      </p:cxnSp>
+      <p:sp>
+        <p:nvSpPr>
+          <p:cNvPr id="9008" name="TextBox 9007"/>
+          <p:cNvSpPr txBox="1"/>
+          <p:nvPr/>
+        </p:nvSpPr>
+        <p:spPr>
+          <a:xfrm>
+            <a:off x="2578000" y="2145660"/>
+            <a:ext cx="620000" cy="260000"/>
+          </a:xfrm>
+          <a:prstGeom prst="rect">
+            <a:avLst/>
+          </a:prstGeom>
+          <a:noFill/>
+        </p:spPr>
+        <p:txBody>
+          <a:bodyPr wrap="square" lIns="45720" rIns="45720" tIns="36576" bIns="36576" anchor="ctr">
+            <a:spAutoFit/>
+          </a:bodyPr>
+          <a:lstStyle/>
+          <a:p>
+            <a:pPr algn="ctr"/>
+            <a:r>
+              <a:rPr sz="900" b="1" i="0">
+                <a:solidFill>
+                  <a:srgbClr val="009A44"/>
+                </a:solidFill>
+                <a:latin typeface="Segoe UI"/>
+              </a:rPr>
+              <a:t>Yes</a:t>
+            </a:r>
+          </a:p>
+        </p:txBody>
+      </p:sp>
+      <p:cxnSp>
+        <p:nvCxnSpPr>
+          <p:cNvPr id="9009" name="Connector 9008"/>
+          <p:cNvCxnSpPr/>
+          <p:nvPr/>
+        </p:nvCxnSpPr>
+        <p:spPr>
+          <a:xfrm>
+            <a:off x="5496000" y="2860000"/>
+            <a:ext cx="400000" cy="0"/>
           </a:xfrm>
           <a:prstGeom prst="line">
             <a:avLst/>
@@ -21861,85 +22007,14 @@
       </p:cxnSp>
       <p:cxnSp>
         <p:nvCxnSpPr>
-          <p:cNvPr id="9006" name="Connector 9005"/>
+          <p:cNvPr id="9010" name="Connector 9009"/>
           <p:cNvCxnSpPr/>
           <p:nvPr/>
         </p:nvCxnSpPr>
         <p:spPr>
-          <a:xfrm>
-            <a:off x="4826000" y="2860000"/>
-            <a:ext cx="450000" cy="0"/>
-          </a:xfrm>
-          <a:prstGeom prst="line">
-            <a:avLst/>
-          </a:prstGeom>
-          <a:ln w="19050">
-            <a:solidFill>
-              <a:srgbClr val="9B9B9B"/>
-            </a:solidFill>
-            <a:tailEnd type="triangle" w="med" len="med"/>
-          </a:ln>
-        </p:spPr>
-        <p:style>
-          <a:lnRef idx="2">
-            <a:schemeClr val="accent1"/>
-          </a:lnRef>
-          <a:fillRef idx="0">
-            <a:schemeClr val="accent1"/>
-          </a:fillRef>
-          <a:effectRef idx="1">
-            <a:schemeClr val="accent1"/>
-          </a:effectRef>
-          <a:fontRef idx="minor">
-            <a:schemeClr val="tx1"/>
-          </a:fontRef>
-        </p:style>
-      </p:cxnSp>
-      <p:sp>
-        <p:nvSpPr>
-          <p:cNvPr id="9007" name="TextBox 9006"/>
-          <p:cNvSpPr txBox="1"/>
-          <p:nvPr/>
-        </p:nvSpPr>
-        <p:spPr>
-          <a:xfrm>
-            <a:off x="4866000" y="2580000"/>
-            <a:ext cx="620000" cy="260000"/>
-          </a:xfrm>
-          <a:prstGeom prst="rect">
-            <a:avLst/>
-          </a:prstGeom>
-          <a:noFill/>
-        </p:spPr>
-        <p:txBody>
-          <a:bodyPr wrap="square" lIns="45720" rIns="45720" tIns="36576" bIns="36576" anchor="ctr">
-            <a:spAutoFit/>
-          </a:bodyPr>
-          <a:lstStyle/>
-          <a:p>
-            <a:pPr algn="ctr"/>
-            <a:r>
-              <a:rPr sz="900" b="1" i="0">
-                <a:solidFill>
-                  <a:srgbClr val="C00000"/>
-                </a:solidFill>
-                <a:latin typeface="Segoe UI"/>
-              </a:rPr>
-              <a:t>No</a:t>
-            </a:r>
-          </a:p>
-        </p:txBody>
-      </p:sp>
-      <p:cxnSp>
-        <p:nvCxnSpPr>
-          <p:cNvPr id="9008" name="Connector 9007"/>
-          <p:cNvCxnSpPr/>
-          <p:nvPr/>
-        </p:nvCxnSpPr>
-        <p:spPr>
-          <a:xfrm flipV="1">
-            <a:off x="4178000" y="2152000"/>
-            <a:ext cx="7760000" cy="273660"/>
+          <a:xfrm flipH="1">
+            <a:off x="6466000" y="3294340"/>
+            <a:ext cx="78000" cy="705660"/>
           </a:xfrm>
           <a:prstGeom prst="bentConnector3">
             <a:avLst/>
@@ -21968,13 +22043,13 @@
       </p:cxnSp>
       <p:sp>
         <p:nvSpPr>
-          <p:cNvPr id="9009" name="TextBox 9008"/>
+          <p:cNvPr id="9011" name="TextBox 9010"/>
           <p:cNvSpPr txBox="1"/>
           <p:nvPr/>
         </p:nvSpPr>
         <p:spPr>
           <a:xfrm>
-            <a:off x="3858000" y="2145660"/>
+            <a:off x="6584000" y="3324340"/>
             <a:ext cx="620000" cy="260000"/>
           </a:xfrm>
           <a:prstGeom prst="rect">
@@ -22003,88 +22078,16 @@
       </p:sp>
       <p:cxnSp>
         <p:nvCxnSpPr>
-          <p:cNvPr id="9010" name="Connector 9009"/>
+          <p:cNvPr id="9012" name="Connector 9011"/>
           <p:cNvCxnSpPr/>
           <p:nvPr/>
         </p:nvCxnSpPr>
         <p:spPr>
           <a:xfrm>
-            <a:off x="6536000" y="2860000"/>
-            <a:ext cx="260000" cy="0"/>
+            <a:off x="7192000" y="2860000"/>
+            <a:ext cx="400000" cy="0"/>
           </a:xfrm>
           <a:prstGeom prst="line">
-            <a:avLst/>
-          </a:prstGeom>
-          <a:ln w="19050">
-            <a:solidFill>
-              <a:srgbClr val="9B9B9B"/>
-            </a:solidFill>
-            <a:tailEnd type="triangle" w="med" len="med"/>
-          </a:ln>
-        </p:spPr>
-        <p:style>
-          <a:lnRef idx="2">
-            <a:schemeClr val="accent1"/>
-          </a:lnRef>
-          <a:fillRef idx="0">
-            <a:schemeClr val="accent1"/>
-          </a:fillRef>
-          <a:effectRef idx="1">
-            <a:schemeClr val="accent1"/>
-          </a:effectRef>
-          <a:fontRef idx="minor">
-            <a:schemeClr val="tx1"/>
-          </a:fontRef>
-        </p:style>
-      </p:cxnSp>
-      <p:cxnSp>
-        <p:nvCxnSpPr>
-          <p:cNvPr id="9011" name="Connector 9010"/>
-          <p:cNvCxnSpPr/>
-          <p:nvPr/>
-        </p:nvCxnSpPr>
-        <p:spPr>
-          <a:xfrm>
-            <a:off x="8056000" y="2860000"/>
-            <a:ext cx="450000" cy="0"/>
-          </a:xfrm>
-          <a:prstGeom prst="line">
-            <a:avLst/>
-          </a:prstGeom>
-          <a:ln w="19050">
-            <a:solidFill>
-              <a:srgbClr val="9B9B9B"/>
-            </a:solidFill>
-            <a:tailEnd type="triangle" w="med" len="med"/>
-          </a:ln>
-        </p:spPr>
-        <p:style>
-          <a:lnRef idx="2">
-            <a:schemeClr val="accent1"/>
-          </a:lnRef>
-          <a:fillRef idx="0">
-            <a:schemeClr val="accent1"/>
-          </a:fillRef>
-          <a:effectRef idx="1">
-            <a:schemeClr val="accent1"/>
-          </a:effectRef>
-          <a:fontRef idx="minor">
-            <a:schemeClr val="tx1"/>
-          </a:fontRef>
-        </p:style>
-      </p:cxnSp>
-      <p:cxnSp>
-        <p:nvCxnSpPr>
-          <p:cNvPr id="9012" name="Connector 9011"/>
-          <p:cNvCxnSpPr/>
-          <p:nvPr/>
-        </p:nvCxnSpPr>
-        <p:spPr>
-          <a:xfrm flipV="1">
-            <a:off x="9154000" y="2152000"/>
-            <a:ext cx="2784000" cy="273660"/>
-          </a:xfrm>
-          <a:prstGeom prst="bentConnector3">
             <a:avLst/>
           </a:prstGeom>
           <a:ln w="19050">
@@ -22117,7 +22120,7 @@
         </p:nvSpPr>
         <p:spPr>
           <a:xfrm>
-            <a:off x="8834000" y="2145660"/>
+            <a:off x="7232000" y="2580000"/>
             <a:ext cx="620000" cy="260000"/>
           </a:xfrm>
           <a:prstGeom prst="rect">
@@ -22135,11 +22138,11 @@
             <a:r>
               <a:rPr sz="900" b="1" i="0">
                 <a:solidFill>
-                  <a:srgbClr val="009A44"/>
-                </a:solidFill>
-                <a:latin typeface="Segoe UI"/>
-              </a:rPr>
-              <a:t>Yes</a:t>
+                  <a:srgbClr val="C00000"/>
+                </a:solidFill>
+                <a:latin typeface="Segoe UI"/>
+              </a:rPr>
+              <a:t>No</a:t>
             </a:r>
           </a:p>
         </p:txBody>
@@ -22151,9 +22154,116 @@
           <p:nvPr/>
         </p:nvCxnSpPr>
         <p:spPr>
+          <a:xfrm flipV="1">
+            <a:off x="7096000" y="2860000"/>
+            <a:ext cx="496000" cy="1500000"/>
+          </a:xfrm>
+          <a:prstGeom prst="bentConnector3">
+            <a:avLst/>
+          </a:prstGeom>
+          <a:ln w="19050">
+            <a:solidFill>
+              <a:srgbClr val="9B9B9B"/>
+            </a:solidFill>
+            <a:tailEnd type="triangle" w="med" len="med"/>
+          </a:ln>
+        </p:spPr>
+        <p:style>
+          <a:lnRef idx="2">
+            <a:schemeClr val="accent1"/>
+          </a:lnRef>
+          <a:fillRef idx="0">
+            <a:schemeClr val="accent1"/>
+          </a:fillRef>
+          <a:effectRef idx="1">
+            <a:schemeClr val="accent1"/>
+          </a:effectRef>
+          <a:fontRef idx="minor">
+            <a:schemeClr val="tx1"/>
+          </a:fontRef>
+        </p:style>
+      </p:cxnSp>
+      <p:cxnSp>
+        <p:nvCxnSpPr>
+          <p:cNvPr id="9015" name="Connector 9014"/>
+          <p:cNvCxnSpPr/>
+          <p:nvPr/>
+        </p:nvCxnSpPr>
+        <p:spPr>
+          <a:xfrm flipV="1">
+            <a:off x="8240000" y="2152000"/>
+            <a:ext cx="2734000" cy="273660"/>
+          </a:xfrm>
+          <a:prstGeom prst="bentConnector3">
+            <a:avLst/>
+          </a:prstGeom>
+          <a:ln w="19050">
+            <a:solidFill>
+              <a:srgbClr val="9B9B9B"/>
+            </a:solidFill>
+            <a:tailEnd type="triangle" w="med" len="med"/>
+          </a:ln>
+        </p:spPr>
+        <p:style>
+          <a:lnRef idx="2">
+            <a:schemeClr val="accent1"/>
+          </a:lnRef>
+          <a:fillRef idx="0">
+            <a:schemeClr val="accent1"/>
+          </a:fillRef>
+          <a:effectRef idx="1">
+            <a:schemeClr val="accent1"/>
+          </a:effectRef>
+          <a:fontRef idx="minor">
+            <a:schemeClr val="tx1"/>
+          </a:fontRef>
+        </p:style>
+      </p:cxnSp>
+      <p:sp>
+        <p:nvSpPr>
+          <p:cNvPr id="9016" name="TextBox 9015"/>
+          <p:cNvSpPr txBox="1"/>
+          <p:nvPr/>
+        </p:nvSpPr>
+        <p:spPr>
           <a:xfrm>
-            <a:off x="9802000" y="2860000"/>
-            <a:ext cx="450000" cy="0"/>
+            <a:off x="7920000" y="2145660"/>
+            <a:ext cx="620000" cy="260000"/>
+          </a:xfrm>
+          <a:prstGeom prst="rect">
+            <a:avLst/>
+          </a:prstGeom>
+          <a:noFill/>
+        </p:spPr>
+        <p:txBody>
+          <a:bodyPr wrap="square" lIns="45720" rIns="45720" tIns="36576" bIns="36576" anchor="ctr">
+            <a:spAutoFit/>
+          </a:bodyPr>
+          <a:lstStyle/>
+          <a:p>
+            <a:pPr algn="ctr"/>
+            <a:r>
+              <a:rPr sz="900" b="1" i="0">
+                <a:solidFill>
+                  <a:srgbClr val="009A44"/>
+                </a:solidFill>
+                <a:latin typeface="Segoe UI"/>
+              </a:rPr>
+              <a:t>Yes</a:t>
+            </a:r>
+          </a:p>
+        </p:txBody>
+      </p:sp>
+      <p:cxnSp>
+        <p:nvCxnSpPr>
+          <p:cNvPr id="9017" name="Connector 9016"/>
+          <p:cNvCxnSpPr/>
+          <p:nvPr/>
+        </p:nvCxnSpPr>
+        <p:spPr>
+          <a:xfrm>
+            <a:off x="8888000" y="2860000"/>
+            <a:ext cx="400000" cy="0"/>
           </a:xfrm>
           <a:prstGeom prst="line">
             <a:avLst/>
@@ -22182,13 +22292,13 @@
       </p:cxnSp>
       <p:sp>
         <p:nvSpPr>
-          <p:cNvPr id="9015" name="TextBox 9014"/>
+          <p:cNvPr id="9018" name="TextBox 9017"/>
           <p:cNvSpPr txBox="1"/>
           <p:nvPr/>
         </p:nvSpPr>
         <p:spPr>
           <a:xfrm>
-            <a:off x="9842000" y="2580000"/>
+            <a:off x="8928000" y="2580000"/>
             <a:ext cx="620000" cy="260000"/>
           </a:xfrm>
           <a:prstGeom prst="rect">
@@ -22217,13 +22327,13 @@
       </p:sp>
       <p:cxnSp>
         <p:nvCxnSpPr>
-          <p:cNvPr id="9016" name="Connector 9015"/>
+          <p:cNvPr id="9019" name="Connector 9018"/>
           <p:cNvCxnSpPr/>
           <p:nvPr/>
         </p:nvCxnSpPr>
         <p:spPr>
           <a:xfrm flipV="1">
-            <a:off x="10882000" y="2152000"/>
+            <a:off x="9918000" y="2152000"/>
             <a:ext cx="1056000" cy="348000"/>
           </a:xfrm>
           <a:prstGeom prst="bentConnector3">
@@ -22253,13 +22363,13 @@
       </p:cxnSp>
       <p:sp>
         <p:nvSpPr>
-          <p:cNvPr id="9017" name="TextBox 9016"/>
+          <p:cNvPr id="9020" name="TextBox 9019"/>
           <p:cNvSpPr txBox="1"/>
           <p:nvPr/>
         </p:nvSpPr>
         <p:spPr>
           <a:xfrm>
-            <a:off x="5276000" y="4120000"/>
+            <a:off x="300000" y="4870000"/>
             <a:ext cx="2600000" cy="300000"/>
           </a:xfrm>
           <a:prstGeom prst="rect">
@@ -23512,7 +23622,7 @@
                 </a:solidFill>
                 <a:latin typeface="Segoe UI"/>
               </a:rPr>
-              <a:t>Visa Arbitration ruling (if escalated)</a:t>
+              <a:t>Visa Arbitration Committee ruling (if escalated)</a:t>
             </a:r>
           </a:p>
         </p:txBody>
@@ -23526,7 +23636,7 @@
         <p:spPr>
           <a:xfrm>
             <a:off x="280000" y="3260000"/>
-            <a:ext cx="1300000" cy="250000"/>
+            <a:ext cx="1500000" cy="430000"/>
           </a:xfrm>
           <a:prstGeom prst="rect">
             <a:avLst/>
@@ -23547,7 +23657,7 @@
                 </a:solidFill>
                 <a:latin typeface="Segoe UI"/>
               </a:rPr>
-              <a:t>10 days</a:t>
+              <a:t>Timeframe set by Visa; not specified in Visa Rules</a:t>
             </a:r>
           </a:p>
         </p:txBody>

--- a/Dispute Resolution/Dispute Resolution Process Flow.pptx
+++ b/Dispute Resolution/Dispute Resolution Process Flow.pptx
@@ -21188,14 +21188,58 @@
       </p:graphicFrame>
       <p:sp>
         <p:nvSpPr>
-          <p:cNvPr id="973" name="Rounded Rectangle 972"/>
+          <p:cNvPr id="9101" name="pathlbl"/>
           <p:cNvSpPr/>
           <p:nvPr/>
         </p:nvSpPr>
         <p:spPr>
-          <a:xfrm>
-            <a:off x="300000" y="2500000"/>
-            <a:ext cx="1550000" cy="720000"/>
+          <a:xfrm flipH="1">
+            <a:off x="40000" y="1500000"/>
+            <a:ext cx="251917" cy="2470000"/>
+          </a:xfrm>
+          <a:prstGeom prst="roundRect">
+            <a:avLst/>
+          </a:prstGeom>
+          <a:solidFill>
+            <a:schemeClr val="bg1">
+              <a:lumMod val="85000"/>
+            </a:schemeClr>
+          </a:solidFill>
+          <a:ln w="12700">
+            <a:solidFill>
+              <a:srgbClr val="F3EAFA"/>
+            </a:solidFill>
+          </a:ln>
+        </p:spPr>
+        <p:txBody>
+          <a:bodyPr vert="vert270" wrap="square" anchor="ctr"/>
+          <a:lstStyle/>
+          <a:p>
+            <a:pPr algn="ctr"/>
+            <a:r>
+              <a:rPr lang="en-US" sz="1000" b="1">
+                <a:solidFill>
+                  <a:srgbClr val="53565A">
+                    <a:lumMod val="75000"/>
+                  </a:srgbClr>
+                </a:solidFill>
+                <a:latin typeface="Segoe UI"/>
+              </a:rPr>
+              <a:t>PATH 1: FRAUD &amp; AUTHORIZATION (CAT 10/11)</a:t>
+            </a:r>
+          </a:p>
+        </p:txBody>
+      </p:sp>
+      <p:sp>
+        <p:nvSpPr>
+          <p:cNvPr id="9102" name="Rounded Rectangle 9101"/>
+          <p:cNvSpPr/>
+          <p:nvPr/>
+        </p:nvSpPr>
+        <p:spPr>
+          <a:xfrm>
+            <a:off x="350000" y="1600000"/>
+            <a:ext cx="1260000" cy="720000"/>
           </a:xfrm>
           <a:prstGeom prst="roundRect">
             <a:avLst>
@@ -21243,48 +21287,13 @@
       </p:sp>
       <p:sp>
         <p:nvSpPr>
-          <p:cNvPr id="974" name="TextBox 973"/>
-          <p:cNvSpPr txBox="1"/>
-          <p:nvPr/>
-        </p:nvSpPr>
-        <p:spPr>
-          <a:xfrm>
-            <a:off x="280000" y="3260000"/>
-            <a:ext cx="1550000" cy="430000"/>
-          </a:xfrm>
-          <a:prstGeom prst="rect">
-            <a:avLst/>
-          </a:prstGeom>
-          <a:noFill/>
-        </p:spPr>
-        <p:txBody>
-          <a:bodyPr wrap="square" lIns="45720" rIns="45720" tIns="36576" bIns="36576" anchor="ctr">
-            <a:spAutoFit/>
-          </a:bodyPr>
-          <a:lstStyle/>
-          <a:p>
-            <a:pPr algn="ctr"/>
-            <a:r>
-              <a:rPr sz="700" b="0" i="1">
-                <a:solidFill>
-                  <a:srgbClr val="404040"/>
-                </a:solidFill>
-                <a:latin typeface="Segoe UI"/>
-              </a:rPr>
-              <a:t>120 days from transaction date (75 days in specific conditions)*</a:t>
-            </a:r>
-          </a:p>
-        </p:txBody>
-      </p:sp>
-      <p:sp>
-        <p:nvSpPr>
-          <p:cNvPr id="975" name="Diamond 974"/>
+          <p:cNvPr id="9103" name="Diamond 9102"/>
           <p:cNvSpPr/>
           <p:nvPr/>
         </p:nvSpPr>
         <p:spPr>
           <a:xfrm>
-            <a:off x="2250000" y="2425660"/>
+            <a:off x="1960000" y="1525660"/>
             <a:ext cx="1296000" cy="868680"/>
           </a:xfrm>
           <a:prstGeom prst="diamond">
@@ -21320,151 +21329,26 @@
           <a:p>
             <a:pPr algn="ctr"/>
             <a:r>
-              <a:rPr sz="900" b="1" i="0">
+              <a:rPr sz="800" b="1" i="0">
                 <a:solidFill>
                   <a:srgbClr val="404040"/>
                 </a:solidFill>
                 <a:latin typeface="Segoe UI"/>
               </a:rPr>
-              <a:t>Acquirer accepts liability?</a:t>
+              <a:t>Acquirer accepts dispute?</a:t>
             </a:r>
           </a:p>
         </p:txBody>
       </p:sp>
       <p:sp>
         <p:nvSpPr>
-          <p:cNvPr id="976" name="TextBox 975"/>
-          <p:cNvSpPr txBox="1"/>
-          <p:nvPr/>
-        </p:nvSpPr>
-        <p:spPr>
-          <a:xfrm>
-            <a:off x="2230000" y="3334340"/>
-            <a:ext cx="1300000" cy="300000"/>
-          </a:xfrm>
-          <a:prstGeom prst="rect">
-            <a:avLst/>
-          </a:prstGeom>
-          <a:noFill/>
-        </p:spPr>
-        <p:txBody>
-          <a:bodyPr wrap="square" lIns="45720" rIns="45720" tIns="36576" bIns="36576" anchor="ctr">
-            <a:spAutoFit/>
-          </a:bodyPr>
-          <a:lstStyle/>
-          <a:p>
-            <a:pPr algn="ctr"/>
-            <a:r>
-              <a:rPr sz="700" b="0" i="1">
-                <a:solidFill>
-                  <a:srgbClr val="404040"/>
-                </a:solidFill>
-                <a:latin typeface="Segoe UI"/>
-              </a:rPr>
-              <a:t>Acquirer response: 30 days</a:t>
-            </a:r>
-          </a:p>
-        </p:txBody>
-      </p:sp>
-      <p:sp>
-        <p:nvSpPr>
-          <p:cNvPr id="977" name="Rounded Rectangle 976"/>
+          <p:cNvPr id="9104" name="Diamond 9103"/>
           <p:cNvSpPr/>
           <p:nvPr/>
         </p:nvSpPr>
         <p:spPr>
           <a:xfrm>
-            <a:off x="3946000" y="2500000"/>
-            <a:ext cx="1550000" cy="720000"/>
-          </a:xfrm>
-          <a:prstGeom prst="roundRect">
-            <a:avLst>
-              <a:gd name="adj" fmla="val 10000"/>
-            </a:avLst>
-          </a:prstGeom>
-          <a:noFill/>
-          <a:ln w="12700">
-            <a:solidFill>
-              <a:srgbClr val="BFBFBF"/>
-            </a:solidFill>
-          </a:ln>
-          <a:effectLst/>
-        </p:spPr>
-        <p:style>
-          <a:lnRef idx="1">
-            <a:schemeClr val="accent1"/>
-          </a:lnRef>
-          <a:fillRef idx="3">
-            <a:schemeClr val="accent1"/>
-          </a:fillRef>
-          <a:effectRef idx="2">
-            <a:schemeClr val="accent1"/>
-          </a:effectRef>
-          <a:fontRef idx="minor">
-            <a:schemeClr val="lt1"/>
-          </a:fontRef>
-        </p:style>
-        <p:txBody>
-          <a:bodyPr rtlCol="0" anchor="ctr" wrap="square" lIns="45720" rIns="45720" tIns="36576" bIns="36576"/>
-          <a:lstStyle/>
-          <a:p>
-            <a:pPr algn="ctr"/>
-            <a:r>
-              <a:rPr sz="900" b="1" i="0">
-                <a:solidFill>
-                  <a:srgbClr val="404040"/>
-                </a:solidFill>
-                <a:latin typeface="Segoe UI"/>
-              </a:rPr>
-              <a:t>Beem submits Pre-Arbitration (pushes back) &amp; Acquirer responds</a:t>
-            </a:r>
-          </a:p>
-        </p:txBody>
-      </p:sp>
-      <p:sp>
-        <p:nvSpPr>
-          <p:cNvPr id="978" name="TextBox 977"/>
-          <p:cNvSpPr txBox="1"/>
-          <p:nvPr/>
-        </p:nvSpPr>
-        <p:spPr>
-          <a:xfrm>
-            <a:off x="3926000" y="3260000"/>
-            <a:ext cx="1300000" cy="250000"/>
-          </a:xfrm>
-          <a:prstGeom prst="rect">
-            <a:avLst/>
-          </a:prstGeom>
-          <a:noFill/>
-        </p:spPr>
-        <p:txBody>
-          <a:bodyPr wrap="square" lIns="45720" rIns="45720" tIns="36576" bIns="36576" anchor="ctr">
-            <a:spAutoFit/>
-          </a:bodyPr>
-          <a:lstStyle/>
-          <a:p>
-            <a:pPr algn="ctr"/>
-            <a:r>
-              <a:rPr sz="700" b="0" i="1">
-                <a:solidFill>
-                  <a:srgbClr val="404040"/>
-                </a:solidFill>
-                <a:latin typeface="Segoe UI"/>
-              </a:rPr>
-              <a:t>30 days each</a:t>
-            </a:r>
-          </a:p>
-        </p:txBody>
-      </p:sp>
-      <p:sp>
-        <p:nvSpPr>
-          <p:cNvPr id="979" name="Diamond 978"/>
-          <p:cNvSpPr/>
-          <p:nvPr/>
-        </p:nvSpPr>
-        <p:spPr>
-          <a:xfrm>
-            <a:off x="5896000" y="2425660"/>
+            <a:off x="3606000" y="1525660"/>
             <a:ext cx="1296000" cy="868680"/>
           </a:xfrm>
           <a:prstGeom prst="diamond">
@@ -21513,13 +21397,68 @@
       </p:sp>
       <p:sp>
         <p:nvSpPr>
-          <p:cNvPr id="980" name="Diamond 979"/>
+          <p:cNvPr id="9105" name="Rounded Rectangle 9104"/>
           <p:cNvSpPr/>
           <p:nvPr/>
         </p:nvSpPr>
         <p:spPr>
           <a:xfrm>
-            <a:off x="7592000" y="2425660"/>
+            <a:off x="5252000" y="1600000"/>
+            <a:ext cx="1260000" cy="720000"/>
+          </a:xfrm>
+          <a:prstGeom prst="roundRect">
+            <a:avLst>
+              <a:gd name="adj" fmla="val 10000"/>
+            </a:avLst>
+          </a:prstGeom>
+          <a:noFill/>
+          <a:ln w="12700">
+            <a:solidFill>
+              <a:srgbClr val="BFBFBF"/>
+            </a:solidFill>
+          </a:ln>
+          <a:effectLst/>
+        </p:spPr>
+        <p:style>
+          <a:lnRef idx="1">
+            <a:schemeClr val="accent1"/>
+          </a:lnRef>
+          <a:fillRef idx="3">
+            <a:schemeClr val="accent1"/>
+          </a:fillRef>
+          <a:effectRef idx="2">
+            <a:schemeClr val="accent1"/>
+          </a:effectRef>
+          <a:fontRef idx="minor">
+            <a:schemeClr val="lt1"/>
+          </a:fontRef>
+        </p:style>
+        <p:txBody>
+          <a:bodyPr rtlCol="0" anchor="ctr" wrap="square" lIns="45720" rIns="45720" tIns="36576" bIns="36576"/>
+          <a:lstStyle/>
+          <a:p>
+            <a:pPr algn="ctr"/>
+            <a:r>
+              <a:rPr sz="900" b="1" i="0">
+                <a:solidFill>
+                  <a:srgbClr val="404040"/>
+                </a:solidFill>
+                <a:latin typeface="Segoe UI"/>
+              </a:rPr>
+              <a:t>Beem responds to Acquirer's Pre-Arbitration Attempt (accept or decline)</a:t>
+            </a:r>
+          </a:p>
+        </p:txBody>
+      </p:sp>
+      <p:sp>
+        <p:nvSpPr>
+          <p:cNvPr id="9106" name="Diamond 9105"/>
+          <p:cNvSpPr/>
+          <p:nvPr/>
+        </p:nvSpPr>
+        <p:spPr>
+          <a:xfrm>
+            <a:off x="6862000" y="1525660"/>
             <a:ext cx="1296000" cy="868680"/>
           </a:xfrm>
           <a:prstGeom prst="diamond">
@@ -21555,26 +21494,26 @@
           <a:p>
             <a:pPr algn="ctr"/>
             <a:r>
-              <a:rPr sz="900" b="1" i="0">
+              <a:rPr sz="800" b="1" i="0">
                 <a:solidFill>
                   <a:srgbClr val="404040"/>
                 </a:solidFill>
                 <a:latin typeface="Segoe UI"/>
               </a:rPr>
-              <a:t>Resolved at pre-arb?</a:t>
+              <a:t>Beem accepts financial responsibility?</a:t>
             </a:r>
           </a:p>
         </p:txBody>
       </p:sp>
       <p:sp>
         <p:nvSpPr>
-          <p:cNvPr id="981" name="Rounded Rectangle 980"/>
+          <p:cNvPr id="9107" name="Rounded Rectangle 9106"/>
           <p:cNvSpPr/>
           <p:nvPr/>
         </p:nvSpPr>
         <p:spPr>
           <a:xfrm>
-            <a:off x="9288000" y="2500000"/>
+            <a:off x="8508000" y="1600000"/>
             <a:ext cx="1260000" cy="720000"/>
           </a:xfrm>
           <a:prstGeom prst="roundRect">
@@ -21616,55 +21555,75 @@
                 </a:solidFill>
                 <a:latin typeface="Segoe UI"/>
               </a:rPr>
-              <a:t>Escalate to Arbitration</a:t>
+              <a:t>Monitor for Acquirer's Arbitration filing; Visa Arbitration Committee rules</a:t>
             </a:r>
           </a:p>
         </p:txBody>
       </p:sp>
       <p:sp>
         <p:nvSpPr>
-          <p:cNvPr id="982" name="TextBox 981"/>
-          <p:cNvSpPr txBox="1"/>
+          <p:cNvPr id="9108" name="Diamond 9107"/>
+          <p:cNvSpPr/>
           <p:nvPr/>
         </p:nvSpPr>
         <p:spPr>
           <a:xfrm>
-            <a:off x="9248000" y="3260000"/>
-            <a:ext cx="1500000" cy="650000"/>
-          </a:xfrm>
-          <a:prstGeom prst="rect">
+            <a:off x="10118000" y="1525660"/>
+            <a:ext cx="1296000" cy="868680"/>
+          </a:xfrm>
+          <a:prstGeom prst="diamond">
             <a:avLst/>
           </a:prstGeom>
-          <a:noFill/>
-        </p:spPr>
+          <a:solidFill>
+            <a:srgbClr val="FFFFFF"/>
+          </a:solidFill>
+          <a:ln w="12700">
+            <a:solidFill>
+              <a:srgbClr val="BFBFBF"/>
+            </a:solidFill>
+          </a:ln>
+          <a:effectLst/>
+        </p:spPr>
+        <p:style>
+          <a:lnRef idx="1">
+            <a:schemeClr val="accent1"/>
+          </a:lnRef>
+          <a:fillRef idx="3">
+            <a:schemeClr val="accent1"/>
+          </a:fillRef>
+          <a:effectRef idx="2">
+            <a:schemeClr val="accent1"/>
+          </a:effectRef>
+          <a:fontRef idx="minor">
+            <a:schemeClr val="lt1"/>
+          </a:fontRef>
+        </p:style>
         <p:txBody>
-          <a:bodyPr wrap="square" lIns="45720" rIns="45720" tIns="36576" bIns="36576" anchor="ctr">
-            <a:spAutoFit/>
-          </a:bodyPr>
+          <a:bodyPr rtlCol="0" anchor="ctr" wrap="square" lIns="0" rIns="0" tIns="36576" bIns="36576"/>
           <a:lstStyle/>
           <a:p>
             <a:pPr algn="ctr"/>
             <a:r>
-              <a:rPr sz="700" b="0" i="1">
+              <a:rPr sz="800" b="1" i="0">
                 <a:solidFill>
                   <a:srgbClr val="404040"/>
                 </a:solidFill>
                 <a:latin typeface="Segoe UI"/>
               </a:rPr>
-              <a:t>Beem's filing deadline: 10 days from Acquirer's Pre-Arbitration response. Submit VROL Questionnaire &amp; supporting documentation.</a:t>
+              <a:t>Ruled in Beem's favor?</a:t>
             </a:r>
           </a:p>
         </p:txBody>
       </p:sp>
       <p:sp>
         <p:nvSpPr>
-          <p:cNvPr id="983" name="Rounded Rectangle 982"/>
+          <p:cNvPr id="9109" name="Rounded Rectangle 9108"/>
           <p:cNvSpPr/>
           <p:nvPr/>
         </p:nvSpPr>
         <p:spPr>
           <a:xfrm>
-            <a:off x="5836000" y="4000000"/>
+            <a:off x="3456000" y="2400000"/>
             <a:ext cx="1260000" cy="720000"/>
           </a:xfrm>
           <a:prstGeom prst="roundRect">
@@ -21715,6 +21674,116 @@
           </a:p>
         </p:txBody>
       </p:sp>
+      <p:sp>
+        <p:nvSpPr>
+          <p:cNvPr id="9110" name="Rounded Rectangle 9109"/>
+          <p:cNvSpPr/>
+          <p:nvPr/>
+        </p:nvSpPr>
+        <p:spPr>
+          <a:xfrm>
+            <a:off x="7800000" y="3350000"/>
+            <a:ext cx="1260000" cy="720000"/>
+          </a:xfrm>
+          <a:prstGeom prst="roundRect">
+            <a:avLst>
+              <a:gd name="adj" fmla="val 10000"/>
+            </a:avLst>
+          </a:prstGeom>
+          <a:noFill/>
+          <a:ln w="12700">
+            <a:solidFill>
+              <a:srgbClr val="BFBFBF"/>
+            </a:solidFill>
+          </a:ln>
+          <a:effectLst/>
+        </p:spPr>
+        <p:style>
+          <a:lnRef idx="1">
+            <a:schemeClr val="accent1"/>
+          </a:lnRef>
+          <a:fillRef idx="3">
+            <a:schemeClr val="accent1"/>
+          </a:fillRef>
+          <a:effectRef idx="2">
+            <a:schemeClr val="accent1"/>
+          </a:effectRef>
+          <a:fontRef idx="minor">
+            <a:schemeClr val="lt1"/>
+          </a:fontRef>
+        </p:style>
+        <p:txBody>
+          <a:bodyPr rtlCol="0" anchor="ctr" wrap="square" lIns="45720" rIns="45720" tIns="36576" bIns="36576"/>
+          <a:lstStyle/>
+          <a:p>
+            <a:pPr algn="ctr"/>
+            <a:r>
+              <a:rPr sz="900" b="1" i="0">
+                <a:solidFill>
+                  <a:srgbClr val="404040"/>
+                </a:solidFill>
+                <a:latin typeface="Segoe UI"/>
+              </a:rPr>
+              <a:t>Finalize the provisional credit</a:t>
+            </a:r>
+          </a:p>
+        </p:txBody>
+      </p:sp>
+      <p:sp>
+        <p:nvSpPr>
+          <p:cNvPr id="9111" name="Rounded Rectangle 9110"/>
+          <p:cNvSpPr/>
+          <p:nvPr/>
+        </p:nvSpPr>
+        <p:spPr>
+          <a:xfrm>
+            <a:off x="9700000" y="3350000"/>
+            <a:ext cx="1260000" cy="720000"/>
+          </a:xfrm>
+          <a:prstGeom prst="roundRect">
+            <a:avLst>
+              <a:gd name="adj" fmla="val 10000"/>
+            </a:avLst>
+          </a:prstGeom>
+          <a:noFill/>
+          <a:ln w="12700">
+            <a:solidFill>
+              <a:srgbClr val="BFBFBF"/>
+            </a:solidFill>
+          </a:ln>
+          <a:effectLst/>
+        </p:spPr>
+        <p:style>
+          <a:lnRef idx="1">
+            <a:schemeClr val="accent1"/>
+          </a:lnRef>
+          <a:fillRef idx="3">
+            <a:schemeClr val="accent1"/>
+          </a:fillRef>
+          <a:effectRef idx="2">
+            <a:schemeClr val="accent1"/>
+          </a:effectRef>
+          <a:fontRef idx="minor">
+            <a:schemeClr val="lt1"/>
+          </a:fontRef>
+        </p:style>
+        <p:txBody>
+          <a:bodyPr rtlCol="0" anchor="ctr" wrap="square" lIns="45720" rIns="45720" tIns="36576" bIns="36576"/>
+          <a:lstStyle/>
+          <a:p>
+            <a:pPr algn="ctr"/>
+            <a:r>
+              <a:rPr sz="900" b="1" i="0">
+                <a:solidFill>
+                  <a:srgbClr val="404040"/>
+                </a:solidFill>
+                <a:latin typeface="Segoe UI"/>
+              </a:rPr>
+              <a:t>Reverse the provisional credit</a:t>
+            </a:r>
+          </a:p>
+        </p:txBody>
+      </p:sp>
       <p:grpSp>
         <p:nvGrpSpPr>
           <p:cNvPr id="9001" name="Handoff"/>
@@ -21723,9 +21792,9 @@
         </p:nvGrpSpPr>
         <p:grpSpPr>
           <a:xfrm>
-            <a:off x="10848000" y="1900000"/>
+            <a:off x="11210000" y="3584000"/>
             <a:ext cx="252000" cy="252000"/>
-            <a:chOff x="10848000" y="1900000"/>
+            <a:chOff x="11210000" y="3584000"/>
             <a:chExt cx="252000" cy="252000"/>
           </a:xfrm>
         </p:grpSpPr>
@@ -21737,7 +21806,7 @@
           </p:nvSpPr>
           <p:spPr>
             <a:xfrm>
-              <a:off x="10848000" y="1900000"/>
+              <a:off x="11210000" y="3584000"/>
               <a:ext cx="252000" cy="252000"/>
             </a:xfrm>
             <a:prstGeom prst="ellipse">
@@ -21766,7 +21835,7 @@
           </p:nvSpPr>
           <p:spPr>
             <a:xfrm>
-              <a:off x="10898316" y="1963821"/>
+              <a:off x="11260316" y="3647821"/>
               <a:ext cx="161665" cy="124358"/>
             </a:xfrm>
             <a:prstGeom prst="rightArrow">
@@ -21793,14 +21862,14 @@
       </p:grpSp>
       <p:cxnSp>
         <p:nvCxnSpPr>
-          <p:cNvPr id="9004" name="Connector 9003"/>
+          <p:cNvPr id="9112" name="Connector 9111"/>
           <p:cNvCxnSpPr/>
           <p:nvPr/>
         </p:nvCxnSpPr>
         <p:spPr>
           <a:xfrm>
-            <a:off x="1850000" y="2860000"/>
-            <a:ext cx="400000" cy="0"/>
+            <a:off x="1610000" y="1960000"/>
+            <a:ext cx="350000" cy="0"/>
           </a:xfrm>
           <a:prstGeom prst="line">
             <a:avLst/>
@@ -21829,14 +21898,84 @@
       </p:cxnSp>
       <p:cxnSp>
         <p:nvCxnSpPr>
-          <p:cNvPr id="9005" name="Connector 9004"/>
+          <p:cNvPr id="9113" name="Connector 9112"/>
           <p:cNvCxnSpPr/>
           <p:nvPr/>
         </p:nvCxnSpPr>
         <p:spPr>
           <a:xfrm>
-            <a:off x="3546000" y="2860000"/>
-            <a:ext cx="400000" cy="0"/>
+            <a:off x="2608000" y="2394340"/>
+            <a:ext cx="0" cy="805660"/>
+          </a:xfrm>
+          <a:prstGeom prst="line">
+            <a:avLst/>
+          </a:prstGeom>
+          <a:ln w="19050">
+            <a:solidFill>
+              <a:srgbClr val="9B9B9B"/>
+            </a:solidFill>
+          </a:ln>
+        </p:spPr>
+        <p:style>
+          <a:lnRef idx="2">
+            <a:schemeClr val="accent1"/>
+          </a:lnRef>
+          <a:fillRef idx="0">
+            <a:schemeClr val="accent1"/>
+          </a:fillRef>
+          <a:effectRef idx="1">
+            <a:schemeClr val="accent1"/>
+          </a:effectRef>
+          <a:fontRef idx="minor">
+            <a:schemeClr val="tx1"/>
+          </a:fontRef>
+        </p:style>
+      </p:cxnSp>
+      <p:cxnSp>
+        <p:nvCxnSpPr>
+          <p:cNvPr id="9114" name="Connector 9113"/>
+          <p:cNvCxnSpPr/>
+          <p:nvPr/>
+        </p:nvCxnSpPr>
+        <p:spPr>
+          <a:xfrm>
+            <a:off x="2608000" y="3200000"/>
+            <a:ext cx="5622000" cy="0"/>
+          </a:xfrm>
+          <a:prstGeom prst="line">
+            <a:avLst/>
+          </a:prstGeom>
+          <a:ln w="19050">
+            <a:solidFill>
+              <a:srgbClr val="9B9B9B"/>
+            </a:solidFill>
+          </a:ln>
+        </p:spPr>
+        <p:style>
+          <a:lnRef idx="2">
+            <a:schemeClr val="accent1"/>
+          </a:lnRef>
+          <a:fillRef idx="0">
+            <a:schemeClr val="accent1"/>
+          </a:fillRef>
+          <a:effectRef idx="1">
+            <a:schemeClr val="accent1"/>
+          </a:effectRef>
+          <a:fontRef idx="minor">
+            <a:schemeClr val="tx1"/>
+          </a:fontRef>
+        </p:style>
+      </p:cxnSp>
+      <p:cxnSp>
+        <p:nvCxnSpPr>
+          <p:cNvPr id="9115" name="Connector 9114"/>
+          <p:cNvCxnSpPr/>
+          <p:nvPr/>
+        </p:nvCxnSpPr>
+        <p:spPr>
+          <a:xfrm>
+            <a:off x="8230000" y="3200000"/>
+            <a:ext cx="0" cy="150000"/>
           </a:xfrm>
           <a:prstGeom prst="line">
             <a:avLst/>
@@ -21865,13 +22004,13 @@
       </p:cxnSp>
       <p:sp>
         <p:nvSpPr>
-          <p:cNvPr id="9006" name="TextBox 9005"/>
+          <p:cNvPr id="9116" name="TextBox 9115"/>
           <p:cNvSpPr txBox="1"/>
           <p:nvPr/>
         </p:nvSpPr>
         <p:spPr>
           <a:xfrm>
-            <a:off x="3586000" y="2580000"/>
+            <a:off x="2278000" y="2414340"/>
             <a:ext cx="620000" cy="260000"/>
           </a:xfrm>
           <a:prstGeom prst="rect">
@@ -21889,27 +22028,27 @@
             <a:r>
               <a:rPr sz="900" b="1" i="0">
                 <a:solidFill>
-                  <a:srgbClr val="C00000"/>
-                </a:solidFill>
-                <a:latin typeface="Segoe UI"/>
-              </a:rPr>
-              <a:t>No</a:t>
+                  <a:srgbClr val="009A44"/>
+                </a:solidFill>
+                <a:latin typeface="Segoe UI"/>
+              </a:rPr>
+              <a:t>Yes</a:t>
             </a:r>
           </a:p>
         </p:txBody>
       </p:sp>
       <p:cxnSp>
         <p:nvCxnSpPr>
-          <p:cNvPr id="9007" name="Connector 9006"/>
+          <p:cNvPr id="9117" name="Connector 9116"/>
           <p:cNvCxnSpPr/>
           <p:nvPr/>
         </p:nvCxnSpPr>
         <p:spPr>
-          <a:xfrm flipV="1">
-            <a:off x="2898000" y="2152000"/>
-            <a:ext cx="8076000" cy="273660"/>
-          </a:xfrm>
-          <a:prstGeom prst="bentConnector3">
+          <a:xfrm>
+            <a:off x="3256000" y="1960000"/>
+            <a:ext cx="350000" cy="0"/>
+          </a:xfrm>
+          <a:prstGeom prst="line">
             <a:avLst/>
           </a:prstGeom>
           <a:ln w="19050">
@@ -21936,13 +22075,13 @@
       </p:cxnSp>
       <p:sp>
         <p:nvSpPr>
-          <p:cNvPr id="9008" name="TextBox 9007"/>
+          <p:cNvPr id="9118" name="TextBox 9117"/>
           <p:cNvSpPr txBox="1"/>
           <p:nvPr/>
         </p:nvSpPr>
         <p:spPr>
           <a:xfrm>
-            <a:off x="2578000" y="2145660"/>
+            <a:off x="3286000" y="1680000"/>
             <a:ext cx="620000" cy="260000"/>
           </a:xfrm>
           <a:prstGeom prst="rect">
@@ -21960,27 +22099,169 @@
             <a:r>
               <a:rPr sz="900" b="1" i="0">
                 <a:solidFill>
-                  <a:srgbClr val="009A44"/>
-                </a:solidFill>
-                <a:latin typeface="Segoe UI"/>
-              </a:rPr>
-              <a:t>Yes</a:t>
+                  <a:srgbClr val="C00000"/>
+                </a:solidFill>
+                <a:latin typeface="Segoe UI"/>
+              </a:rPr>
+              <a:t>No</a:t>
             </a:r>
           </a:p>
         </p:txBody>
       </p:sp>
       <p:cxnSp>
         <p:nvCxnSpPr>
-          <p:cNvPr id="9009" name="Connector 9008"/>
+          <p:cNvPr id="9119" name="Connector 9118"/>
           <p:cNvCxnSpPr/>
           <p:nvPr/>
         </p:nvCxnSpPr>
         <p:spPr>
-          <a:xfrm>
-            <a:off x="5496000" y="2860000"/>
-            <a:ext cx="400000" cy="0"/>
+          <a:xfrm flipH="1">
+            <a:off x="4086000" y="2394340"/>
+            <a:ext cx="168000" cy="5660"/>
+          </a:xfrm>
+          <a:prstGeom prst="bentConnector3">
+            <a:avLst/>
+          </a:prstGeom>
+          <a:ln w="19050">
+            <a:solidFill>
+              <a:srgbClr val="9B9B9B"/>
+            </a:solidFill>
+            <a:tailEnd type="triangle" w="med" len="med"/>
+          </a:ln>
+        </p:spPr>
+        <p:style>
+          <a:lnRef idx="2">
+            <a:schemeClr val="accent1"/>
+          </a:lnRef>
+          <a:fillRef idx="0">
+            <a:schemeClr val="accent1"/>
+          </a:fillRef>
+          <a:effectRef idx="1">
+            <a:schemeClr val="accent1"/>
+          </a:effectRef>
+          <a:fontRef idx="minor">
+            <a:schemeClr val="tx1"/>
+          </a:fontRef>
+        </p:style>
+      </p:cxnSp>
+      <p:sp>
+        <p:nvSpPr>
+          <p:cNvPr id="9120" name="TextBox 9119"/>
+          <p:cNvSpPr txBox="1"/>
+          <p:nvPr/>
+        </p:nvSpPr>
+        <p:spPr>
+          <a:xfrm>
+            <a:off x="4284000" y="2414340"/>
+            <a:ext cx="620000" cy="260000"/>
+          </a:xfrm>
+          <a:prstGeom prst="rect">
+            <a:avLst/>
+          </a:prstGeom>
+          <a:noFill/>
+        </p:spPr>
+        <p:txBody>
+          <a:bodyPr wrap="square" lIns="45720" rIns="45720" tIns="36576" bIns="36576" anchor="ctr">
+            <a:spAutoFit/>
+          </a:bodyPr>
+          <a:lstStyle/>
+          <a:p>
+            <a:pPr algn="ctr"/>
+            <a:r>
+              <a:rPr sz="900" b="1" i="0">
+                <a:solidFill>
+                  <a:srgbClr val="009A44"/>
+                </a:solidFill>
+                <a:latin typeface="Segoe UI"/>
+              </a:rPr>
+              <a:t>Yes</a:t>
+            </a:r>
+          </a:p>
+        </p:txBody>
+      </p:sp>
+      <p:cxnSp>
+        <p:nvCxnSpPr>
+          <p:cNvPr id="9121" name="Connector 9120"/>
+          <p:cNvCxnSpPr/>
+          <p:nvPr/>
+        </p:nvCxnSpPr>
+        <p:spPr>
+          <a:xfrm>
+            <a:off x="4902000" y="1960000"/>
+            <a:ext cx="350000" cy="0"/>
           </a:xfrm>
           <a:prstGeom prst="line">
+            <a:avLst/>
+          </a:prstGeom>
+          <a:ln w="19050">
+            <a:solidFill>
+              <a:srgbClr val="9B9B9B"/>
+            </a:solidFill>
+            <a:tailEnd type="triangle" w="med" len="med"/>
+          </a:ln>
+        </p:spPr>
+        <p:style>
+          <a:lnRef idx="2">
+            <a:schemeClr val="accent1"/>
+          </a:lnRef>
+          <a:fillRef idx="0">
+            <a:schemeClr val="accent1"/>
+          </a:fillRef>
+          <a:effectRef idx="1">
+            <a:schemeClr val="accent1"/>
+          </a:effectRef>
+          <a:fontRef idx="minor">
+            <a:schemeClr val="tx1"/>
+          </a:fontRef>
+        </p:style>
+      </p:cxnSp>
+      <p:sp>
+        <p:nvSpPr>
+          <p:cNvPr id="9122" name="TextBox 9121"/>
+          <p:cNvSpPr txBox="1"/>
+          <p:nvPr/>
+        </p:nvSpPr>
+        <p:spPr>
+          <a:xfrm>
+            <a:off x="4932000" y="1680000"/>
+            <a:ext cx="620000" cy="260000"/>
+          </a:xfrm>
+          <a:prstGeom prst="rect">
+            <a:avLst/>
+          </a:prstGeom>
+          <a:noFill/>
+        </p:spPr>
+        <p:txBody>
+          <a:bodyPr wrap="square" lIns="45720" rIns="45720" tIns="36576" bIns="36576" anchor="ctr">
+            <a:spAutoFit/>
+          </a:bodyPr>
+          <a:lstStyle/>
+          <a:p>
+            <a:pPr algn="ctr"/>
+            <a:r>
+              <a:rPr sz="900" b="1" i="0">
+                <a:solidFill>
+                  <a:srgbClr val="C00000"/>
+                </a:solidFill>
+                <a:latin typeface="Segoe UI"/>
+              </a:rPr>
+              <a:t>No</a:t>
+            </a:r>
+          </a:p>
+        </p:txBody>
+      </p:sp>
+      <p:cxnSp>
+        <p:nvCxnSpPr>
+          <p:cNvPr id="9123" name="Connector 9122"/>
+          <p:cNvCxnSpPr/>
+          <p:nvPr/>
+        </p:nvCxnSpPr>
+        <p:spPr>
+          <a:xfrm flipV="1">
+            <a:off x="4716000" y="1960000"/>
+            <a:ext cx="536000" cy="800000"/>
+          </a:xfrm>
+          <a:prstGeom prst="bentConnector3">
             <a:avLst/>
           </a:prstGeom>
           <a:ln w="19050">
@@ -22007,16 +22288,122 @@
       </p:cxnSp>
       <p:cxnSp>
         <p:nvCxnSpPr>
-          <p:cNvPr id="9010" name="Connector 9009"/>
+          <p:cNvPr id="9124" name="Connector 9123"/>
           <p:cNvCxnSpPr/>
           <p:nvPr/>
         </p:nvCxnSpPr>
         <p:spPr>
-          <a:xfrm flipH="1">
-            <a:off x="6466000" y="3294340"/>
-            <a:ext cx="78000" cy="705660"/>
-          </a:xfrm>
-          <a:prstGeom prst="bentConnector3">
+          <a:xfrm>
+            <a:off x="6512000" y="1960000"/>
+            <a:ext cx="350000" cy="0"/>
+          </a:xfrm>
+          <a:prstGeom prst="line">
+            <a:avLst/>
+          </a:prstGeom>
+          <a:ln w="19050">
+            <a:solidFill>
+              <a:srgbClr val="9B9B9B"/>
+            </a:solidFill>
+            <a:tailEnd type="triangle" w="med" len="med"/>
+          </a:ln>
+        </p:spPr>
+        <p:style>
+          <a:lnRef idx="2">
+            <a:schemeClr val="accent1"/>
+          </a:lnRef>
+          <a:fillRef idx="0">
+            <a:schemeClr val="accent1"/>
+          </a:fillRef>
+          <a:effectRef idx="1">
+            <a:schemeClr val="accent1"/>
+          </a:effectRef>
+          <a:fontRef idx="minor">
+            <a:schemeClr val="tx1"/>
+          </a:fontRef>
+        </p:style>
+      </p:cxnSp>
+      <p:cxnSp>
+        <p:nvCxnSpPr>
+          <p:cNvPr id="9125" name="Connector 9124"/>
+          <p:cNvCxnSpPr/>
+          <p:nvPr/>
+        </p:nvCxnSpPr>
+        <p:spPr>
+          <a:xfrm>
+            <a:off x="7510000" y="2394340"/>
+            <a:ext cx="0" cy="805660"/>
+          </a:xfrm>
+          <a:prstGeom prst="line">
+            <a:avLst/>
+          </a:prstGeom>
+          <a:ln w="19050">
+            <a:solidFill>
+              <a:srgbClr val="9B9B9B"/>
+            </a:solidFill>
+          </a:ln>
+        </p:spPr>
+        <p:style>
+          <a:lnRef idx="2">
+            <a:schemeClr val="accent1"/>
+          </a:lnRef>
+          <a:fillRef idx="0">
+            <a:schemeClr val="accent1"/>
+          </a:fillRef>
+          <a:effectRef idx="1">
+            <a:schemeClr val="accent1"/>
+          </a:effectRef>
+          <a:fontRef idx="minor">
+            <a:schemeClr val="tx1"/>
+          </a:fontRef>
+        </p:style>
+      </p:cxnSp>
+      <p:cxnSp>
+        <p:nvCxnSpPr>
+          <p:cNvPr id="9126" name="Connector 9125"/>
+          <p:cNvCxnSpPr/>
+          <p:nvPr/>
+        </p:nvCxnSpPr>
+        <p:spPr>
+          <a:xfrm>
+            <a:off x="7510000" y="3200000"/>
+            <a:ext cx="2820000" cy="0"/>
+          </a:xfrm>
+          <a:prstGeom prst="line">
+            <a:avLst/>
+          </a:prstGeom>
+          <a:ln w="19050">
+            <a:solidFill>
+              <a:srgbClr val="9B9B9B"/>
+            </a:solidFill>
+          </a:ln>
+        </p:spPr>
+        <p:style>
+          <a:lnRef idx="2">
+            <a:schemeClr val="accent1"/>
+          </a:lnRef>
+          <a:fillRef idx="0">
+            <a:schemeClr val="accent1"/>
+          </a:fillRef>
+          <a:effectRef idx="1">
+            <a:schemeClr val="accent1"/>
+          </a:effectRef>
+          <a:fontRef idx="minor">
+            <a:schemeClr val="tx1"/>
+          </a:fontRef>
+        </p:style>
+      </p:cxnSp>
+      <p:cxnSp>
+        <p:nvCxnSpPr>
+          <p:cNvPr id="9127" name="Connector 9126"/>
+          <p:cNvCxnSpPr/>
+          <p:nvPr/>
+        </p:nvCxnSpPr>
+        <p:spPr>
+          <a:xfrm>
+            <a:off x="10330000" y="3200000"/>
+            <a:ext cx="0" cy="150000"/>
+          </a:xfrm>
+          <a:prstGeom prst="line">
             <a:avLst/>
           </a:prstGeom>
           <a:ln w="19050">
@@ -22043,13 +22430,13 @@
       </p:cxnSp>
       <p:sp>
         <p:nvSpPr>
-          <p:cNvPr id="9011" name="TextBox 9010"/>
+          <p:cNvPr id="9128" name="TextBox 9127"/>
           <p:cNvSpPr txBox="1"/>
           <p:nvPr/>
         </p:nvSpPr>
         <p:spPr>
           <a:xfrm>
-            <a:off x="6584000" y="3324340"/>
+            <a:off x="7180000" y="2414340"/>
             <a:ext cx="620000" cy="260000"/>
           </a:xfrm>
           <a:prstGeom prst="rect">
@@ -22078,14 +22465,14 @@
       </p:sp>
       <p:cxnSp>
         <p:nvCxnSpPr>
-          <p:cNvPr id="9012" name="Connector 9011"/>
+          <p:cNvPr id="9129" name="Connector 9128"/>
           <p:cNvCxnSpPr/>
           <p:nvPr/>
         </p:nvCxnSpPr>
         <p:spPr>
           <a:xfrm>
-            <a:off x="7192000" y="2860000"/>
-            <a:ext cx="400000" cy="0"/>
+            <a:off x="8158000" y="1960000"/>
+            <a:ext cx="350000" cy="0"/>
           </a:xfrm>
           <a:prstGeom prst="line">
             <a:avLst/>
@@ -22114,13 +22501,13 @@
       </p:cxnSp>
       <p:sp>
         <p:nvSpPr>
-          <p:cNvPr id="9013" name="TextBox 9012"/>
+          <p:cNvPr id="9130" name="TextBox 9129"/>
           <p:cNvSpPr txBox="1"/>
           <p:nvPr/>
         </p:nvSpPr>
         <p:spPr>
           <a:xfrm>
-            <a:off x="7232000" y="2580000"/>
+            <a:off x="8188000" y="1680000"/>
             <a:ext cx="620000" cy="260000"/>
           </a:xfrm>
           <a:prstGeom prst="rect">
@@ -22149,16 +22536,16 @@
       </p:sp>
       <p:cxnSp>
         <p:nvCxnSpPr>
-          <p:cNvPr id="9014" name="Connector 9013"/>
+          <p:cNvPr id="9131" name="Connector 9130"/>
           <p:cNvCxnSpPr/>
           <p:nvPr/>
         </p:nvCxnSpPr>
         <p:spPr>
-          <a:xfrm flipV="1">
-            <a:off x="7096000" y="2860000"/>
-            <a:ext cx="496000" cy="1500000"/>
-          </a:xfrm>
-          <a:prstGeom prst="bentConnector3">
+          <a:xfrm>
+            <a:off x="9768000" y="1960000"/>
+            <a:ext cx="350000" cy="0"/>
+          </a:xfrm>
+          <a:prstGeom prst="line">
             <a:avLst/>
           </a:prstGeom>
           <a:ln w="19050">
@@ -22185,16 +22572,86 @@
       </p:cxnSp>
       <p:cxnSp>
         <p:nvCxnSpPr>
-          <p:cNvPr id="9015" name="Connector 9014"/>
+          <p:cNvPr id="9132" name="Connector 9131"/>
           <p:cNvCxnSpPr/>
           <p:nvPr/>
         </p:nvCxnSpPr>
         <p:spPr>
-          <a:xfrm flipV="1">
-            <a:off x="8240000" y="2152000"/>
-            <a:ext cx="2734000" cy="273660"/>
-          </a:xfrm>
-          <a:prstGeom prst="bentConnector3">
+          <a:xfrm>
+            <a:off x="10616000" y="2394340"/>
+            <a:ext cx="0" cy="805660"/>
+          </a:xfrm>
+          <a:prstGeom prst="line">
+            <a:avLst/>
+          </a:prstGeom>
+          <a:ln w="19050">
+            <a:solidFill>
+              <a:srgbClr val="9B9B9B"/>
+            </a:solidFill>
+          </a:ln>
+        </p:spPr>
+        <p:style>
+          <a:lnRef idx="2">
+            <a:schemeClr val="accent1"/>
+          </a:lnRef>
+          <a:fillRef idx="0">
+            <a:schemeClr val="accent1"/>
+          </a:fillRef>
+          <a:effectRef idx="1">
+            <a:schemeClr val="accent1"/>
+          </a:effectRef>
+          <a:fontRef idx="minor">
+            <a:schemeClr val="tx1"/>
+          </a:fontRef>
+        </p:style>
+      </p:cxnSp>
+      <p:cxnSp>
+        <p:nvCxnSpPr>
+          <p:cNvPr id="9133" name="Connector 9132"/>
+          <p:cNvCxnSpPr/>
+          <p:nvPr/>
+        </p:nvCxnSpPr>
+        <p:spPr>
+          <a:xfrm flipH="1">
+            <a:off x="8910000" y="3200000"/>
+            <a:ext cx="1706000" cy="0"/>
+          </a:xfrm>
+          <a:prstGeom prst="line">
+            <a:avLst/>
+          </a:prstGeom>
+          <a:ln w="19050">
+            <a:solidFill>
+              <a:srgbClr val="9B9B9B"/>
+            </a:solidFill>
+          </a:ln>
+        </p:spPr>
+        <p:style>
+          <a:lnRef idx="2">
+            <a:schemeClr val="accent1"/>
+          </a:lnRef>
+          <a:fillRef idx="0">
+            <a:schemeClr val="accent1"/>
+          </a:fillRef>
+          <a:effectRef idx="1">
+            <a:schemeClr val="accent1"/>
+          </a:effectRef>
+          <a:fontRef idx="minor">
+            <a:schemeClr val="tx1"/>
+          </a:fontRef>
+        </p:style>
+      </p:cxnSp>
+      <p:cxnSp>
+        <p:nvCxnSpPr>
+          <p:cNvPr id="9134" name="Connector 9133"/>
+          <p:cNvCxnSpPr/>
+          <p:nvPr/>
+        </p:nvCxnSpPr>
+        <p:spPr>
+          <a:xfrm>
+            <a:off x="8910000" y="3200000"/>
+            <a:ext cx="0" cy="150000"/>
+          </a:xfrm>
+          <a:prstGeom prst="line">
             <a:avLst/>
           </a:prstGeom>
           <a:ln w="19050">
@@ -22221,13 +22678,13 @@
       </p:cxnSp>
       <p:sp>
         <p:nvSpPr>
-          <p:cNvPr id="9016" name="TextBox 9015"/>
+          <p:cNvPr id="9135" name="TextBox 9134"/>
           <p:cNvSpPr txBox="1"/>
           <p:nvPr/>
         </p:nvSpPr>
         <p:spPr>
           <a:xfrm>
-            <a:off x="7920000" y="2145660"/>
+            <a:off x="9858000" y="2414340"/>
             <a:ext cx="620000" cy="260000"/>
           </a:xfrm>
           <a:prstGeom prst="rect">
@@ -22256,14 +22713,84 @@
       </p:sp>
       <p:cxnSp>
         <p:nvCxnSpPr>
-          <p:cNvPr id="9017" name="Connector 9016"/>
+          <p:cNvPr id="9136" name="Connector 9135"/>
           <p:cNvCxnSpPr/>
           <p:nvPr/>
         </p:nvCxnSpPr>
         <p:spPr>
           <a:xfrm>
-            <a:off x="8888000" y="2860000"/>
-            <a:ext cx="400000" cy="0"/>
+            <a:off x="10916000" y="2394340"/>
+            <a:ext cx="0" cy="805660"/>
+          </a:xfrm>
+          <a:prstGeom prst="line">
+            <a:avLst/>
+          </a:prstGeom>
+          <a:ln w="19050">
+            <a:solidFill>
+              <a:srgbClr val="9B9B9B"/>
+            </a:solidFill>
+          </a:ln>
+        </p:spPr>
+        <p:style>
+          <a:lnRef idx="2">
+            <a:schemeClr val="accent1"/>
+          </a:lnRef>
+          <a:fillRef idx="0">
+            <a:schemeClr val="accent1"/>
+          </a:fillRef>
+          <a:effectRef idx="1">
+            <a:schemeClr val="accent1"/>
+          </a:effectRef>
+          <a:fontRef idx="minor">
+            <a:schemeClr val="tx1"/>
+          </a:fontRef>
+        </p:style>
+      </p:cxnSp>
+      <p:cxnSp>
+        <p:nvCxnSpPr>
+          <p:cNvPr id="9137" name="Connector 9136"/>
+          <p:cNvCxnSpPr/>
+          <p:nvPr/>
+        </p:nvCxnSpPr>
+        <p:spPr>
+          <a:xfrm flipH="1">
+            <a:off x="9850000" y="3200000"/>
+            <a:ext cx="1066000" cy="0"/>
+          </a:xfrm>
+          <a:prstGeom prst="line">
+            <a:avLst/>
+          </a:prstGeom>
+          <a:ln w="19050">
+            <a:solidFill>
+              <a:srgbClr val="9B9B9B"/>
+            </a:solidFill>
+          </a:ln>
+        </p:spPr>
+        <p:style>
+          <a:lnRef idx="2">
+            <a:schemeClr val="accent1"/>
+          </a:lnRef>
+          <a:fillRef idx="0">
+            <a:schemeClr val="accent1"/>
+          </a:fillRef>
+          <a:effectRef idx="1">
+            <a:schemeClr val="accent1"/>
+          </a:effectRef>
+          <a:fontRef idx="minor">
+            <a:schemeClr val="tx1"/>
+          </a:fontRef>
+        </p:style>
+      </p:cxnSp>
+      <p:cxnSp>
+        <p:nvCxnSpPr>
+          <p:cNvPr id="9138" name="Connector 9137"/>
+          <p:cNvCxnSpPr/>
+          <p:nvPr/>
+        </p:nvCxnSpPr>
+        <p:spPr>
+          <a:xfrm>
+            <a:off x="9850000" y="3200000"/>
+            <a:ext cx="0" cy="150000"/>
           </a:xfrm>
           <a:prstGeom prst="line">
             <a:avLst/>
@@ -22292,13 +22819,13 @@
       </p:cxnSp>
       <p:sp>
         <p:nvSpPr>
-          <p:cNvPr id="9018" name="TextBox 9017"/>
+          <p:cNvPr id="9139" name="TextBox 9138"/>
           <p:cNvSpPr txBox="1"/>
           <p:nvPr/>
         </p:nvSpPr>
         <p:spPr>
           <a:xfrm>
-            <a:off x="8928000" y="2580000"/>
+            <a:off x="11354000" y="2414340"/>
             <a:ext cx="620000" cy="260000"/>
           </a:xfrm>
           <a:prstGeom prst="rect">
@@ -22327,16 +22854,122 @@
       </p:sp>
       <p:cxnSp>
         <p:nvCxnSpPr>
-          <p:cNvPr id="9019" name="Connector 9018"/>
+          <p:cNvPr id="9140" name="Connector 9139"/>
           <p:cNvCxnSpPr/>
           <p:nvPr/>
         </p:nvCxnSpPr>
         <p:spPr>
           <a:xfrm flipV="1">
-            <a:off x="9918000" y="2152000"/>
-            <a:ext cx="1056000" cy="348000"/>
-          </a:xfrm>
-          <a:prstGeom prst="bentConnector3">
+            <a:off x="8430000" y="3200000"/>
+            <a:ext cx="0" cy="150000"/>
+          </a:xfrm>
+          <a:prstGeom prst="line">
+            <a:avLst/>
+          </a:prstGeom>
+          <a:ln w="19050">
+            <a:solidFill>
+              <a:srgbClr val="9B9B9B"/>
+            </a:solidFill>
+          </a:ln>
+        </p:spPr>
+        <p:style>
+          <a:lnRef idx="2">
+            <a:schemeClr val="accent1"/>
+          </a:lnRef>
+          <a:fillRef idx="0">
+            <a:schemeClr val="accent1"/>
+          </a:fillRef>
+          <a:effectRef idx="1">
+            <a:schemeClr val="accent1"/>
+          </a:effectRef>
+          <a:fontRef idx="minor">
+            <a:schemeClr val="tx1"/>
+          </a:fontRef>
+        </p:style>
+      </p:cxnSp>
+      <p:cxnSp>
+        <p:nvCxnSpPr>
+          <p:cNvPr id="9141" name="Connector 9140"/>
+          <p:cNvCxnSpPr/>
+          <p:nvPr/>
+        </p:nvCxnSpPr>
+        <p:spPr>
+          <a:xfrm>
+            <a:off x="8430000" y="3200000"/>
+            <a:ext cx="2906000" cy="0"/>
+          </a:xfrm>
+          <a:prstGeom prst="line">
+            <a:avLst/>
+          </a:prstGeom>
+          <a:ln w="19050">
+            <a:solidFill>
+              <a:srgbClr val="9B9B9B"/>
+            </a:solidFill>
+          </a:ln>
+        </p:spPr>
+        <p:style>
+          <a:lnRef idx="2">
+            <a:schemeClr val="accent1"/>
+          </a:lnRef>
+          <a:fillRef idx="0">
+            <a:schemeClr val="accent1"/>
+          </a:fillRef>
+          <a:effectRef idx="1">
+            <a:schemeClr val="accent1"/>
+          </a:effectRef>
+          <a:fontRef idx="minor">
+            <a:schemeClr val="tx1"/>
+          </a:fontRef>
+        </p:style>
+      </p:cxnSp>
+      <p:cxnSp>
+        <p:nvCxnSpPr>
+          <p:cNvPr id="9142" name="Connector 9141"/>
+          <p:cNvCxnSpPr/>
+          <p:nvPr/>
+        </p:nvCxnSpPr>
+        <p:spPr>
+          <a:xfrm>
+            <a:off x="11336000" y="3200000"/>
+            <a:ext cx="0" cy="384000"/>
+          </a:xfrm>
+          <a:prstGeom prst="line">
+            <a:avLst/>
+          </a:prstGeom>
+          <a:ln w="19050">
+            <a:solidFill>
+              <a:srgbClr val="9B9B9B"/>
+            </a:solidFill>
+            <a:tailEnd type="triangle" w="med" len="med"/>
+          </a:ln>
+        </p:spPr>
+        <p:style>
+          <a:lnRef idx="2">
+            <a:schemeClr val="accent1"/>
+          </a:lnRef>
+          <a:fillRef idx="0">
+            <a:schemeClr val="accent1"/>
+          </a:fillRef>
+          <a:effectRef idx="1">
+            <a:schemeClr val="accent1"/>
+          </a:effectRef>
+          <a:fontRef idx="minor">
+            <a:schemeClr val="tx1"/>
+          </a:fontRef>
+        </p:style>
+      </p:cxnSp>
+      <p:cxnSp>
+        <p:nvCxnSpPr>
+          <p:cNvPr id="9143" name="Connector 9142"/>
+          <p:cNvCxnSpPr/>
+          <p:nvPr/>
+        </p:nvCxnSpPr>
+        <p:spPr>
+          <a:xfrm>
+            <a:off x="10960000" y="3710000"/>
+            <a:ext cx="250000" cy="0"/>
+          </a:xfrm>
+          <a:prstGeom prst="line">
             <a:avLst/>
           </a:prstGeom>
           <a:ln w="19050">
@@ -22363,14 +22996,830 @@
       </p:cxnSp>
       <p:sp>
         <p:nvSpPr>
-          <p:cNvPr id="9020" name="TextBox 9019"/>
+          <p:cNvPr id="9101" name="pathlbl"/>
+          <p:cNvSpPr/>
+          <p:nvPr/>
+        </p:nvSpPr>
+        <p:spPr>
+          <a:xfrm flipH="1">
+            <a:off x="40000" y="4170000"/>
+            <a:ext cx="251917" cy="2470000"/>
+          </a:xfrm>
+          <a:prstGeom prst="roundRect">
+            <a:avLst/>
+          </a:prstGeom>
+          <a:solidFill>
+            <a:schemeClr val="bg1">
+              <a:lumMod val="85000"/>
+            </a:schemeClr>
+          </a:solidFill>
+          <a:ln w="12700">
+            <a:solidFill>
+              <a:srgbClr val="F3EAFA"/>
+            </a:solidFill>
+          </a:ln>
+        </p:spPr>
+        <p:txBody>
+          <a:bodyPr vert="vert270" wrap="square" anchor="ctr"/>
+          <a:lstStyle/>
+          <a:p>
+            <a:pPr algn="ctr"/>
+            <a:r>
+              <a:rPr lang="en-US" sz="1000" b="1">
+                <a:solidFill>
+                  <a:srgbClr val="53565A">
+                    <a:lumMod val="75000"/>
+                  </a:srgbClr>
+                </a:solidFill>
+                <a:latin typeface="Segoe UI"/>
+              </a:rPr>
+              <a:t>PATH 2: PROCESSING ERRORS &amp; CONSUMER DISPUTES (CAT 12/13)</a:t>
+            </a:r>
+          </a:p>
+        </p:txBody>
+      </p:sp>
+      <p:sp>
+        <p:nvSpPr>
+          <p:cNvPr id="9144" name="Rounded Rectangle 9143"/>
+          <p:cNvSpPr/>
+          <p:nvPr/>
+        </p:nvSpPr>
+        <p:spPr>
+          <a:xfrm>
+            <a:off x="350000" y="4270000"/>
+            <a:ext cx="1260000" cy="720000"/>
+          </a:xfrm>
+          <a:prstGeom prst="roundRect">
+            <a:avLst>
+              <a:gd name="adj" fmla="val 10000"/>
+            </a:avLst>
+          </a:prstGeom>
+          <a:noFill/>
+          <a:ln w="12700">
+            <a:solidFill>
+              <a:srgbClr val="BFBFBF"/>
+            </a:solidFill>
+          </a:ln>
+          <a:effectLst/>
+        </p:spPr>
+        <p:style>
+          <a:lnRef idx="1">
+            <a:schemeClr val="accent1"/>
+          </a:lnRef>
+          <a:fillRef idx="3">
+            <a:schemeClr val="accent1"/>
+          </a:fillRef>
+          <a:effectRef idx="2">
+            <a:schemeClr val="accent1"/>
+          </a:effectRef>
+          <a:fontRef idx="minor">
+            <a:schemeClr val="lt1"/>
+          </a:fontRef>
+        </p:style>
+        <p:txBody>
+          <a:bodyPr rtlCol="0" anchor="ctr" wrap="square" lIns="45720" rIns="45720" tIns="36576" bIns="36576"/>
+          <a:lstStyle/>
+          <a:p>
+            <a:pPr algn="ctr"/>
+            <a:r>
+              <a:rPr sz="900" b="1" i="0">
+                <a:solidFill>
+                  <a:srgbClr val="404040"/>
+                </a:solidFill>
+                <a:latin typeface="Segoe UI"/>
+              </a:rPr>
+              <a:t>Submit dispute to Central 1 (Visa VROL) &amp; monitor Acquirer response</a:t>
+            </a:r>
+          </a:p>
+        </p:txBody>
+      </p:sp>
+      <p:sp>
+        <p:nvSpPr>
+          <p:cNvPr id="9145" name="Diamond 9144"/>
+          <p:cNvSpPr/>
+          <p:nvPr/>
+        </p:nvSpPr>
+        <p:spPr>
+          <a:xfrm>
+            <a:off x="1960000" y="4195660"/>
+            <a:ext cx="1296000" cy="868680"/>
+          </a:xfrm>
+          <a:prstGeom prst="diamond">
+            <a:avLst/>
+          </a:prstGeom>
+          <a:solidFill>
+            <a:srgbClr val="FFFFFF"/>
+          </a:solidFill>
+          <a:ln w="12700">
+            <a:solidFill>
+              <a:srgbClr val="BFBFBF"/>
+            </a:solidFill>
+          </a:ln>
+          <a:effectLst/>
+        </p:spPr>
+        <p:style>
+          <a:lnRef idx="1">
+            <a:schemeClr val="accent1"/>
+          </a:lnRef>
+          <a:fillRef idx="3">
+            <a:schemeClr val="accent1"/>
+          </a:fillRef>
+          <a:effectRef idx="2">
+            <a:schemeClr val="accent1"/>
+          </a:effectRef>
+          <a:fontRef idx="minor">
+            <a:schemeClr val="lt1"/>
+          </a:fontRef>
+        </p:style>
+        <p:txBody>
+          <a:bodyPr rtlCol="0" anchor="ctr" wrap="square" lIns="0" rIns="0" tIns="36576" bIns="36576"/>
+          <a:lstStyle/>
+          <a:p>
+            <a:pPr algn="ctr"/>
+            <a:r>
+              <a:rPr sz="800" b="1" i="0">
+                <a:solidFill>
+                  <a:srgbClr val="404040"/>
+                </a:solidFill>
+                <a:latin typeface="Segoe UI"/>
+              </a:rPr>
+              <a:t>Acquirer accepts dispute?</a:t>
+            </a:r>
+          </a:p>
+        </p:txBody>
+      </p:sp>
+      <p:sp>
+        <p:nvSpPr>
+          <p:cNvPr id="9146" name="Diamond 9145"/>
+          <p:cNvSpPr/>
+          <p:nvPr/>
+        </p:nvSpPr>
+        <p:spPr>
+          <a:xfrm>
+            <a:off x="3606000" y="4195660"/>
+            <a:ext cx="1296000" cy="868680"/>
+          </a:xfrm>
+          <a:prstGeom prst="diamond">
+            <a:avLst/>
+          </a:prstGeom>
+          <a:solidFill>
+            <a:srgbClr val="FFFFFF"/>
+          </a:solidFill>
+          <a:ln w="12700">
+            <a:solidFill>
+              <a:srgbClr val="BFBFBF"/>
+            </a:solidFill>
+          </a:ln>
+          <a:effectLst/>
+        </p:spPr>
+        <p:style>
+          <a:lnRef idx="1">
+            <a:schemeClr val="accent1"/>
+          </a:lnRef>
+          <a:fillRef idx="3">
+            <a:schemeClr val="accent1"/>
+          </a:fillRef>
+          <a:effectRef idx="2">
+            <a:schemeClr val="accent1"/>
+          </a:effectRef>
+          <a:fontRef idx="minor">
+            <a:schemeClr val="lt1"/>
+          </a:fontRef>
+        </p:style>
+        <p:txBody>
+          <a:bodyPr rtlCol="0" anchor="ctr" wrap="square" lIns="0" rIns="0" tIns="36576" bIns="36576"/>
+          <a:lstStyle/>
+          <a:p>
+            <a:pPr algn="ctr"/>
+            <a:r>
+              <a:rPr sz="800" b="1" i="0">
+                <a:solidFill>
+                  <a:srgbClr val="404040"/>
+                </a:solidFill>
+                <a:latin typeface="Segoe UI"/>
+              </a:rPr>
+              <a:t>Compelling Evidence provided?</a:t>
+            </a:r>
+          </a:p>
+        </p:txBody>
+      </p:sp>
+      <p:sp>
+        <p:nvSpPr>
+          <p:cNvPr id="9147" name="Rounded Rectangle 9146"/>
+          <p:cNvSpPr/>
+          <p:nvPr/>
+        </p:nvSpPr>
+        <p:spPr>
+          <a:xfrm>
+            <a:off x="5252000" y="4270000"/>
+            <a:ext cx="1260000" cy="720000"/>
+          </a:xfrm>
+          <a:prstGeom prst="roundRect">
+            <a:avLst>
+              <a:gd name="adj" fmla="val 10000"/>
+            </a:avLst>
+          </a:prstGeom>
+          <a:noFill/>
+          <a:ln w="12700">
+            <a:solidFill>
+              <a:srgbClr val="BFBFBF"/>
+            </a:solidFill>
+          </a:ln>
+          <a:effectLst/>
+        </p:spPr>
+        <p:style>
+          <a:lnRef idx="1">
+            <a:schemeClr val="accent1"/>
+          </a:lnRef>
+          <a:fillRef idx="3">
+            <a:schemeClr val="accent1"/>
+          </a:fillRef>
+          <a:effectRef idx="2">
+            <a:schemeClr val="accent1"/>
+          </a:effectRef>
+          <a:fontRef idx="minor">
+            <a:schemeClr val="lt1"/>
+          </a:fontRef>
+        </p:style>
+        <p:txBody>
+          <a:bodyPr rtlCol="0" anchor="ctr" wrap="square" lIns="45720" rIns="45720" tIns="36576" bIns="36576"/>
+          <a:lstStyle/>
+          <a:p>
+            <a:pPr algn="ctr"/>
+            <a:r>
+              <a:rPr sz="900" b="1" i="0">
+                <a:solidFill>
+                  <a:srgbClr val="404040"/>
+                </a:solidFill>
+                <a:latin typeface="Segoe UI"/>
+              </a:rPr>
+              <a:t>Beem submits Pre-Arbitration (pushes back) &amp; Acquirer responds</a:t>
+            </a:r>
+          </a:p>
+        </p:txBody>
+      </p:sp>
+      <p:sp>
+        <p:nvSpPr>
+          <p:cNvPr id="9148" name="Diamond 9147"/>
+          <p:cNvSpPr/>
+          <p:nvPr/>
+        </p:nvSpPr>
+        <p:spPr>
+          <a:xfrm>
+            <a:off x="6862000" y="4195660"/>
+            <a:ext cx="1296000" cy="868680"/>
+          </a:xfrm>
+          <a:prstGeom prst="diamond">
+            <a:avLst/>
+          </a:prstGeom>
+          <a:solidFill>
+            <a:srgbClr val="FFFFFF"/>
+          </a:solidFill>
+          <a:ln w="12700">
+            <a:solidFill>
+              <a:srgbClr val="BFBFBF"/>
+            </a:solidFill>
+          </a:ln>
+          <a:effectLst/>
+        </p:spPr>
+        <p:style>
+          <a:lnRef idx="1">
+            <a:schemeClr val="accent1"/>
+          </a:lnRef>
+          <a:fillRef idx="3">
+            <a:schemeClr val="accent1"/>
+          </a:fillRef>
+          <a:effectRef idx="2">
+            <a:schemeClr val="accent1"/>
+          </a:effectRef>
+          <a:fontRef idx="minor">
+            <a:schemeClr val="lt1"/>
+          </a:fontRef>
+        </p:style>
+        <p:txBody>
+          <a:bodyPr rtlCol="0" anchor="ctr" wrap="square" lIns="0" rIns="0" tIns="36576" bIns="36576"/>
+          <a:lstStyle/>
+          <a:p>
+            <a:pPr algn="ctr"/>
+            <a:r>
+              <a:rPr sz="800" b="1" i="0">
+                <a:solidFill>
+                  <a:srgbClr val="404040"/>
+                </a:solidFill>
+                <a:latin typeface="Segoe UI"/>
+              </a:rPr>
+              <a:t>Resolved at pre-arb?</a:t>
+            </a:r>
+          </a:p>
+        </p:txBody>
+      </p:sp>
+      <p:sp>
+        <p:nvSpPr>
+          <p:cNvPr id="9149" name="Rounded Rectangle 9148"/>
+          <p:cNvSpPr/>
+          <p:nvPr/>
+        </p:nvSpPr>
+        <p:spPr>
+          <a:xfrm>
+            <a:off x="8508000" y="4270000"/>
+            <a:ext cx="1260000" cy="720000"/>
+          </a:xfrm>
+          <a:prstGeom prst="roundRect">
+            <a:avLst>
+              <a:gd name="adj" fmla="val 10000"/>
+            </a:avLst>
+          </a:prstGeom>
+          <a:noFill/>
+          <a:ln w="12700">
+            <a:solidFill>
+              <a:srgbClr val="BFBFBF"/>
+            </a:solidFill>
+          </a:ln>
+          <a:effectLst/>
+        </p:spPr>
+        <p:style>
+          <a:lnRef idx="1">
+            <a:schemeClr val="accent1"/>
+          </a:lnRef>
+          <a:fillRef idx="3">
+            <a:schemeClr val="accent1"/>
+          </a:fillRef>
+          <a:effectRef idx="2">
+            <a:schemeClr val="accent1"/>
+          </a:effectRef>
+          <a:fontRef idx="minor">
+            <a:schemeClr val="lt1"/>
+          </a:fontRef>
+        </p:style>
+        <p:txBody>
+          <a:bodyPr rtlCol="0" anchor="ctr" wrap="square" lIns="45720" rIns="45720" tIns="36576" bIns="36576"/>
+          <a:lstStyle/>
+          <a:p>
+            <a:pPr algn="ctr"/>
+            <a:r>
+              <a:rPr sz="900" b="1" i="0">
+                <a:solidFill>
+                  <a:srgbClr val="404040"/>
+                </a:solidFill>
+                <a:latin typeface="Segoe UI"/>
+              </a:rPr>
+              <a:t>Beem escalates to Arbitration (VROL Questionnaire &amp; documentation); Visa Arbitration Committee rules</a:t>
+            </a:r>
+          </a:p>
+        </p:txBody>
+      </p:sp>
+      <p:sp>
+        <p:nvSpPr>
+          <p:cNvPr id="9150" name="Diamond 9149"/>
+          <p:cNvSpPr/>
+          <p:nvPr/>
+        </p:nvSpPr>
+        <p:spPr>
+          <a:xfrm>
+            <a:off x="10118000" y="4195660"/>
+            <a:ext cx="1296000" cy="868680"/>
+          </a:xfrm>
+          <a:prstGeom prst="diamond">
+            <a:avLst/>
+          </a:prstGeom>
+          <a:solidFill>
+            <a:srgbClr val="FFFFFF"/>
+          </a:solidFill>
+          <a:ln w="12700">
+            <a:solidFill>
+              <a:srgbClr val="BFBFBF"/>
+            </a:solidFill>
+          </a:ln>
+          <a:effectLst/>
+        </p:spPr>
+        <p:style>
+          <a:lnRef idx="1">
+            <a:schemeClr val="accent1"/>
+          </a:lnRef>
+          <a:fillRef idx="3">
+            <a:schemeClr val="accent1"/>
+          </a:fillRef>
+          <a:effectRef idx="2">
+            <a:schemeClr val="accent1"/>
+          </a:effectRef>
+          <a:fontRef idx="minor">
+            <a:schemeClr val="lt1"/>
+          </a:fontRef>
+        </p:style>
+        <p:txBody>
+          <a:bodyPr rtlCol="0" anchor="ctr" wrap="square" lIns="0" rIns="0" tIns="36576" bIns="36576"/>
+          <a:lstStyle/>
+          <a:p>
+            <a:pPr algn="ctr"/>
+            <a:r>
+              <a:rPr sz="800" b="1" i="0">
+                <a:solidFill>
+                  <a:srgbClr val="404040"/>
+                </a:solidFill>
+                <a:latin typeface="Segoe UI"/>
+              </a:rPr>
+              <a:t>Ruled in Beem's favor?</a:t>
+            </a:r>
+          </a:p>
+        </p:txBody>
+      </p:sp>
+      <p:sp>
+        <p:nvSpPr>
+          <p:cNvPr id="9151" name="Rounded Rectangle 9150"/>
+          <p:cNvSpPr/>
+          <p:nvPr/>
+        </p:nvSpPr>
+        <p:spPr>
+          <a:xfrm>
+            <a:off x="3456000" y="5070000"/>
+            <a:ext cx="1260000" cy="720000"/>
+          </a:xfrm>
+          <a:prstGeom prst="roundRect">
+            <a:avLst>
+              <a:gd name="adj" fmla="val 10000"/>
+            </a:avLst>
+          </a:prstGeom>
+          <a:solidFill>
+            <a:srgbClr val="EDDBFB">
+              <a:alpha val="56863"/>
+            </a:srgbClr>
+          </a:solidFill>
+          <a:ln w="12700">
+            <a:solidFill>
+              <a:srgbClr val="9B40EA"/>
+            </a:solidFill>
+          </a:ln>
+          <a:effectLst/>
+        </p:spPr>
+        <p:style>
+          <a:lnRef idx="1">
+            <a:schemeClr val="accent1"/>
+          </a:lnRef>
+          <a:fillRef idx="3">
+            <a:schemeClr val="accent1"/>
+          </a:fillRef>
+          <a:effectRef idx="2">
+            <a:schemeClr val="accent1"/>
+          </a:effectRef>
+          <a:fontRef idx="minor">
+            <a:schemeClr val="lt1"/>
+          </a:fontRef>
+        </p:style>
+        <p:txBody>
+          <a:bodyPr rtlCol="0" anchor="ctr" wrap="square" lIns="45720" rIns="45720" tIns="36576" bIns="36576"/>
+          <a:lstStyle/>
+          <a:p>
+            <a:pPr algn="ctr"/>
+            <a:r>
+              <a:rPr sz="900" b="1" i="0">
+                <a:solidFill>
+                  <a:srgbClr val="404040"/>
+                </a:solidFill>
+                <a:latin typeface="Segoe UI"/>
+              </a:rPr>
+              <a:t>Contact cardholder to review evidence &amp; obtain explanation</a:t>
+            </a:r>
+          </a:p>
+        </p:txBody>
+      </p:sp>
+      <p:sp>
+        <p:nvSpPr>
+          <p:cNvPr id="9152" name="Rounded Rectangle 9151"/>
+          <p:cNvSpPr/>
+          <p:nvPr/>
+        </p:nvSpPr>
+        <p:spPr>
+          <a:xfrm>
+            <a:off x="7800000" y="6020000"/>
+            <a:ext cx="1260000" cy="720000"/>
+          </a:xfrm>
+          <a:prstGeom prst="roundRect">
+            <a:avLst>
+              <a:gd name="adj" fmla="val 10000"/>
+            </a:avLst>
+          </a:prstGeom>
+          <a:noFill/>
+          <a:ln w="12700">
+            <a:solidFill>
+              <a:srgbClr val="BFBFBF"/>
+            </a:solidFill>
+          </a:ln>
+          <a:effectLst/>
+        </p:spPr>
+        <p:style>
+          <a:lnRef idx="1">
+            <a:schemeClr val="accent1"/>
+          </a:lnRef>
+          <a:fillRef idx="3">
+            <a:schemeClr val="accent1"/>
+          </a:fillRef>
+          <a:effectRef idx="2">
+            <a:schemeClr val="accent1"/>
+          </a:effectRef>
+          <a:fontRef idx="minor">
+            <a:schemeClr val="lt1"/>
+          </a:fontRef>
+        </p:style>
+        <p:txBody>
+          <a:bodyPr rtlCol="0" anchor="ctr" wrap="square" lIns="45720" rIns="45720" tIns="36576" bIns="36576"/>
+          <a:lstStyle/>
+          <a:p>
+            <a:pPr algn="ctr"/>
+            <a:r>
+              <a:rPr sz="900" b="1" i="0">
+                <a:solidFill>
+                  <a:srgbClr val="404040"/>
+                </a:solidFill>
+                <a:latin typeface="Segoe UI"/>
+              </a:rPr>
+              <a:t>Finalize the provisional credit</a:t>
+            </a:r>
+          </a:p>
+        </p:txBody>
+      </p:sp>
+      <p:sp>
+        <p:nvSpPr>
+          <p:cNvPr id="9153" name="Rounded Rectangle 9152"/>
+          <p:cNvSpPr/>
+          <p:nvPr/>
+        </p:nvSpPr>
+        <p:spPr>
+          <a:xfrm>
+            <a:off x="9700000" y="6020000"/>
+            <a:ext cx="1260000" cy="720000"/>
+          </a:xfrm>
+          <a:prstGeom prst="roundRect">
+            <a:avLst>
+              <a:gd name="adj" fmla="val 10000"/>
+            </a:avLst>
+          </a:prstGeom>
+          <a:noFill/>
+          <a:ln w="12700">
+            <a:solidFill>
+              <a:srgbClr val="BFBFBF"/>
+            </a:solidFill>
+          </a:ln>
+          <a:effectLst/>
+        </p:spPr>
+        <p:style>
+          <a:lnRef idx="1">
+            <a:schemeClr val="accent1"/>
+          </a:lnRef>
+          <a:fillRef idx="3">
+            <a:schemeClr val="accent1"/>
+          </a:fillRef>
+          <a:effectRef idx="2">
+            <a:schemeClr val="accent1"/>
+          </a:effectRef>
+          <a:fontRef idx="minor">
+            <a:schemeClr val="lt1"/>
+          </a:fontRef>
+        </p:style>
+        <p:txBody>
+          <a:bodyPr rtlCol="0" anchor="ctr" wrap="square" lIns="45720" rIns="45720" tIns="36576" bIns="36576"/>
+          <a:lstStyle/>
+          <a:p>
+            <a:pPr algn="ctr"/>
+            <a:r>
+              <a:rPr sz="900" b="1" i="0">
+                <a:solidFill>
+                  <a:srgbClr val="404040"/>
+                </a:solidFill>
+                <a:latin typeface="Segoe UI"/>
+              </a:rPr>
+              <a:t>Reverse the provisional credit</a:t>
+            </a:r>
+          </a:p>
+        </p:txBody>
+      </p:sp>
+      <p:grpSp>
+        <p:nvGrpSpPr>
+          <p:cNvPr id="9001" name="Handoff"/>
+          <p:cNvGrpSpPr/>
+          <p:nvPr/>
+        </p:nvGrpSpPr>
+        <p:grpSpPr>
+          <a:xfrm>
+            <a:off x="11210000" y="6254000"/>
+            <a:ext cx="252000" cy="252000"/>
+            <a:chOff x="11210000" y="6254000"/>
+            <a:chExt cx="252000" cy="252000"/>
+          </a:xfrm>
+        </p:grpSpPr>
+        <p:sp>
+          <p:nvSpPr>
+            <p:cNvPr id="9002" name="hoffc"/>
+            <p:cNvSpPr/>
+            <p:nvPr/>
+          </p:nvSpPr>
+          <p:spPr>
+            <a:xfrm>
+              <a:off x="11210000" y="6254000"/>
+              <a:ext cx="252000" cy="252000"/>
+            </a:xfrm>
+            <a:prstGeom prst="ellipse">
+              <a:avLst/>
+            </a:prstGeom>
+            <a:solidFill>
+              <a:srgbClr val="9DD4CF"/>
+            </a:solidFill>
+            <a:ln>
+              <a:noFill/>
+            </a:ln>
+          </p:spPr>
+          <p:txBody>
+            <a:bodyPr/>
+            <a:lstStyle/>
+            <a:p>
+              <a:endParaRPr lang="en-US"/>
+            </a:p>
+          </p:txBody>
+        </p:sp>
+        <p:sp>
+          <p:nvSpPr>
+            <p:cNvPr id="9003" name="hoffa"/>
+            <p:cNvSpPr/>
+            <p:nvPr/>
+          </p:nvSpPr>
+          <p:spPr>
+            <a:xfrm>
+              <a:off x="11260316" y="6317821"/>
+              <a:ext cx="161665" cy="124358"/>
+            </a:xfrm>
+            <a:prstGeom prst="rightArrow">
+              <a:avLst>
+                <a:gd name="adj1" fmla="val 50000"/>
+                <a:gd name="adj2" fmla="val 50000"/>
+              </a:avLst>
+            </a:prstGeom>
+            <a:solidFill>
+              <a:srgbClr val="FFFFFF"/>
+            </a:solidFill>
+            <a:ln>
+              <a:noFill/>
+            </a:ln>
+          </p:spPr>
+          <p:txBody>
+            <a:bodyPr/>
+            <a:lstStyle/>
+            <a:p>
+              <a:endParaRPr lang="en-US"/>
+            </a:p>
+          </p:txBody>
+        </p:sp>
+      </p:grpSp>
+      <p:cxnSp>
+        <p:nvCxnSpPr>
+          <p:cNvPr id="9154" name="Connector 9153"/>
+          <p:cNvCxnSpPr/>
+          <p:nvPr/>
+        </p:nvCxnSpPr>
+        <p:spPr>
+          <a:xfrm>
+            <a:off x="1610000" y="4630000"/>
+            <a:ext cx="350000" cy="0"/>
+          </a:xfrm>
+          <a:prstGeom prst="line">
+            <a:avLst/>
+          </a:prstGeom>
+          <a:ln w="19050">
+            <a:solidFill>
+              <a:srgbClr val="9B9B9B"/>
+            </a:solidFill>
+            <a:tailEnd type="triangle" w="med" len="med"/>
+          </a:ln>
+        </p:spPr>
+        <p:style>
+          <a:lnRef idx="2">
+            <a:schemeClr val="accent1"/>
+          </a:lnRef>
+          <a:fillRef idx="0">
+            <a:schemeClr val="accent1"/>
+          </a:fillRef>
+          <a:effectRef idx="1">
+            <a:schemeClr val="accent1"/>
+          </a:effectRef>
+          <a:fontRef idx="minor">
+            <a:schemeClr val="tx1"/>
+          </a:fontRef>
+        </p:style>
+      </p:cxnSp>
+      <p:cxnSp>
+        <p:nvCxnSpPr>
+          <p:cNvPr id="9155" name="Connector 9154"/>
+          <p:cNvCxnSpPr/>
+          <p:nvPr/>
+        </p:nvCxnSpPr>
+        <p:spPr>
+          <a:xfrm>
+            <a:off x="2608000" y="5064340"/>
+            <a:ext cx="0" cy="805660"/>
+          </a:xfrm>
+          <a:prstGeom prst="line">
+            <a:avLst/>
+          </a:prstGeom>
+          <a:ln w="19050">
+            <a:solidFill>
+              <a:srgbClr val="9B9B9B"/>
+            </a:solidFill>
+          </a:ln>
+        </p:spPr>
+        <p:style>
+          <a:lnRef idx="2">
+            <a:schemeClr val="accent1"/>
+          </a:lnRef>
+          <a:fillRef idx="0">
+            <a:schemeClr val="accent1"/>
+          </a:fillRef>
+          <a:effectRef idx="1">
+            <a:schemeClr val="accent1"/>
+          </a:effectRef>
+          <a:fontRef idx="minor">
+            <a:schemeClr val="tx1"/>
+          </a:fontRef>
+        </p:style>
+      </p:cxnSp>
+      <p:cxnSp>
+        <p:nvCxnSpPr>
+          <p:cNvPr id="9156" name="Connector 9155"/>
+          <p:cNvCxnSpPr/>
+          <p:nvPr/>
+        </p:nvCxnSpPr>
+        <p:spPr>
+          <a:xfrm>
+            <a:off x="2608000" y="5870000"/>
+            <a:ext cx="5622000" cy="0"/>
+          </a:xfrm>
+          <a:prstGeom prst="line">
+            <a:avLst/>
+          </a:prstGeom>
+          <a:ln w="19050">
+            <a:solidFill>
+              <a:srgbClr val="9B9B9B"/>
+            </a:solidFill>
+          </a:ln>
+        </p:spPr>
+        <p:style>
+          <a:lnRef idx="2">
+            <a:schemeClr val="accent1"/>
+          </a:lnRef>
+          <a:fillRef idx="0">
+            <a:schemeClr val="accent1"/>
+          </a:fillRef>
+          <a:effectRef idx="1">
+            <a:schemeClr val="accent1"/>
+          </a:effectRef>
+          <a:fontRef idx="minor">
+            <a:schemeClr val="tx1"/>
+          </a:fontRef>
+        </p:style>
+      </p:cxnSp>
+      <p:cxnSp>
+        <p:nvCxnSpPr>
+          <p:cNvPr id="9157" name="Connector 9156"/>
+          <p:cNvCxnSpPr/>
+          <p:nvPr/>
+        </p:nvCxnSpPr>
+        <p:spPr>
+          <a:xfrm>
+            <a:off x="8230000" y="5870000"/>
+            <a:ext cx="0" cy="150000"/>
+          </a:xfrm>
+          <a:prstGeom prst="line">
+            <a:avLst/>
+          </a:prstGeom>
+          <a:ln w="19050">
+            <a:solidFill>
+              <a:srgbClr val="9B9B9B"/>
+            </a:solidFill>
+            <a:tailEnd type="triangle" w="med" len="med"/>
+          </a:ln>
+        </p:spPr>
+        <p:style>
+          <a:lnRef idx="2">
+            <a:schemeClr val="accent1"/>
+          </a:lnRef>
+          <a:fillRef idx="0">
+            <a:schemeClr val="accent1"/>
+          </a:fillRef>
+          <a:effectRef idx="1">
+            <a:schemeClr val="accent1"/>
+          </a:effectRef>
+          <a:fontRef idx="minor">
+            <a:schemeClr val="tx1"/>
+          </a:fontRef>
+        </p:style>
+      </p:cxnSp>
+      <p:sp>
+        <p:nvSpPr>
+          <p:cNvPr id="9158" name="TextBox 9157"/>
           <p:cNvSpPr txBox="1"/>
           <p:nvPr/>
         </p:nvSpPr>
         <p:spPr>
           <a:xfrm>
-            <a:off x="300000" y="4870000"/>
-            <a:ext cx="2600000" cy="300000"/>
+            <a:off x="2278000" y="5084340"/>
+            <a:ext cx="620000" cy="260000"/>
           </a:xfrm>
           <a:prstGeom prst="rect">
             <a:avLst/>
@@ -22385,17 +23834,974 @@
           <a:p>
             <a:pPr algn="ctr"/>
             <a:r>
-              <a:rPr sz="700" b="0" i="1">
-                <a:solidFill>
-                  <a:srgbClr val="404040"/>
-                </a:solidFill>
-                <a:latin typeface="Segoe UI"/>
-              </a:rPr>
-              <a:t>Complete case audit trail is maintained throughout Stage 4</a:t>
+              <a:rPr sz="900" b="1" i="0">
+                <a:solidFill>
+                  <a:srgbClr val="009A44"/>
+                </a:solidFill>
+                <a:latin typeface="Segoe UI"/>
+              </a:rPr>
+              <a:t>Yes</a:t>
             </a:r>
           </a:p>
         </p:txBody>
       </p:sp>
+      <p:cxnSp>
+        <p:nvCxnSpPr>
+          <p:cNvPr id="9159" name="Connector 9158"/>
+          <p:cNvCxnSpPr/>
+          <p:nvPr/>
+        </p:nvCxnSpPr>
+        <p:spPr>
+          <a:xfrm>
+            <a:off x="3256000" y="4630000"/>
+            <a:ext cx="350000" cy="0"/>
+          </a:xfrm>
+          <a:prstGeom prst="line">
+            <a:avLst/>
+          </a:prstGeom>
+          <a:ln w="19050">
+            <a:solidFill>
+              <a:srgbClr val="9B9B9B"/>
+            </a:solidFill>
+            <a:tailEnd type="triangle" w="med" len="med"/>
+          </a:ln>
+        </p:spPr>
+        <p:style>
+          <a:lnRef idx="2">
+            <a:schemeClr val="accent1"/>
+          </a:lnRef>
+          <a:fillRef idx="0">
+            <a:schemeClr val="accent1"/>
+          </a:fillRef>
+          <a:effectRef idx="1">
+            <a:schemeClr val="accent1"/>
+          </a:effectRef>
+          <a:fontRef idx="minor">
+            <a:schemeClr val="tx1"/>
+          </a:fontRef>
+        </p:style>
+      </p:cxnSp>
+      <p:sp>
+        <p:nvSpPr>
+          <p:cNvPr id="9160" name="TextBox 9159"/>
+          <p:cNvSpPr txBox="1"/>
+          <p:nvPr/>
+        </p:nvSpPr>
+        <p:spPr>
+          <a:xfrm>
+            <a:off x="3286000" y="4350000"/>
+            <a:ext cx="620000" cy="260000"/>
+          </a:xfrm>
+          <a:prstGeom prst="rect">
+            <a:avLst/>
+          </a:prstGeom>
+          <a:noFill/>
+        </p:spPr>
+        <p:txBody>
+          <a:bodyPr wrap="square" lIns="45720" rIns="45720" tIns="36576" bIns="36576" anchor="ctr">
+            <a:spAutoFit/>
+          </a:bodyPr>
+          <a:lstStyle/>
+          <a:p>
+            <a:pPr algn="ctr"/>
+            <a:r>
+              <a:rPr sz="900" b="1" i="0">
+                <a:solidFill>
+                  <a:srgbClr val="C00000"/>
+                </a:solidFill>
+                <a:latin typeface="Segoe UI"/>
+              </a:rPr>
+              <a:t>No</a:t>
+            </a:r>
+          </a:p>
+        </p:txBody>
+      </p:sp>
+      <p:cxnSp>
+        <p:nvCxnSpPr>
+          <p:cNvPr id="9161" name="Connector 9160"/>
+          <p:cNvCxnSpPr/>
+          <p:nvPr/>
+        </p:nvCxnSpPr>
+        <p:spPr>
+          <a:xfrm flipH="1">
+            <a:off x="4086000" y="5064340"/>
+            <a:ext cx="168000" cy="5660"/>
+          </a:xfrm>
+          <a:prstGeom prst="bentConnector3">
+            <a:avLst/>
+          </a:prstGeom>
+          <a:ln w="19050">
+            <a:solidFill>
+              <a:srgbClr val="9B9B9B"/>
+            </a:solidFill>
+            <a:tailEnd type="triangle" w="med" len="med"/>
+          </a:ln>
+        </p:spPr>
+        <p:style>
+          <a:lnRef idx="2">
+            <a:schemeClr val="accent1"/>
+          </a:lnRef>
+          <a:fillRef idx="0">
+            <a:schemeClr val="accent1"/>
+          </a:fillRef>
+          <a:effectRef idx="1">
+            <a:schemeClr val="accent1"/>
+          </a:effectRef>
+          <a:fontRef idx="minor">
+            <a:schemeClr val="tx1"/>
+          </a:fontRef>
+        </p:style>
+      </p:cxnSp>
+      <p:sp>
+        <p:nvSpPr>
+          <p:cNvPr id="9162" name="TextBox 9161"/>
+          <p:cNvSpPr txBox="1"/>
+          <p:nvPr/>
+        </p:nvSpPr>
+        <p:spPr>
+          <a:xfrm>
+            <a:off x="4284000" y="5084340"/>
+            <a:ext cx="620000" cy="260000"/>
+          </a:xfrm>
+          <a:prstGeom prst="rect">
+            <a:avLst/>
+          </a:prstGeom>
+          <a:noFill/>
+        </p:spPr>
+        <p:txBody>
+          <a:bodyPr wrap="square" lIns="45720" rIns="45720" tIns="36576" bIns="36576" anchor="ctr">
+            <a:spAutoFit/>
+          </a:bodyPr>
+          <a:lstStyle/>
+          <a:p>
+            <a:pPr algn="ctr"/>
+            <a:r>
+              <a:rPr sz="900" b="1" i="0">
+                <a:solidFill>
+                  <a:srgbClr val="009A44"/>
+                </a:solidFill>
+                <a:latin typeface="Segoe UI"/>
+              </a:rPr>
+              <a:t>Yes</a:t>
+            </a:r>
+          </a:p>
+        </p:txBody>
+      </p:sp>
+      <p:cxnSp>
+        <p:nvCxnSpPr>
+          <p:cNvPr id="9163" name="Connector 9162"/>
+          <p:cNvCxnSpPr/>
+          <p:nvPr/>
+        </p:nvCxnSpPr>
+        <p:spPr>
+          <a:xfrm>
+            <a:off x="4902000" y="4630000"/>
+            <a:ext cx="350000" cy="0"/>
+          </a:xfrm>
+          <a:prstGeom prst="line">
+            <a:avLst/>
+          </a:prstGeom>
+          <a:ln w="19050">
+            <a:solidFill>
+              <a:srgbClr val="9B9B9B"/>
+            </a:solidFill>
+            <a:tailEnd type="triangle" w="med" len="med"/>
+          </a:ln>
+        </p:spPr>
+        <p:style>
+          <a:lnRef idx="2">
+            <a:schemeClr val="accent1"/>
+          </a:lnRef>
+          <a:fillRef idx="0">
+            <a:schemeClr val="accent1"/>
+          </a:fillRef>
+          <a:effectRef idx="1">
+            <a:schemeClr val="accent1"/>
+          </a:effectRef>
+          <a:fontRef idx="minor">
+            <a:schemeClr val="tx1"/>
+          </a:fontRef>
+        </p:style>
+      </p:cxnSp>
+      <p:sp>
+        <p:nvSpPr>
+          <p:cNvPr id="9164" name="TextBox 9163"/>
+          <p:cNvSpPr txBox="1"/>
+          <p:nvPr/>
+        </p:nvSpPr>
+        <p:spPr>
+          <a:xfrm>
+            <a:off x="4932000" y="4350000"/>
+            <a:ext cx="620000" cy="260000"/>
+          </a:xfrm>
+          <a:prstGeom prst="rect">
+            <a:avLst/>
+          </a:prstGeom>
+          <a:noFill/>
+        </p:spPr>
+        <p:txBody>
+          <a:bodyPr wrap="square" lIns="45720" rIns="45720" tIns="36576" bIns="36576" anchor="ctr">
+            <a:spAutoFit/>
+          </a:bodyPr>
+          <a:lstStyle/>
+          <a:p>
+            <a:pPr algn="ctr"/>
+            <a:r>
+              <a:rPr sz="900" b="1" i="0">
+                <a:solidFill>
+                  <a:srgbClr val="C00000"/>
+                </a:solidFill>
+                <a:latin typeface="Segoe UI"/>
+              </a:rPr>
+              <a:t>No</a:t>
+            </a:r>
+          </a:p>
+        </p:txBody>
+      </p:sp>
+      <p:cxnSp>
+        <p:nvCxnSpPr>
+          <p:cNvPr id="9165" name="Connector 9164"/>
+          <p:cNvCxnSpPr/>
+          <p:nvPr/>
+        </p:nvCxnSpPr>
+        <p:spPr>
+          <a:xfrm flipV="1">
+            <a:off x="4716000" y="4630000"/>
+            <a:ext cx="536000" cy="800000"/>
+          </a:xfrm>
+          <a:prstGeom prst="bentConnector3">
+            <a:avLst/>
+          </a:prstGeom>
+          <a:ln w="19050">
+            <a:solidFill>
+              <a:srgbClr val="9B9B9B"/>
+            </a:solidFill>
+            <a:tailEnd type="triangle" w="med" len="med"/>
+          </a:ln>
+        </p:spPr>
+        <p:style>
+          <a:lnRef idx="2">
+            <a:schemeClr val="accent1"/>
+          </a:lnRef>
+          <a:fillRef idx="0">
+            <a:schemeClr val="accent1"/>
+          </a:fillRef>
+          <a:effectRef idx="1">
+            <a:schemeClr val="accent1"/>
+          </a:effectRef>
+          <a:fontRef idx="minor">
+            <a:schemeClr val="tx1"/>
+          </a:fontRef>
+        </p:style>
+      </p:cxnSp>
+      <p:cxnSp>
+        <p:nvCxnSpPr>
+          <p:cNvPr id="9166" name="Connector 9165"/>
+          <p:cNvCxnSpPr/>
+          <p:nvPr/>
+        </p:nvCxnSpPr>
+        <p:spPr>
+          <a:xfrm>
+            <a:off x="6512000" y="4630000"/>
+            <a:ext cx="350000" cy="0"/>
+          </a:xfrm>
+          <a:prstGeom prst="line">
+            <a:avLst/>
+          </a:prstGeom>
+          <a:ln w="19050">
+            <a:solidFill>
+              <a:srgbClr val="9B9B9B"/>
+            </a:solidFill>
+            <a:tailEnd type="triangle" w="med" len="med"/>
+          </a:ln>
+        </p:spPr>
+        <p:style>
+          <a:lnRef idx="2">
+            <a:schemeClr val="accent1"/>
+          </a:lnRef>
+          <a:fillRef idx="0">
+            <a:schemeClr val="accent1"/>
+          </a:fillRef>
+          <a:effectRef idx="1">
+            <a:schemeClr val="accent1"/>
+          </a:effectRef>
+          <a:fontRef idx="minor">
+            <a:schemeClr val="tx1"/>
+          </a:fontRef>
+        </p:style>
+      </p:cxnSp>
+      <p:cxnSp>
+        <p:nvCxnSpPr>
+          <p:cNvPr id="9167" name="Connector 9166"/>
+          <p:cNvCxnSpPr/>
+          <p:nvPr/>
+        </p:nvCxnSpPr>
+        <p:spPr>
+          <a:xfrm>
+            <a:off x="7510000" y="5064340"/>
+            <a:ext cx="0" cy="805660"/>
+          </a:xfrm>
+          <a:prstGeom prst="line">
+            <a:avLst/>
+          </a:prstGeom>
+          <a:ln w="19050">
+            <a:solidFill>
+              <a:srgbClr val="9B9B9B"/>
+            </a:solidFill>
+          </a:ln>
+        </p:spPr>
+        <p:style>
+          <a:lnRef idx="2">
+            <a:schemeClr val="accent1"/>
+          </a:lnRef>
+          <a:fillRef idx="0">
+            <a:schemeClr val="accent1"/>
+          </a:fillRef>
+          <a:effectRef idx="1">
+            <a:schemeClr val="accent1"/>
+          </a:effectRef>
+          <a:fontRef idx="minor">
+            <a:schemeClr val="tx1"/>
+          </a:fontRef>
+        </p:style>
+      </p:cxnSp>
+      <p:cxnSp>
+        <p:nvCxnSpPr>
+          <p:cNvPr id="9168" name="Connector 9167"/>
+          <p:cNvCxnSpPr/>
+          <p:nvPr/>
+        </p:nvCxnSpPr>
+        <p:spPr>
+          <a:xfrm>
+            <a:off x="7510000" y="5870000"/>
+            <a:ext cx="920000" cy="0"/>
+          </a:xfrm>
+          <a:prstGeom prst="line">
+            <a:avLst/>
+          </a:prstGeom>
+          <a:ln w="19050">
+            <a:solidFill>
+              <a:srgbClr val="9B9B9B"/>
+            </a:solidFill>
+          </a:ln>
+        </p:spPr>
+        <p:style>
+          <a:lnRef idx="2">
+            <a:schemeClr val="accent1"/>
+          </a:lnRef>
+          <a:fillRef idx="0">
+            <a:schemeClr val="accent1"/>
+          </a:fillRef>
+          <a:effectRef idx="1">
+            <a:schemeClr val="accent1"/>
+          </a:effectRef>
+          <a:fontRef idx="minor">
+            <a:schemeClr val="tx1"/>
+          </a:fontRef>
+        </p:style>
+      </p:cxnSp>
+      <p:cxnSp>
+        <p:nvCxnSpPr>
+          <p:cNvPr id="9169" name="Connector 9168"/>
+          <p:cNvCxnSpPr/>
+          <p:nvPr/>
+        </p:nvCxnSpPr>
+        <p:spPr>
+          <a:xfrm>
+            <a:off x="8430000" y="5870000"/>
+            <a:ext cx="0" cy="150000"/>
+          </a:xfrm>
+          <a:prstGeom prst="line">
+            <a:avLst/>
+          </a:prstGeom>
+          <a:ln w="19050">
+            <a:solidFill>
+              <a:srgbClr val="9B9B9B"/>
+            </a:solidFill>
+            <a:tailEnd type="triangle" w="med" len="med"/>
+          </a:ln>
+        </p:spPr>
+        <p:style>
+          <a:lnRef idx="2">
+            <a:schemeClr val="accent1"/>
+          </a:lnRef>
+          <a:fillRef idx="0">
+            <a:schemeClr val="accent1"/>
+          </a:fillRef>
+          <a:effectRef idx="1">
+            <a:schemeClr val="accent1"/>
+          </a:effectRef>
+          <a:fontRef idx="minor">
+            <a:schemeClr val="tx1"/>
+          </a:fontRef>
+        </p:style>
+      </p:cxnSp>
+      <p:sp>
+        <p:nvSpPr>
+          <p:cNvPr id="9170" name="TextBox 9169"/>
+          <p:cNvSpPr txBox="1"/>
+          <p:nvPr/>
+        </p:nvSpPr>
+        <p:spPr>
+          <a:xfrm>
+            <a:off x="7180000" y="5084340"/>
+            <a:ext cx="620000" cy="260000"/>
+          </a:xfrm>
+          <a:prstGeom prst="rect">
+            <a:avLst/>
+          </a:prstGeom>
+          <a:noFill/>
+        </p:spPr>
+        <p:txBody>
+          <a:bodyPr wrap="square" lIns="45720" rIns="45720" tIns="36576" bIns="36576" anchor="ctr">
+            <a:spAutoFit/>
+          </a:bodyPr>
+          <a:lstStyle/>
+          <a:p>
+            <a:pPr algn="ctr"/>
+            <a:r>
+              <a:rPr sz="900" b="1" i="0">
+                <a:solidFill>
+                  <a:srgbClr val="009A44"/>
+                </a:solidFill>
+                <a:latin typeface="Segoe UI"/>
+              </a:rPr>
+              <a:t>Yes</a:t>
+            </a:r>
+          </a:p>
+        </p:txBody>
+      </p:sp>
+      <p:cxnSp>
+        <p:nvCxnSpPr>
+          <p:cNvPr id="9171" name="Connector 9170"/>
+          <p:cNvCxnSpPr/>
+          <p:nvPr/>
+        </p:nvCxnSpPr>
+        <p:spPr>
+          <a:xfrm>
+            <a:off x="8158000" y="4630000"/>
+            <a:ext cx="350000" cy="0"/>
+          </a:xfrm>
+          <a:prstGeom prst="line">
+            <a:avLst/>
+          </a:prstGeom>
+          <a:ln w="19050">
+            <a:solidFill>
+              <a:srgbClr val="9B9B9B"/>
+            </a:solidFill>
+            <a:tailEnd type="triangle" w="med" len="med"/>
+          </a:ln>
+        </p:spPr>
+        <p:style>
+          <a:lnRef idx="2">
+            <a:schemeClr val="accent1"/>
+          </a:lnRef>
+          <a:fillRef idx="0">
+            <a:schemeClr val="accent1"/>
+          </a:fillRef>
+          <a:effectRef idx="1">
+            <a:schemeClr val="accent1"/>
+          </a:effectRef>
+          <a:fontRef idx="minor">
+            <a:schemeClr val="tx1"/>
+          </a:fontRef>
+        </p:style>
+      </p:cxnSp>
+      <p:sp>
+        <p:nvSpPr>
+          <p:cNvPr id="9172" name="TextBox 9171"/>
+          <p:cNvSpPr txBox="1"/>
+          <p:nvPr/>
+        </p:nvSpPr>
+        <p:spPr>
+          <a:xfrm>
+            <a:off x="8188000" y="4350000"/>
+            <a:ext cx="620000" cy="260000"/>
+          </a:xfrm>
+          <a:prstGeom prst="rect">
+            <a:avLst/>
+          </a:prstGeom>
+          <a:noFill/>
+        </p:spPr>
+        <p:txBody>
+          <a:bodyPr wrap="square" lIns="45720" rIns="45720" tIns="36576" bIns="36576" anchor="ctr">
+            <a:spAutoFit/>
+          </a:bodyPr>
+          <a:lstStyle/>
+          <a:p>
+            <a:pPr algn="ctr"/>
+            <a:r>
+              <a:rPr sz="900" b="1" i="0">
+                <a:solidFill>
+                  <a:srgbClr val="C00000"/>
+                </a:solidFill>
+                <a:latin typeface="Segoe UI"/>
+              </a:rPr>
+              <a:t>No</a:t>
+            </a:r>
+          </a:p>
+        </p:txBody>
+      </p:sp>
+      <p:cxnSp>
+        <p:nvCxnSpPr>
+          <p:cNvPr id="9173" name="Connector 9172"/>
+          <p:cNvCxnSpPr/>
+          <p:nvPr/>
+        </p:nvCxnSpPr>
+        <p:spPr>
+          <a:xfrm>
+            <a:off x="9768000" y="4630000"/>
+            <a:ext cx="350000" cy="0"/>
+          </a:xfrm>
+          <a:prstGeom prst="line">
+            <a:avLst/>
+          </a:prstGeom>
+          <a:ln w="19050">
+            <a:solidFill>
+              <a:srgbClr val="9B9B9B"/>
+            </a:solidFill>
+            <a:tailEnd type="triangle" w="med" len="med"/>
+          </a:ln>
+        </p:spPr>
+        <p:style>
+          <a:lnRef idx="2">
+            <a:schemeClr val="accent1"/>
+          </a:lnRef>
+          <a:fillRef idx="0">
+            <a:schemeClr val="accent1"/>
+          </a:fillRef>
+          <a:effectRef idx="1">
+            <a:schemeClr val="accent1"/>
+          </a:effectRef>
+          <a:fontRef idx="minor">
+            <a:schemeClr val="tx1"/>
+          </a:fontRef>
+        </p:style>
+      </p:cxnSp>
+      <p:cxnSp>
+        <p:nvCxnSpPr>
+          <p:cNvPr id="9174" name="Connector 9173"/>
+          <p:cNvCxnSpPr/>
+          <p:nvPr/>
+        </p:nvCxnSpPr>
+        <p:spPr>
+          <a:xfrm>
+            <a:off x="10616000" y="5064340"/>
+            <a:ext cx="0" cy="805660"/>
+          </a:xfrm>
+          <a:prstGeom prst="line">
+            <a:avLst/>
+          </a:prstGeom>
+          <a:ln w="19050">
+            <a:solidFill>
+              <a:srgbClr val="9B9B9B"/>
+            </a:solidFill>
+          </a:ln>
+        </p:spPr>
+        <p:style>
+          <a:lnRef idx="2">
+            <a:schemeClr val="accent1"/>
+          </a:lnRef>
+          <a:fillRef idx="0">
+            <a:schemeClr val="accent1"/>
+          </a:fillRef>
+          <a:effectRef idx="1">
+            <a:schemeClr val="accent1"/>
+          </a:effectRef>
+          <a:fontRef idx="minor">
+            <a:schemeClr val="tx1"/>
+          </a:fontRef>
+        </p:style>
+      </p:cxnSp>
+      <p:cxnSp>
+        <p:nvCxnSpPr>
+          <p:cNvPr id="9175" name="Connector 9174"/>
+          <p:cNvCxnSpPr/>
+          <p:nvPr/>
+        </p:nvCxnSpPr>
+        <p:spPr>
+          <a:xfrm flipH="1">
+            <a:off x="8910000" y="5870000"/>
+            <a:ext cx="1706000" cy="0"/>
+          </a:xfrm>
+          <a:prstGeom prst="line">
+            <a:avLst/>
+          </a:prstGeom>
+          <a:ln w="19050">
+            <a:solidFill>
+              <a:srgbClr val="9B9B9B"/>
+            </a:solidFill>
+          </a:ln>
+        </p:spPr>
+        <p:style>
+          <a:lnRef idx="2">
+            <a:schemeClr val="accent1"/>
+          </a:lnRef>
+          <a:fillRef idx="0">
+            <a:schemeClr val="accent1"/>
+          </a:fillRef>
+          <a:effectRef idx="1">
+            <a:schemeClr val="accent1"/>
+          </a:effectRef>
+          <a:fontRef idx="minor">
+            <a:schemeClr val="tx1"/>
+          </a:fontRef>
+        </p:style>
+      </p:cxnSp>
+      <p:cxnSp>
+        <p:nvCxnSpPr>
+          <p:cNvPr id="9176" name="Connector 9175"/>
+          <p:cNvCxnSpPr/>
+          <p:nvPr/>
+        </p:nvCxnSpPr>
+        <p:spPr>
+          <a:xfrm>
+            <a:off x="8910000" y="5870000"/>
+            <a:ext cx="0" cy="150000"/>
+          </a:xfrm>
+          <a:prstGeom prst="line">
+            <a:avLst/>
+          </a:prstGeom>
+          <a:ln w="19050">
+            <a:solidFill>
+              <a:srgbClr val="9B9B9B"/>
+            </a:solidFill>
+            <a:tailEnd type="triangle" w="med" len="med"/>
+          </a:ln>
+        </p:spPr>
+        <p:style>
+          <a:lnRef idx="2">
+            <a:schemeClr val="accent1"/>
+          </a:lnRef>
+          <a:fillRef idx="0">
+            <a:schemeClr val="accent1"/>
+          </a:fillRef>
+          <a:effectRef idx="1">
+            <a:schemeClr val="accent1"/>
+          </a:effectRef>
+          <a:fontRef idx="minor">
+            <a:schemeClr val="tx1"/>
+          </a:fontRef>
+        </p:style>
+      </p:cxnSp>
+      <p:sp>
+        <p:nvSpPr>
+          <p:cNvPr id="9177" name="TextBox 9176"/>
+          <p:cNvSpPr txBox="1"/>
+          <p:nvPr/>
+        </p:nvSpPr>
+        <p:spPr>
+          <a:xfrm>
+            <a:off x="9858000" y="5084340"/>
+            <a:ext cx="620000" cy="260000"/>
+          </a:xfrm>
+          <a:prstGeom prst="rect">
+            <a:avLst/>
+          </a:prstGeom>
+          <a:noFill/>
+        </p:spPr>
+        <p:txBody>
+          <a:bodyPr wrap="square" lIns="45720" rIns="45720" tIns="36576" bIns="36576" anchor="ctr">
+            <a:spAutoFit/>
+          </a:bodyPr>
+          <a:lstStyle/>
+          <a:p>
+            <a:pPr algn="ctr"/>
+            <a:r>
+              <a:rPr sz="900" b="1" i="0">
+                <a:solidFill>
+                  <a:srgbClr val="009A44"/>
+                </a:solidFill>
+                <a:latin typeface="Segoe UI"/>
+              </a:rPr>
+              <a:t>Yes</a:t>
+            </a:r>
+          </a:p>
+        </p:txBody>
+      </p:sp>
+      <p:cxnSp>
+        <p:nvCxnSpPr>
+          <p:cNvPr id="9178" name="Connector 9177"/>
+          <p:cNvCxnSpPr/>
+          <p:nvPr/>
+        </p:nvCxnSpPr>
+        <p:spPr>
+          <a:xfrm>
+            <a:off x="10916000" y="5064340"/>
+            <a:ext cx="0" cy="805660"/>
+          </a:xfrm>
+          <a:prstGeom prst="line">
+            <a:avLst/>
+          </a:prstGeom>
+          <a:ln w="19050">
+            <a:solidFill>
+              <a:srgbClr val="9B9B9B"/>
+            </a:solidFill>
+          </a:ln>
+        </p:spPr>
+        <p:style>
+          <a:lnRef idx="2">
+            <a:schemeClr val="accent1"/>
+          </a:lnRef>
+          <a:fillRef idx="0">
+            <a:schemeClr val="accent1"/>
+          </a:fillRef>
+          <a:effectRef idx="1">
+            <a:schemeClr val="accent1"/>
+          </a:effectRef>
+          <a:fontRef idx="minor">
+            <a:schemeClr val="tx1"/>
+          </a:fontRef>
+        </p:style>
+      </p:cxnSp>
+      <p:cxnSp>
+        <p:nvCxnSpPr>
+          <p:cNvPr id="9179" name="Connector 9178"/>
+          <p:cNvCxnSpPr/>
+          <p:nvPr/>
+        </p:nvCxnSpPr>
+        <p:spPr>
+          <a:xfrm flipH="1">
+            <a:off x="9850000" y="5870000"/>
+            <a:ext cx="1066000" cy="0"/>
+          </a:xfrm>
+          <a:prstGeom prst="line">
+            <a:avLst/>
+          </a:prstGeom>
+          <a:ln w="19050">
+            <a:solidFill>
+              <a:srgbClr val="9B9B9B"/>
+            </a:solidFill>
+          </a:ln>
+        </p:spPr>
+        <p:style>
+          <a:lnRef idx="2">
+            <a:schemeClr val="accent1"/>
+          </a:lnRef>
+          <a:fillRef idx="0">
+            <a:schemeClr val="accent1"/>
+          </a:fillRef>
+          <a:effectRef idx="1">
+            <a:schemeClr val="accent1"/>
+          </a:effectRef>
+          <a:fontRef idx="minor">
+            <a:schemeClr val="tx1"/>
+          </a:fontRef>
+        </p:style>
+      </p:cxnSp>
+      <p:cxnSp>
+        <p:nvCxnSpPr>
+          <p:cNvPr id="9180" name="Connector 9179"/>
+          <p:cNvCxnSpPr/>
+          <p:nvPr/>
+        </p:nvCxnSpPr>
+        <p:spPr>
+          <a:xfrm>
+            <a:off x="9850000" y="5870000"/>
+            <a:ext cx="0" cy="150000"/>
+          </a:xfrm>
+          <a:prstGeom prst="line">
+            <a:avLst/>
+          </a:prstGeom>
+          <a:ln w="19050">
+            <a:solidFill>
+              <a:srgbClr val="9B9B9B"/>
+            </a:solidFill>
+            <a:tailEnd type="triangle" w="med" len="med"/>
+          </a:ln>
+        </p:spPr>
+        <p:style>
+          <a:lnRef idx="2">
+            <a:schemeClr val="accent1"/>
+          </a:lnRef>
+          <a:fillRef idx="0">
+            <a:schemeClr val="accent1"/>
+          </a:fillRef>
+          <a:effectRef idx="1">
+            <a:schemeClr val="accent1"/>
+          </a:effectRef>
+          <a:fontRef idx="minor">
+            <a:schemeClr val="tx1"/>
+          </a:fontRef>
+        </p:style>
+      </p:cxnSp>
+      <p:sp>
+        <p:nvSpPr>
+          <p:cNvPr id="9181" name="TextBox 9180"/>
+          <p:cNvSpPr txBox="1"/>
+          <p:nvPr/>
+        </p:nvSpPr>
+        <p:spPr>
+          <a:xfrm>
+            <a:off x="11354000" y="5084340"/>
+            <a:ext cx="620000" cy="260000"/>
+          </a:xfrm>
+          <a:prstGeom prst="rect">
+            <a:avLst/>
+          </a:prstGeom>
+          <a:noFill/>
+        </p:spPr>
+        <p:txBody>
+          <a:bodyPr wrap="square" lIns="45720" rIns="45720" tIns="36576" bIns="36576" anchor="ctr">
+            <a:spAutoFit/>
+          </a:bodyPr>
+          <a:lstStyle/>
+          <a:p>
+            <a:pPr algn="ctr"/>
+            <a:r>
+              <a:rPr sz="900" b="1" i="0">
+                <a:solidFill>
+                  <a:srgbClr val="C00000"/>
+                </a:solidFill>
+                <a:latin typeface="Segoe UI"/>
+              </a:rPr>
+              <a:t>No</a:t>
+            </a:r>
+          </a:p>
+        </p:txBody>
+      </p:sp>
+      <p:cxnSp>
+        <p:nvCxnSpPr>
+          <p:cNvPr id="9182" name="Connector 9181"/>
+          <p:cNvCxnSpPr/>
+          <p:nvPr/>
+        </p:nvCxnSpPr>
+        <p:spPr>
+          <a:xfrm flipV="1">
+            <a:off x="8430000" y="5870000"/>
+            <a:ext cx="0" cy="150000"/>
+          </a:xfrm>
+          <a:prstGeom prst="line">
+            <a:avLst/>
+          </a:prstGeom>
+          <a:ln w="19050">
+            <a:solidFill>
+              <a:srgbClr val="9B9B9B"/>
+            </a:solidFill>
+          </a:ln>
+        </p:spPr>
+        <p:style>
+          <a:lnRef idx="2">
+            <a:schemeClr val="accent1"/>
+          </a:lnRef>
+          <a:fillRef idx="0">
+            <a:schemeClr val="accent1"/>
+          </a:fillRef>
+          <a:effectRef idx="1">
+            <a:schemeClr val="accent1"/>
+          </a:effectRef>
+          <a:fontRef idx="minor">
+            <a:schemeClr val="tx1"/>
+          </a:fontRef>
+        </p:style>
+      </p:cxnSp>
+      <p:cxnSp>
+        <p:nvCxnSpPr>
+          <p:cNvPr id="9183" name="Connector 9182"/>
+          <p:cNvCxnSpPr/>
+          <p:nvPr/>
+        </p:nvCxnSpPr>
+        <p:spPr>
+          <a:xfrm>
+            <a:off x="8430000" y="5870000"/>
+            <a:ext cx="2906000" cy="0"/>
+          </a:xfrm>
+          <a:prstGeom prst="line">
+            <a:avLst/>
+          </a:prstGeom>
+          <a:ln w="19050">
+            <a:solidFill>
+              <a:srgbClr val="9B9B9B"/>
+            </a:solidFill>
+          </a:ln>
+        </p:spPr>
+        <p:style>
+          <a:lnRef idx="2">
+            <a:schemeClr val="accent1"/>
+          </a:lnRef>
+          <a:fillRef idx="0">
+            <a:schemeClr val="accent1"/>
+          </a:fillRef>
+          <a:effectRef idx="1">
+            <a:schemeClr val="accent1"/>
+          </a:effectRef>
+          <a:fontRef idx="minor">
+            <a:schemeClr val="tx1"/>
+          </a:fontRef>
+        </p:style>
+      </p:cxnSp>
+      <p:cxnSp>
+        <p:nvCxnSpPr>
+          <p:cNvPr id="9184" name="Connector 9183"/>
+          <p:cNvCxnSpPr/>
+          <p:nvPr/>
+        </p:nvCxnSpPr>
+        <p:spPr>
+          <a:xfrm>
+            <a:off x="11336000" y="5870000"/>
+            <a:ext cx="0" cy="384000"/>
+          </a:xfrm>
+          <a:prstGeom prst="line">
+            <a:avLst/>
+          </a:prstGeom>
+          <a:ln w="19050">
+            <a:solidFill>
+              <a:srgbClr val="9B9B9B"/>
+            </a:solidFill>
+            <a:tailEnd type="triangle" w="med" len="med"/>
+          </a:ln>
+        </p:spPr>
+        <p:style>
+          <a:lnRef idx="2">
+            <a:schemeClr val="accent1"/>
+          </a:lnRef>
+          <a:fillRef idx="0">
+            <a:schemeClr val="accent1"/>
+          </a:fillRef>
+          <a:effectRef idx="1">
+            <a:schemeClr val="accent1"/>
+          </a:effectRef>
+          <a:fontRef idx="minor">
+            <a:schemeClr val="tx1"/>
+          </a:fontRef>
+        </p:style>
+      </p:cxnSp>
+      <p:cxnSp>
+        <p:nvCxnSpPr>
+          <p:cNvPr id="9185" name="Connector 9184"/>
+          <p:cNvCxnSpPr/>
+          <p:nvPr/>
+        </p:nvCxnSpPr>
+        <p:spPr>
+          <a:xfrm>
+            <a:off x="10960000" y="6380000"/>
+            <a:ext cx="250000" cy="0"/>
+          </a:xfrm>
+          <a:prstGeom prst="line">
+            <a:avLst/>
+          </a:prstGeom>
+          <a:ln w="19050">
+            <a:solidFill>
+              <a:srgbClr val="9B9B9B"/>
+            </a:solidFill>
+            <a:tailEnd type="triangle" w="med" len="med"/>
+          </a:ln>
+        </p:spPr>
+        <p:style>
+          <a:lnRef idx="2">
+            <a:schemeClr val="accent1"/>
+          </a:lnRef>
+          <a:fillRef idx="0">
+            <a:schemeClr val="accent1"/>
+          </a:fillRef>
+          <a:effectRef idx="1">
+            <a:schemeClr val="accent1"/>
+          </a:effectRef>
+          <a:fontRef idx="minor">
+            <a:schemeClr val="tx1"/>
+          </a:fontRef>
+        </p:style>
+      </p:cxnSp>
     </p:spTree>
     <p:extLst>
       <p:ext uri="{BB962C8B-B14F-4D97-AF65-F5344CB8AC3E}">
@@ -23580,242 +25986,7 @@
         </p:nvSpPr>
         <p:spPr>
           <a:xfrm>
-            <a:off x="300000" y="2500000"/>
-            <a:ext cx="1260000" cy="720000"/>
-          </a:xfrm>
-          <a:prstGeom prst="roundRect">
-            <a:avLst>
-              <a:gd name="adj" fmla="val 10000"/>
-            </a:avLst>
-          </a:prstGeom>
-          <a:noFill/>
-          <a:ln w="12700">
-            <a:solidFill>
-              <a:srgbClr val="BFBFBF"/>
-            </a:solidFill>
-          </a:ln>
-          <a:effectLst/>
-        </p:spPr>
-        <p:style>
-          <a:lnRef idx="1">
-            <a:schemeClr val="accent1"/>
-          </a:lnRef>
-          <a:fillRef idx="3">
-            <a:schemeClr val="accent1"/>
-          </a:fillRef>
-          <a:effectRef idx="2">
-            <a:schemeClr val="accent1"/>
-          </a:effectRef>
-          <a:fontRef idx="minor">
-            <a:schemeClr val="lt1"/>
-          </a:fontRef>
-        </p:style>
-        <p:txBody>
-          <a:bodyPr rtlCol="0" anchor="ctr" wrap="square" lIns="45720" rIns="45720" tIns="36576" bIns="36576"/>
-          <a:lstStyle/>
-          <a:p>
-            <a:pPr algn="ctr"/>
-            <a:r>
-              <a:rPr sz="900" b="1" i="0">
-                <a:solidFill>
-                  <a:srgbClr val="404040"/>
-                </a:solidFill>
-                <a:latin typeface="Segoe UI"/>
-              </a:rPr>
-              <a:t>Visa Arbitration Committee ruling (if escalated)</a:t>
-            </a:r>
-          </a:p>
-        </p:txBody>
-      </p:sp>
-      <p:sp>
-        <p:nvSpPr>
-          <p:cNvPr id="974" name="TextBox 973"/>
-          <p:cNvSpPr txBox="1"/>
-          <p:nvPr/>
-        </p:nvSpPr>
-        <p:spPr>
-          <a:xfrm>
-            <a:off x="280000" y="3260000"/>
-            <a:ext cx="1500000" cy="430000"/>
-          </a:xfrm>
-          <a:prstGeom prst="rect">
-            <a:avLst/>
-          </a:prstGeom>
-          <a:noFill/>
-        </p:spPr>
-        <p:txBody>
-          <a:bodyPr wrap="square" lIns="45720" rIns="45720" tIns="36576" bIns="36576" anchor="ctr">
-            <a:spAutoFit/>
-          </a:bodyPr>
-          <a:lstStyle/>
-          <a:p>
-            <a:pPr algn="ctr"/>
-            <a:r>
-              <a:rPr sz="700" b="0" i="1">
-                <a:solidFill>
-                  <a:srgbClr val="404040"/>
-                </a:solidFill>
-                <a:latin typeface="Segoe UI"/>
-              </a:rPr>
-              <a:t>Timeframe set by Visa; not specified in Visa Rules</a:t>
-            </a:r>
-          </a:p>
-        </p:txBody>
-      </p:sp>
-      <p:sp>
-        <p:nvSpPr>
-          <p:cNvPr id="975" name="Diamond 974"/>
-          <p:cNvSpPr/>
-          <p:nvPr/>
-        </p:nvSpPr>
-        <p:spPr>
-          <a:xfrm>
-            <a:off x="2010000" y="2425660"/>
-            <a:ext cx="1296000" cy="868680"/>
-          </a:xfrm>
-          <a:prstGeom prst="diamond">
-            <a:avLst/>
-          </a:prstGeom>
-          <a:solidFill>
-            <a:srgbClr val="FFFFFF"/>
-          </a:solidFill>
-          <a:ln w="12700">
-            <a:solidFill>
-              <a:srgbClr val="BFBFBF"/>
-            </a:solidFill>
-          </a:ln>
-          <a:effectLst/>
-        </p:spPr>
-        <p:style>
-          <a:lnRef idx="1">
-            <a:schemeClr val="accent1"/>
-          </a:lnRef>
-          <a:fillRef idx="3">
-            <a:schemeClr val="accent1"/>
-          </a:fillRef>
-          <a:effectRef idx="2">
-            <a:schemeClr val="accent1"/>
-          </a:effectRef>
-          <a:fontRef idx="minor">
-            <a:schemeClr val="lt1"/>
-          </a:fontRef>
-        </p:style>
-        <p:txBody>
-          <a:bodyPr rtlCol="0" anchor="ctr" wrap="square" lIns="0" rIns="0" tIns="36576" bIns="36576"/>
-          <a:lstStyle/>
-          <a:p>
-            <a:pPr algn="ctr"/>
-            <a:r>
-              <a:rPr sz="900" b="1" i="0">
-                <a:solidFill>
-                  <a:srgbClr val="404040"/>
-                </a:solidFill>
-                <a:latin typeface="Segoe UI"/>
-              </a:rPr>
-              <a:t>Ruled in Beem's favor?</a:t>
-            </a:r>
-          </a:p>
-        </p:txBody>
-      </p:sp>
-      <p:sp>
-        <p:nvSpPr>
-          <p:cNvPr id="976" name="Rounded Rectangle 975"/>
-          <p:cNvSpPr/>
-          <p:nvPr/>
-        </p:nvSpPr>
-        <p:spPr>
-          <a:xfrm>
-            <a:off x="3756000" y="2500000"/>
-            <a:ext cx="1260000" cy="720000"/>
-          </a:xfrm>
-          <a:prstGeom prst="roundRect">
-            <a:avLst>
-              <a:gd name="adj" fmla="val 10000"/>
-            </a:avLst>
-          </a:prstGeom>
-          <a:noFill/>
-          <a:ln w="12700">
-            <a:solidFill>
-              <a:srgbClr val="BFBFBF"/>
-            </a:solidFill>
-          </a:ln>
-          <a:effectLst/>
-        </p:spPr>
-        <p:style>
-          <a:lnRef idx="1">
-            <a:schemeClr val="accent1"/>
-          </a:lnRef>
-          <a:fillRef idx="3">
-            <a:schemeClr val="accent1"/>
-          </a:fillRef>
-          <a:effectRef idx="2">
-            <a:schemeClr val="accent1"/>
-          </a:effectRef>
-          <a:fontRef idx="minor">
-            <a:schemeClr val="lt1"/>
-          </a:fontRef>
-        </p:style>
-        <p:txBody>
-          <a:bodyPr rtlCol="0" anchor="ctr" wrap="square" lIns="45720" rIns="45720" tIns="36576" bIns="36576"/>
-          <a:lstStyle/>
-          <a:p>
-            <a:pPr algn="ctr"/>
-            <a:r>
-              <a:rPr sz="900" b="1" i="0">
-                <a:solidFill>
-                  <a:srgbClr val="404040"/>
-                </a:solidFill>
-                <a:latin typeface="Segoe UI"/>
-              </a:rPr>
-              <a:t>Finalize or reverse the provisional credit, as applicable</a:t>
-            </a:r>
-          </a:p>
-        </p:txBody>
-      </p:sp>
-      <p:sp>
-        <p:nvSpPr>
-          <p:cNvPr id="977" name="TextBox 976"/>
-          <p:cNvSpPr txBox="1"/>
-          <p:nvPr/>
-        </p:nvSpPr>
-        <p:spPr>
-          <a:xfrm>
-            <a:off x="3716000" y="3260000"/>
-            <a:ext cx="1340000" cy="430000"/>
-          </a:xfrm>
-          <a:prstGeom prst="rect">
-            <a:avLst/>
-          </a:prstGeom>
-          <a:noFill/>
-        </p:spPr>
-        <p:txBody>
-          <a:bodyPr wrap="square" lIns="45720" rIns="45720" tIns="36576" bIns="36576" anchor="ctr">
-            <a:spAutoFit/>
-          </a:bodyPr>
-          <a:lstStyle/>
-          <a:p>
-            <a:pPr algn="ctr"/>
-            <a:r>
-              <a:rPr sz="700" b="0" i="1">
-                <a:solidFill>
-                  <a:srgbClr val="404040"/>
-                </a:solidFill>
-                <a:latin typeface="Segoe UI"/>
-              </a:rPr>
-              <a:t>Retain credit if ruled in Beem's favor; reverse if ruled against Beem</a:t>
-            </a:r>
-          </a:p>
-        </p:txBody>
-      </p:sp>
-      <p:sp>
-        <p:nvSpPr>
-          <p:cNvPr id="978" name="Rounded Rectangle 977"/>
-          <p:cNvSpPr/>
-          <p:nvPr/>
-        </p:nvSpPr>
-        <p:spPr>
-          <a:xfrm>
-            <a:off x="5316000" y="2500000"/>
+            <a:off x="500000" y="2500000"/>
             <a:ext cx="1260000" cy="720000"/>
           </a:xfrm>
           <a:prstGeom prst="roundRect">
@@ -23868,13 +26039,13 @@
       </p:sp>
       <p:sp>
         <p:nvSpPr>
-          <p:cNvPr id="979" name="Rounded Rectangle 978"/>
+          <p:cNvPr id="974" name="Rounded Rectangle 973"/>
           <p:cNvSpPr/>
           <p:nvPr/>
         </p:nvSpPr>
         <p:spPr>
           <a:xfrm>
-            <a:off x="6876000" y="2500000"/>
+            <a:off x="3100000" y="2500000"/>
             <a:ext cx="1260000" cy="720000"/>
           </a:xfrm>
           <a:prstGeom prst="roundRect">
@@ -23923,13 +26094,13 @@
       </p:sp>
       <p:sp>
         <p:nvSpPr>
-          <p:cNvPr id="980" name="Rounded Rectangle 979"/>
+          <p:cNvPr id="975" name="Rounded Rectangle 974"/>
           <p:cNvSpPr/>
           <p:nvPr/>
         </p:nvSpPr>
         <p:spPr>
           <a:xfrm>
-            <a:off x="8436000" y="2500000"/>
+            <a:off x="5700000" y="2500000"/>
             <a:ext cx="1260000" cy="720000"/>
           </a:xfrm>
           <a:prstGeom prst="roundRect">
@@ -23978,13 +26149,13 @@
       </p:sp>
       <p:sp>
         <p:nvSpPr>
-          <p:cNvPr id="981" name="Rounded Rectangle 980"/>
+          <p:cNvPr id="976" name="Rounded Rectangle 975"/>
           <p:cNvSpPr/>
           <p:nvPr/>
         </p:nvSpPr>
         <p:spPr>
           <a:xfrm>
-            <a:off x="9996000" y="2500000"/>
+            <a:off x="8300000" y="2500000"/>
             <a:ext cx="1260000" cy="720000"/>
           </a:xfrm>
           <a:prstGeom prst="roundRect">
@@ -24033,14 +26204,14 @@
       </p:sp>
       <p:cxnSp>
         <p:nvCxnSpPr>
-          <p:cNvPr id="982" name="Connector 981"/>
+          <p:cNvPr id="977" name="Connector 976"/>
           <p:cNvCxnSpPr/>
           <p:nvPr/>
         </p:nvCxnSpPr>
         <p:spPr>
           <a:xfrm>
-            <a:off x="1560000" y="2860000"/>
-            <a:ext cx="450000" cy="0"/>
+            <a:off x="1760000" y="2860000"/>
+            <a:ext cx="1340000" cy="0"/>
           </a:xfrm>
           <a:prstGeom prst="line">
             <a:avLst/>
@@ -24069,156 +26240,14 @@
       </p:cxnSp>
       <p:cxnSp>
         <p:nvCxnSpPr>
-          <p:cNvPr id="983" name="Connector 982"/>
+          <p:cNvPr id="978" name="Connector 977"/>
           <p:cNvCxnSpPr/>
           <p:nvPr/>
         </p:nvCxnSpPr>
         <p:spPr>
           <a:xfrm>
-            <a:off x="3306000" y="2770000"/>
-            <a:ext cx="450000" cy="0"/>
-          </a:xfrm>
-          <a:prstGeom prst="line">
-            <a:avLst/>
-          </a:prstGeom>
-          <a:ln w="19050">
-            <a:solidFill>
-              <a:srgbClr val="9B9B9B"/>
-            </a:solidFill>
-            <a:tailEnd type="triangle" w="med" len="med"/>
-          </a:ln>
-        </p:spPr>
-        <p:style>
-          <a:lnRef idx="2">
-            <a:schemeClr val="accent1"/>
-          </a:lnRef>
-          <a:fillRef idx="0">
-            <a:schemeClr val="accent1"/>
-          </a:fillRef>
-          <a:effectRef idx="1">
-            <a:schemeClr val="accent1"/>
-          </a:effectRef>
-          <a:fontRef idx="minor">
-            <a:schemeClr val="tx1"/>
-          </a:fontRef>
-        </p:style>
-      </p:cxnSp>
-      <p:sp>
-        <p:nvSpPr>
-          <p:cNvPr id="984" name="TextBox 983"/>
-          <p:cNvSpPr txBox="1"/>
-          <p:nvPr/>
-        </p:nvSpPr>
-        <p:spPr>
-          <a:xfrm>
-            <a:off x="3046000" y="2480000"/>
-            <a:ext cx="620000" cy="260000"/>
-          </a:xfrm>
-          <a:prstGeom prst="rect">
-            <a:avLst/>
-          </a:prstGeom>
-          <a:noFill/>
-        </p:spPr>
-        <p:txBody>
-          <a:bodyPr wrap="square" lIns="45720" rIns="45720" tIns="36576" bIns="36576" anchor="ctr">
-            <a:spAutoFit/>
-          </a:bodyPr>
-          <a:lstStyle/>
-          <a:p>
-            <a:pPr algn="ctr"/>
-            <a:r>
-              <a:rPr sz="900" b="1" i="0">
-                <a:solidFill>
-                  <a:srgbClr val="009A44"/>
-                </a:solidFill>
-                <a:latin typeface="Segoe UI"/>
-              </a:rPr>
-              <a:t>Yes</a:t>
-            </a:r>
-          </a:p>
-        </p:txBody>
-      </p:sp>
-      <p:cxnSp>
-        <p:nvCxnSpPr>
-          <p:cNvPr id="985" name="Connector 984"/>
-          <p:cNvCxnSpPr/>
-          <p:nvPr/>
-        </p:nvCxnSpPr>
-        <p:spPr>
-          <a:xfrm flipV="1">
-            <a:off x="2658000" y="3220000"/>
-            <a:ext cx="1728000" cy="74340"/>
-          </a:xfrm>
-          <a:prstGeom prst="bentConnector3">
-            <a:avLst/>
-          </a:prstGeom>
-          <a:ln w="19050">
-            <a:solidFill>
-              <a:srgbClr val="9B9B9B"/>
-            </a:solidFill>
-            <a:tailEnd type="triangle" w="med" len="med"/>
-          </a:ln>
-        </p:spPr>
-        <p:style>
-          <a:lnRef idx="2">
-            <a:schemeClr val="accent1"/>
-          </a:lnRef>
-          <a:fillRef idx="0">
-            <a:schemeClr val="accent1"/>
-          </a:fillRef>
-          <a:effectRef idx="1">
-            <a:schemeClr val="accent1"/>
-          </a:effectRef>
-          <a:fontRef idx="minor">
-            <a:schemeClr val="tx1"/>
-          </a:fontRef>
-        </p:style>
-      </p:cxnSp>
-      <p:sp>
-        <p:nvSpPr>
-          <p:cNvPr id="986" name="TextBox 985"/>
-          <p:cNvSpPr txBox="1"/>
-          <p:nvPr/>
-        </p:nvSpPr>
-        <p:spPr>
-          <a:xfrm>
-            <a:off x="2698000" y="3324340"/>
-            <a:ext cx="620000" cy="260000"/>
-          </a:xfrm>
-          <a:prstGeom prst="rect">
-            <a:avLst/>
-          </a:prstGeom>
-          <a:noFill/>
-        </p:spPr>
-        <p:txBody>
-          <a:bodyPr wrap="square" lIns="45720" rIns="45720" tIns="36576" bIns="36576" anchor="ctr">
-            <a:spAutoFit/>
-          </a:bodyPr>
-          <a:lstStyle/>
-          <a:p>
-            <a:pPr algn="ctr"/>
-            <a:r>
-              <a:rPr sz="900" b="1" i="0">
-                <a:solidFill>
-                  <a:srgbClr val="C00000"/>
-                </a:solidFill>
-                <a:latin typeface="Segoe UI"/>
-              </a:rPr>
-              <a:t>No</a:t>
-            </a:r>
-          </a:p>
-        </p:txBody>
-      </p:sp>
-      <p:cxnSp>
-        <p:nvCxnSpPr>
-          <p:cNvPr id="987" name="Connector 986"/>
-          <p:cNvCxnSpPr/>
-          <p:nvPr/>
-        </p:nvCxnSpPr>
-        <p:spPr>
-          <a:xfrm>
-            <a:off x="5016000" y="2860000"/>
-            <a:ext cx="300000" cy="0"/>
+            <a:off x="4360000" y="2860000"/>
+            <a:ext cx="1340000" cy="0"/>
           </a:xfrm>
           <a:prstGeom prst="line">
             <a:avLst/>
@@ -24247,86 +26276,14 @@
       </p:cxnSp>
       <p:cxnSp>
         <p:nvCxnSpPr>
-          <p:cNvPr id="988" name="Connector 987"/>
+          <p:cNvPr id="979" name="Connector 978"/>
           <p:cNvCxnSpPr/>
           <p:nvPr/>
         </p:nvCxnSpPr>
         <p:spPr>
           <a:xfrm>
-            <a:off x="6576000" y="2860000"/>
-            <a:ext cx="300000" cy="0"/>
-          </a:xfrm>
-          <a:prstGeom prst="line">
-            <a:avLst/>
-          </a:prstGeom>
-          <a:ln w="19050">
-            <a:solidFill>
-              <a:srgbClr val="9B9B9B"/>
-            </a:solidFill>
-            <a:tailEnd type="triangle" w="med" len="med"/>
-          </a:ln>
-        </p:spPr>
-        <p:style>
-          <a:lnRef idx="2">
-            <a:schemeClr val="accent1"/>
-          </a:lnRef>
-          <a:fillRef idx="0">
-            <a:schemeClr val="accent1"/>
-          </a:fillRef>
-          <a:effectRef idx="1">
-            <a:schemeClr val="accent1"/>
-          </a:effectRef>
-          <a:fontRef idx="minor">
-            <a:schemeClr val="tx1"/>
-          </a:fontRef>
-        </p:style>
-      </p:cxnSp>
-      <p:cxnSp>
-        <p:nvCxnSpPr>
-          <p:cNvPr id="989" name="Connector 988"/>
-          <p:cNvCxnSpPr/>
-          <p:nvPr/>
-        </p:nvCxnSpPr>
-        <p:spPr>
-          <a:xfrm>
-            <a:off x="8136000" y="2860000"/>
-            <a:ext cx="300000" cy="0"/>
-          </a:xfrm>
-          <a:prstGeom prst="line">
-            <a:avLst/>
-          </a:prstGeom>
-          <a:ln w="19050">
-            <a:solidFill>
-              <a:srgbClr val="9B9B9B"/>
-            </a:solidFill>
-            <a:tailEnd type="triangle" w="med" len="med"/>
-          </a:ln>
-        </p:spPr>
-        <p:style>
-          <a:lnRef idx="2">
-            <a:schemeClr val="accent1"/>
-          </a:lnRef>
-          <a:fillRef idx="0">
-            <a:schemeClr val="accent1"/>
-          </a:fillRef>
-          <a:effectRef idx="1">
-            <a:schemeClr val="accent1"/>
-          </a:effectRef>
-          <a:fontRef idx="minor">
-            <a:schemeClr val="tx1"/>
-          </a:fontRef>
-        </p:style>
-      </p:cxnSp>
-      <p:cxnSp>
-        <p:nvCxnSpPr>
-          <p:cNvPr id="990" name="Connector 989"/>
-          <p:cNvCxnSpPr/>
-          <p:nvPr/>
-        </p:nvCxnSpPr>
-        <p:spPr>
-          <a:xfrm>
-            <a:off x="9696000" y="2860000"/>
-            <a:ext cx="300000" cy="0"/>
+            <a:off x="6960000" y="2860000"/>
+            <a:ext cx="1340000" cy="0"/>
           </a:xfrm>
           <a:prstGeom prst="line">
             <a:avLst/>
